--- a/Projects/MISQ/MISQ round 2/writeup/Figure_260601_xin.pptx
+++ b/Projects/MISQ/MISQ round 2/writeup/Figure_260601_xin.pptx
@@ -7,22 +7,24 @@
   <p:sldIdLst>
     <p:sldId id="271" r:id="rId2"/>
     <p:sldId id="275" r:id="rId3"/>
-    <p:sldId id="267" r:id="rId4"/>
-    <p:sldId id="274" r:id="rId5"/>
-    <p:sldId id="273" r:id="rId6"/>
-    <p:sldId id="270" r:id="rId7"/>
-    <p:sldId id="269" r:id="rId8"/>
-    <p:sldId id="263" r:id="rId9"/>
-    <p:sldId id="266" r:id="rId10"/>
-    <p:sldId id="265" r:id="rId11"/>
-    <p:sldId id="264" r:id="rId12"/>
-    <p:sldId id="261" r:id="rId13"/>
-    <p:sldId id="259" r:id="rId14"/>
-    <p:sldId id="260" r:id="rId15"/>
-    <p:sldId id="258" r:id="rId16"/>
-    <p:sldId id="256" r:id="rId17"/>
-    <p:sldId id="257" r:id="rId18"/>
-    <p:sldId id="262" r:id="rId19"/>
+    <p:sldId id="282" r:id="rId4"/>
+    <p:sldId id="281" r:id="rId5"/>
+    <p:sldId id="280" r:id="rId6"/>
+    <p:sldId id="274" r:id="rId7"/>
+    <p:sldId id="273" r:id="rId8"/>
+    <p:sldId id="270" r:id="rId9"/>
+    <p:sldId id="269" r:id="rId10"/>
+    <p:sldId id="263" r:id="rId11"/>
+    <p:sldId id="266" r:id="rId12"/>
+    <p:sldId id="265" r:id="rId13"/>
+    <p:sldId id="264" r:id="rId14"/>
+    <p:sldId id="261" r:id="rId15"/>
+    <p:sldId id="259" r:id="rId16"/>
+    <p:sldId id="260" r:id="rId17"/>
+    <p:sldId id="258" r:id="rId18"/>
+    <p:sldId id="256" r:id="rId19"/>
+    <p:sldId id="257" r:id="rId20"/>
+    <p:sldId id="262" r:id="rId21"/>
   </p:sldIdLst>
   <p:sldSz cx="12192000" cy="6858000"/>
   <p:notesSz cx="6858000" cy="9144000"/>
@@ -276,7 +278,7 @@
           <a:p>
             <a:fld id="{0E775E44-BF68-4D37-A7A3-8A7D48E34B1E}" type="datetimeFigureOut">
               <a:rPr lang="en-US" smtClean="0"/>
-              <a:t>5/31/2026</a:t>
+              <a:t>6/6/26</a:t>
             </a:fld>
             <a:endParaRPr lang="en-US"/>
           </a:p>
@@ -474,7 +476,7 @@
           <a:p>
             <a:fld id="{0E775E44-BF68-4D37-A7A3-8A7D48E34B1E}" type="datetimeFigureOut">
               <a:rPr lang="en-US" smtClean="0"/>
-              <a:t>5/31/2026</a:t>
+              <a:t>6/6/26</a:t>
             </a:fld>
             <a:endParaRPr lang="en-US"/>
           </a:p>
@@ -682,7 +684,7 @@
           <a:p>
             <a:fld id="{0E775E44-BF68-4D37-A7A3-8A7D48E34B1E}" type="datetimeFigureOut">
               <a:rPr lang="en-US" smtClean="0"/>
-              <a:t>5/31/2026</a:t>
+              <a:t>6/6/26</a:t>
             </a:fld>
             <a:endParaRPr lang="en-US"/>
           </a:p>
@@ -880,7 +882,7 @@
           <a:p>
             <a:fld id="{0E775E44-BF68-4D37-A7A3-8A7D48E34B1E}" type="datetimeFigureOut">
               <a:rPr lang="en-US" smtClean="0"/>
-              <a:t>5/31/2026</a:t>
+              <a:t>6/6/26</a:t>
             </a:fld>
             <a:endParaRPr lang="en-US"/>
           </a:p>
@@ -1155,7 +1157,7 @@
           <a:p>
             <a:fld id="{0E775E44-BF68-4D37-A7A3-8A7D48E34B1E}" type="datetimeFigureOut">
               <a:rPr lang="en-US" smtClean="0"/>
-              <a:t>5/31/2026</a:t>
+              <a:t>6/6/26</a:t>
             </a:fld>
             <a:endParaRPr lang="en-US"/>
           </a:p>
@@ -1420,7 +1422,7 @@
           <a:p>
             <a:fld id="{0E775E44-BF68-4D37-A7A3-8A7D48E34B1E}" type="datetimeFigureOut">
               <a:rPr lang="en-US" smtClean="0"/>
-              <a:t>5/31/2026</a:t>
+              <a:t>6/6/26</a:t>
             </a:fld>
             <a:endParaRPr lang="en-US"/>
           </a:p>
@@ -1832,7 +1834,7 @@
           <a:p>
             <a:fld id="{0E775E44-BF68-4D37-A7A3-8A7D48E34B1E}" type="datetimeFigureOut">
               <a:rPr lang="en-US" smtClean="0"/>
-              <a:t>5/31/2026</a:t>
+              <a:t>6/6/26</a:t>
             </a:fld>
             <a:endParaRPr lang="en-US"/>
           </a:p>
@@ -1973,7 +1975,7 @@
           <a:p>
             <a:fld id="{0E775E44-BF68-4D37-A7A3-8A7D48E34B1E}" type="datetimeFigureOut">
               <a:rPr lang="en-US" smtClean="0"/>
-              <a:t>5/31/2026</a:t>
+              <a:t>6/6/26</a:t>
             </a:fld>
             <a:endParaRPr lang="en-US"/>
           </a:p>
@@ -2086,7 +2088,7 @@
           <a:p>
             <a:fld id="{0E775E44-BF68-4D37-A7A3-8A7D48E34B1E}" type="datetimeFigureOut">
               <a:rPr lang="en-US" smtClean="0"/>
-              <a:t>5/31/2026</a:t>
+              <a:t>6/6/26</a:t>
             </a:fld>
             <a:endParaRPr lang="en-US"/>
           </a:p>
@@ -2397,7 +2399,7 @@
           <a:p>
             <a:fld id="{0E775E44-BF68-4D37-A7A3-8A7D48E34B1E}" type="datetimeFigureOut">
               <a:rPr lang="en-US" smtClean="0"/>
-              <a:t>5/31/2026</a:t>
+              <a:t>6/6/26</a:t>
             </a:fld>
             <a:endParaRPr lang="en-US"/>
           </a:p>
@@ -2685,7 +2687,7 @@
           <a:p>
             <a:fld id="{0E775E44-BF68-4D37-A7A3-8A7D48E34B1E}" type="datetimeFigureOut">
               <a:rPr lang="en-US" smtClean="0"/>
-              <a:t>5/31/2026</a:t>
+              <a:t>6/6/26</a:t>
             </a:fld>
             <a:endParaRPr lang="en-US"/>
           </a:p>
@@ -2926,7 +2928,7 @@
           <a:p>
             <a:fld id="{0E775E44-BF68-4D37-A7A3-8A7D48E34B1E}" type="datetimeFigureOut">
               <a:rPr lang="en-US" smtClean="0"/>
-              <a:t>5/31/2026</a:t>
+              <a:t>6/6/26</a:t>
             </a:fld>
             <a:endParaRPr lang="en-US"/>
           </a:p>
@@ -4870,6 +4872,1922 @@
         <p:cNvPr id="1" name="">
           <a:extLst>
             <a:ext uri="{FF2B5EF4-FFF2-40B4-BE49-F238E27FC236}">
+              <a16:creationId xmlns:a16="http://schemas.microsoft.com/office/drawing/2014/main" id="{1EA410EF-9DB5-850A-3184-A2689F6C608E}"/>
+            </a:ext>
+          </a:extLst>
+        </p:cNvPr>
+        <p:cNvGrpSpPr/>
+        <p:nvPr/>
+      </p:nvGrpSpPr>
+      <p:grpSpPr>
+        <a:xfrm>
+          <a:off x="0" y="0"/>
+          <a:ext cx="0" cy="0"/>
+          <a:chOff x="0" y="0"/>
+          <a:chExt cx="0" cy="0"/>
+        </a:xfrm>
+      </p:grpSpPr>
+      <p:sp>
+        <p:nvSpPr>
+          <p:cNvPr id="4" name="Rectangle 3">
+            <a:extLst>
+              <a:ext uri="{FF2B5EF4-FFF2-40B4-BE49-F238E27FC236}">
+                <a16:creationId xmlns:a16="http://schemas.microsoft.com/office/drawing/2014/main" id="{B73C661D-0D37-FA83-8DE1-42B17C54C890}"/>
+              </a:ext>
+            </a:extLst>
+          </p:cNvPr>
+          <p:cNvSpPr/>
+          <p:nvPr/>
+        </p:nvSpPr>
+        <p:spPr>
+          <a:xfrm>
+            <a:off x="4132897" y="3705838"/>
+            <a:ext cx="1828800" cy="640080"/>
+          </a:xfrm>
+          <a:prstGeom prst="rect">
+            <a:avLst/>
+          </a:prstGeom>
+          <a:ln>
+            <a:prstDash val="dash"/>
+          </a:ln>
+        </p:spPr>
+        <p:style>
+          <a:lnRef idx="2">
+            <a:schemeClr val="accent1"/>
+          </a:lnRef>
+          <a:fillRef idx="1">
+            <a:schemeClr val="lt1"/>
+          </a:fillRef>
+          <a:effectRef idx="0">
+            <a:schemeClr val="accent1"/>
+          </a:effectRef>
+          <a:fontRef idx="minor">
+            <a:schemeClr val="dk1"/>
+          </a:fontRef>
+        </p:style>
+        <p:txBody>
+          <a:bodyPr rtlCol="0" anchor="ctr"/>
+          <a:lstStyle/>
+          <a:p>
+            <a:pPr algn="ctr"/>
+            <a:r>
+              <a:rPr lang="en-US" dirty="0"/>
+              <a:t>In-depth Quality Assessment</a:t>
+            </a:r>
+          </a:p>
+        </p:txBody>
+      </p:sp>
+      <p:sp>
+        <p:nvSpPr>
+          <p:cNvPr id="5" name="Rectangle 4">
+            <a:extLst>
+              <a:ext uri="{FF2B5EF4-FFF2-40B4-BE49-F238E27FC236}">
+                <a16:creationId xmlns:a16="http://schemas.microsoft.com/office/drawing/2014/main" id="{A5BA183F-573C-6DD3-DC81-D87CD9C0C109}"/>
+              </a:ext>
+            </a:extLst>
+          </p:cNvPr>
+          <p:cNvSpPr/>
+          <p:nvPr/>
+        </p:nvSpPr>
+        <p:spPr>
+          <a:xfrm>
+            <a:off x="6096000" y="1777127"/>
+            <a:ext cx="1463040" cy="640080"/>
+          </a:xfrm>
+          <a:prstGeom prst="rect">
+            <a:avLst/>
+          </a:prstGeom>
+        </p:spPr>
+        <p:style>
+          <a:lnRef idx="2">
+            <a:schemeClr val="accent1"/>
+          </a:lnRef>
+          <a:fillRef idx="1">
+            <a:schemeClr val="lt1"/>
+          </a:fillRef>
+          <a:effectRef idx="0">
+            <a:schemeClr val="accent1"/>
+          </a:effectRef>
+          <a:fontRef idx="minor">
+            <a:schemeClr val="dk1"/>
+          </a:fontRef>
+        </p:style>
+        <p:txBody>
+          <a:bodyPr rtlCol="0" anchor="ctr"/>
+          <a:lstStyle/>
+          <a:p>
+            <a:pPr algn="ctr"/>
+            <a:r>
+              <a:rPr lang="en-US" dirty="0"/>
+              <a:t>AI label</a:t>
+            </a:r>
+          </a:p>
+        </p:txBody>
+      </p:sp>
+      <p:cxnSp>
+        <p:nvCxnSpPr>
+          <p:cNvPr id="7" name="Straight Arrow Connector 6">
+            <a:extLst>
+              <a:ext uri="{FF2B5EF4-FFF2-40B4-BE49-F238E27FC236}">
+                <a16:creationId xmlns:a16="http://schemas.microsoft.com/office/drawing/2014/main" id="{4BB26CBB-C2F9-6299-E7FD-CBDE498D645C}"/>
+              </a:ext>
+            </a:extLst>
+          </p:cNvPr>
+          <p:cNvCxnSpPr>
+            <a:cxnSpLocks/>
+            <a:stCxn id="8" idx="3"/>
+            <a:endCxn id="66" idx="1"/>
+          </p:cNvCxnSpPr>
+          <p:nvPr/>
+        </p:nvCxnSpPr>
+        <p:spPr>
+          <a:xfrm flipV="1">
+            <a:off x="3235885" y="3051284"/>
+            <a:ext cx="897012" cy="451716"/>
+          </a:xfrm>
+          <a:prstGeom prst="straightConnector1">
+            <a:avLst/>
+          </a:prstGeom>
+          <a:ln>
+            <a:tailEnd type="triangle"/>
+          </a:ln>
+        </p:spPr>
+        <p:style>
+          <a:lnRef idx="2">
+            <a:schemeClr val="accent1"/>
+          </a:lnRef>
+          <a:fillRef idx="0">
+            <a:schemeClr val="accent1"/>
+          </a:fillRef>
+          <a:effectRef idx="1">
+            <a:schemeClr val="accent1"/>
+          </a:effectRef>
+          <a:fontRef idx="minor">
+            <a:schemeClr val="tx1"/>
+          </a:fontRef>
+        </p:style>
+      </p:cxnSp>
+      <p:sp>
+        <p:nvSpPr>
+          <p:cNvPr id="8" name="Rectangle 7">
+            <a:extLst>
+              <a:ext uri="{FF2B5EF4-FFF2-40B4-BE49-F238E27FC236}">
+                <a16:creationId xmlns:a16="http://schemas.microsoft.com/office/drawing/2014/main" id="{B7319951-2C01-BE9C-7DCF-A8BA049DE7EB}"/>
+              </a:ext>
+            </a:extLst>
+          </p:cNvPr>
+          <p:cNvSpPr/>
+          <p:nvPr/>
+        </p:nvSpPr>
+        <p:spPr>
+          <a:xfrm>
+            <a:off x="1772845" y="3182960"/>
+            <a:ext cx="1463040" cy="640080"/>
+          </a:xfrm>
+          <a:prstGeom prst="rect">
+            <a:avLst/>
+          </a:prstGeom>
+        </p:spPr>
+        <p:style>
+          <a:lnRef idx="2">
+            <a:schemeClr val="accent1"/>
+          </a:lnRef>
+          <a:fillRef idx="1">
+            <a:schemeClr val="lt1"/>
+          </a:fillRef>
+          <a:effectRef idx="0">
+            <a:schemeClr val="accent1"/>
+          </a:effectRef>
+          <a:fontRef idx="minor">
+            <a:schemeClr val="dk1"/>
+          </a:fontRef>
+        </p:style>
+        <p:txBody>
+          <a:bodyPr rtlCol="0" anchor="ctr"/>
+          <a:lstStyle/>
+          <a:p>
+            <a:pPr algn="ctr"/>
+            <a:r>
+              <a:rPr lang="en-US" dirty="0"/>
+              <a:t>(AI) Content</a:t>
+            </a:r>
+          </a:p>
+        </p:txBody>
+      </p:sp>
+      <p:cxnSp>
+        <p:nvCxnSpPr>
+          <p:cNvPr id="22" name="Straight Arrow Connector 21">
+            <a:extLst>
+              <a:ext uri="{FF2B5EF4-FFF2-40B4-BE49-F238E27FC236}">
+                <a16:creationId xmlns:a16="http://schemas.microsoft.com/office/drawing/2014/main" id="{DB89A151-0238-DDCE-A2E9-DF8BD9E336EB}"/>
+              </a:ext>
+            </a:extLst>
+          </p:cNvPr>
+          <p:cNvCxnSpPr>
+            <a:cxnSpLocks/>
+            <a:stCxn id="5" idx="2"/>
+          </p:cNvCxnSpPr>
+          <p:nvPr/>
+        </p:nvCxnSpPr>
+        <p:spPr>
+          <a:xfrm>
+            <a:off x="6827520" y="2417207"/>
+            <a:ext cx="221091" cy="605661"/>
+          </a:xfrm>
+          <a:prstGeom prst="straightConnector1">
+            <a:avLst/>
+          </a:prstGeom>
+          <a:ln>
+            <a:tailEnd type="triangle"/>
+          </a:ln>
+        </p:spPr>
+        <p:style>
+          <a:lnRef idx="2">
+            <a:schemeClr val="accent1"/>
+          </a:lnRef>
+          <a:fillRef idx="0">
+            <a:schemeClr val="accent1"/>
+          </a:fillRef>
+          <a:effectRef idx="1">
+            <a:schemeClr val="accent1"/>
+          </a:effectRef>
+          <a:fontRef idx="minor">
+            <a:schemeClr val="tx1"/>
+          </a:fontRef>
+        </p:style>
+      </p:cxnSp>
+      <p:cxnSp>
+        <p:nvCxnSpPr>
+          <p:cNvPr id="38" name="Straight Arrow Connector 37">
+            <a:extLst>
+              <a:ext uri="{FF2B5EF4-FFF2-40B4-BE49-F238E27FC236}">
+                <a16:creationId xmlns:a16="http://schemas.microsoft.com/office/drawing/2014/main" id="{1BEB447F-5AF7-AE25-96DB-D8149D924F59}"/>
+              </a:ext>
+            </a:extLst>
+          </p:cNvPr>
+          <p:cNvCxnSpPr>
+            <a:cxnSpLocks/>
+            <a:stCxn id="8" idx="3"/>
+            <a:endCxn id="4" idx="1"/>
+          </p:cNvCxnSpPr>
+          <p:nvPr/>
+        </p:nvCxnSpPr>
+        <p:spPr>
+          <a:xfrm>
+            <a:off x="3235885" y="3503000"/>
+            <a:ext cx="897012" cy="522878"/>
+          </a:xfrm>
+          <a:prstGeom prst="straightConnector1">
+            <a:avLst/>
+          </a:prstGeom>
+          <a:ln>
+            <a:tailEnd type="triangle"/>
+          </a:ln>
+        </p:spPr>
+        <p:style>
+          <a:lnRef idx="2">
+            <a:schemeClr val="accent1"/>
+          </a:lnRef>
+          <a:fillRef idx="0">
+            <a:schemeClr val="accent1"/>
+          </a:fillRef>
+          <a:effectRef idx="1">
+            <a:schemeClr val="accent1"/>
+          </a:effectRef>
+          <a:fontRef idx="minor">
+            <a:schemeClr val="tx1"/>
+          </a:fontRef>
+        </p:style>
+      </p:cxnSp>
+      <p:sp>
+        <p:nvSpPr>
+          <p:cNvPr id="13" name="Rectangle 12">
+            <a:extLst>
+              <a:ext uri="{FF2B5EF4-FFF2-40B4-BE49-F238E27FC236}">
+                <a16:creationId xmlns:a16="http://schemas.microsoft.com/office/drawing/2014/main" id="{50FCAEF6-AFCE-EC54-4F41-5425ACB2692E}"/>
+              </a:ext>
+            </a:extLst>
+          </p:cNvPr>
+          <p:cNvSpPr/>
+          <p:nvPr/>
+        </p:nvSpPr>
+        <p:spPr>
+          <a:xfrm>
+            <a:off x="8099455" y="2731244"/>
+            <a:ext cx="1463040" cy="640080"/>
+          </a:xfrm>
+          <a:prstGeom prst="rect">
+            <a:avLst/>
+          </a:prstGeom>
+        </p:spPr>
+        <p:style>
+          <a:lnRef idx="2">
+            <a:schemeClr val="accent1"/>
+          </a:lnRef>
+          <a:fillRef idx="1">
+            <a:schemeClr val="lt1"/>
+          </a:fillRef>
+          <a:effectRef idx="0">
+            <a:schemeClr val="accent1"/>
+          </a:effectRef>
+          <a:fontRef idx="minor">
+            <a:schemeClr val="dk1"/>
+          </a:fontRef>
+        </p:style>
+        <p:txBody>
+          <a:bodyPr rtlCol="0" anchor="ctr"/>
+          <a:lstStyle/>
+          <a:p>
+            <a:pPr algn="ctr"/>
+            <a:r>
+              <a:rPr lang="en-US" dirty="0"/>
+              <a:t>Human Contribution</a:t>
+            </a:r>
+          </a:p>
+        </p:txBody>
+      </p:sp>
+      <p:sp>
+        <p:nvSpPr>
+          <p:cNvPr id="66" name="Rectangle 65">
+            <a:extLst>
+              <a:ext uri="{FF2B5EF4-FFF2-40B4-BE49-F238E27FC236}">
+                <a16:creationId xmlns:a16="http://schemas.microsoft.com/office/drawing/2014/main" id="{96E4DC5F-5706-4409-8AED-4125DB42B70A}"/>
+              </a:ext>
+            </a:extLst>
+          </p:cNvPr>
+          <p:cNvSpPr/>
+          <p:nvPr/>
+        </p:nvSpPr>
+        <p:spPr>
+          <a:xfrm>
+            <a:off x="4132897" y="2731244"/>
+            <a:ext cx="1828800" cy="640080"/>
+          </a:xfrm>
+          <a:prstGeom prst="rect">
+            <a:avLst/>
+          </a:prstGeom>
+          <a:ln>
+            <a:prstDash val="dash"/>
+          </a:ln>
+        </p:spPr>
+        <p:style>
+          <a:lnRef idx="2">
+            <a:schemeClr val="accent1"/>
+          </a:lnRef>
+          <a:fillRef idx="1">
+            <a:schemeClr val="lt1"/>
+          </a:fillRef>
+          <a:effectRef idx="0">
+            <a:schemeClr val="accent1"/>
+          </a:effectRef>
+          <a:fontRef idx="minor">
+            <a:schemeClr val="dk1"/>
+          </a:fontRef>
+        </p:style>
+        <p:txBody>
+          <a:bodyPr rtlCol="0" anchor="ctr"/>
+          <a:lstStyle/>
+          <a:p>
+            <a:pPr algn="ctr"/>
+            <a:r>
+              <a:rPr lang="en-US" dirty="0"/>
+              <a:t>Shallow Quality Signal</a:t>
+            </a:r>
+          </a:p>
+        </p:txBody>
+      </p:sp>
+      <p:cxnSp>
+        <p:nvCxnSpPr>
+          <p:cNvPr id="25" name="Straight Arrow Connector 24">
+            <a:extLst>
+              <a:ext uri="{FF2B5EF4-FFF2-40B4-BE49-F238E27FC236}">
+                <a16:creationId xmlns:a16="http://schemas.microsoft.com/office/drawing/2014/main" id="{FC0FBB81-F261-8A64-A8D1-F23157274401}"/>
+              </a:ext>
+            </a:extLst>
+          </p:cNvPr>
+          <p:cNvCxnSpPr>
+            <a:cxnSpLocks/>
+            <a:stCxn id="66" idx="3"/>
+            <a:endCxn id="13" idx="1"/>
+          </p:cNvCxnSpPr>
+          <p:nvPr/>
+        </p:nvCxnSpPr>
+        <p:spPr>
+          <a:xfrm>
+            <a:off x="5961697" y="3051284"/>
+            <a:ext cx="2137758" cy="0"/>
+          </a:xfrm>
+          <a:prstGeom prst="straightConnector1">
+            <a:avLst/>
+          </a:prstGeom>
+          <a:ln>
+            <a:tailEnd type="triangle"/>
+          </a:ln>
+        </p:spPr>
+        <p:style>
+          <a:lnRef idx="2">
+            <a:schemeClr val="accent1"/>
+          </a:lnRef>
+          <a:fillRef idx="0">
+            <a:schemeClr val="accent1"/>
+          </a:fillRef>
+          <a:effectRef idx="1">
+            <a:schemeClr val="accent1"/>
+          </a:effectRef>
+          <a:fontRef idx="minor">
+            <a:schemeClr val="tx1"/>
+          </a:fontRef>
+        </p:style>
+      </p:cxnSp>
+      <p:cxnSp>
+        <p:nvCxnSpPr>
+          <p:cNvPr id="30" name="Straight Arrow Connector 29">
+            <a:extLst>
+              <a:ext uri="{FF2B5EF4-FFF2-40B4-BE49-F238E27FC236}">
+                <a16:creationId xmlns:a16="http://schemas.microsoft.com/office/drawing/2014/main" id="{F78395F3-A01C-DB5F-1FC9-D0B3A0711291}"/>
+              </a:ext>
+            </a:extLst>
+          </p:cNvPr>
+          <p:cNvCxnSpPr>
+            <a:cxnSpLocks/>
+            <a:stCxn id="4" idx="3"/>
+            <a:endCxn id="2" idx="1"/>
+          </p:cNvCxnSpPr>
+          <p:nvPr/>
+        </p:nvCxnSpPr>
+        <p:spPr>
+          <a:xfrm>
+            <a:off x="5961697" y="4025878"/>
+            <a:ext cx="4190508" cy="0"/>
+          </a:xfrm>
+          <a:prstGeom prst="straightConnector1">
+            <a:avLst/>
+          </a:prstGeom>
+          <a:ln>
+            <a:tailEnd type="triangle"/>
+          </a:ln>
+        </p:spPr>
+        <p:style>
+          <a:lnRef idx="2">
+            <a:schemeClr val="accent1"/>
+          </a:lnRef>
+          <a:fillRef idx="0">
+            <a:schemeClr val="accent1"/>
+          </a:fillRef>
+          <a:effectRef idx="1">
+            <a:schemeClr val="accent1"/>
+          </a:effectRef>
+          <a:fontRef idx="minor">
+            <a:schemeClr val="tx1"/>
+          </a:fontRef>
+        </p:style>
+      </p:cxnSp>
+      <p:cxnSp>
+        <p:nvCxnSpPr>
+          <p:cNvPr id="34" name="Straight Arrow Connector 33">
+            <a:extLst>
+              <a:ext uri="{FF2B5EF4-FFF2-40B4-BE49-F238E27FC236}">
+                <a16:creationId xmlns:a16="http://schemas.microsoft.com/office/drawing/2014/main" id="{8CC37E2D-2599-3C52-4387-5757C48330D9}"/>
+              </a:ext>
+            </a:extLst>
+          </p:cNvPr>
+          <p:cNvCxnSpPr>
+            <a:cxnSpLocks/>
+          </p:cNvCxnSpPr>
+          <p:nvPr/>
+        </p:nvCxnSpPr>
+        <p:spPr>
+          <a:xfrm flipH="1">
+            <a:off x="6403315" y="2414205"/>
+            <a:ext cx="424205" cy="1610318"/>
+          </a:xfrm>
+          <a:prstGeom prst="straightConnector1">
+            <a:avLst/>
+          </a:prstGeom>
+          <a:ln>
+            <a:tailEnd type="triangle"/>
+          </a:ln>
+        </p:spPr>
+        <p:style>
+          <a:lnRef idx="2">
+            <a:schemeClr val="accent1"/>
+          </a:lnRef>
+          <a:fillRef idx="0">
+            <a:schemeClr val="accent1"/>
+          </a:fillRef>
+          <a:effectRef idx="1">
+            <a:schemeClr val="accent1"/>
+          </a:effectRef>
+          <a:fontRef idx="minor">
+            <a:schemeClr val="tx1"/>
+          </a:fontRef>
+        </p:style>
+      </p:cxnSp>
+      <p:sp>
+        <p:nvSpPr>
+          <p:cNvPr id="43" name="TextBox 42">
+            <a:extLst>
+              <a:ext uri="{FF2B5EF4-FFF2-40B4-BE49-F238E27FC236}">
+                <a16:creationId xmlns:a16="http://schemas.microsoft.com/office/drawing/2014/main" id="{2F5BC5DC-8D4C-9BD9-4AC6-BFF1778DBCB4}"/>
+              </a:ext>
+            </a:extLst>
+          </p:cNvPr>
+          <p:cNvSpPr txBox="1"/>
+          <p:nvPr/>
+        </p:nvSpPr>
+        <p:spPr>
+          <a:xfrm>
+            <a:off x="7333890" y="2750366"/>
+            <a:ext cx="263214" cy="369332"/>
+          </a:xfrm>
+          <a:prstGeom prst="rect">
+            <a:avLst/>
+          </a:prstGeom>
+          <a:noFill/>
+        </p:spPr>
+        <p:txBody>
+          <a:bodyPr wrap="none" rtlCol="0">
+            <a:spAutoFit/>
+          </a:bodyPr>
+          <a:lstStyle/>
+          <a:p>
+            <a:r>
+              <a:rPr lang="en-US" dirty="0"/>
+              <a:t>-</a:t>
+            </a:r>
+          </a:p>
+        </p:txBody>
+      </p:sp>
+      <p:sp>
+        <p:nvSpPr>
+          <p:cNvPr id="44" name="TextBox 43">
+            <a:extLst>
+              <a:ext uri="{FF2B5EF4-FFF2-40B4-BE49-F238E27FC236}">
+                <a16:creationId xmlns:a16="http://schemas.microsoft.com/office/drawing/2014/main" id="{7C6AD81A-5ADF-613A-61C5-1C9B94B60043}"/>
+              </a:ext>
+            </a:extLst>
+          </p:cNvPr>
+          <p:cNvSpPr txBox="1"/>
+          <p:nvPr/>
+        </p:nvSpPr>
+        <p:spPr>
+          <a:xfrm>
+            <a:off x="6788202" y="2417207"/>
+            <a:ext cx="308098" cy="369332"/>
+          </a:xfrm>
+          <a:prstGeom prst="rect">
+            <a:avLst/>
+          </a:prstGeom>
+          <a:noFill/>
+        </p:spPr>
+        <p:txBody>
+          <a:bodyPr wrap="none" rtlCol="0">
+            <a:spAutoFit/>
+          </a:bodyPr>
+          <a:lstStyle/>
+          <a:p>
+            <a:r>
+              <a:rPr lang="en-US" dirty="0"/>
+              <a:t>+</a:t>
+            </a:r>
+          </a:p>
+        </p:txBody>
+      </p:sp>
+      <p:sp>
+        <p:nvSpPr>
+          <p:cNvPr id="45" name="TextBox 44">
+            <a:extLst>
+              <a:ext uri="{FF2B5EF4-FFF2-40B4-BE49-F238E27FC236}">
+                <a16:creationId xmlns:a16="http://schemas.microsoft.com/office/drawing/2014/main" id="{D39691A6-0E75-B6B8-85B7-0DC05A3A4559}"/>
+              </a:ext>
+            </a:extLst>
+          </p:cNvPr>
+          <p:cNvSpPr txBox="1"/>
+          <p:nvPr/>
+        </p:nvSpPr>
+        <p:spPr>
+          <a:xfrm>
+            <a:off x="7350912" y="3705838"/>
+            <a:ext cx="308098" cy="369332"/>
+          </a:xfrm>
+          <a:prstGeom prst="rect">
+            <a:avLst/>
+          </a:prstGeom>
+          <a:noFill/>
+        </p:spPr>
+        <p:txBody>
+          <a:bodyPr wrap="none" rtlCol="0">
+            <a:spAutoFit/>
+          </a:bodyPr>
+          <a:lstStyle/>
+          <a:p>
+            <a:r>
+              <a:rPr lang="en-US" dirty="0"/>
+              <a:t>+</a:t>
+            </a:r>
+          </a:p>
+        </p:txBody>
+      </p:sp>
+      <p:cxnSp>
+        <p:nvCxnSpPr>
+          <p:cNvPr id="46" name="Straight Arrow Connector 45">
+            <a:extLst>
+              <a:ext uri="{FF2B5EF4-FFF2-40B4-BE49-F238E27FC236}">
+                <a16:creationId xmlns:a16="http://schemas.microsoft.com/office/drawing/2014/main" id="{9D4DFDD5-3D2B-7068-5BD0-E900ECAC71DE}"/>
+              </a:ext>
+            </a:extLst>
+          </p:cNvPr>
+          <p:cNvCxnSpPr>
+            <a:cxnSpLocks/>
+            <a:stCxn id="5" idx="3"/>
+            <a:endCxn id="13" idx="0"/>
+          </p:cNvCxnSpPr>
+          <p:nvPr/>
+        </p:nvCxnSpPr>
+        <p:spPr>
+          <a:xfrm>
+            <a:off x="7559040" y="2097167"/>
+            <a:ext cx="1271935" cy="634077"/>
+          </a:xfrm>
+          <a:prstGeom prst="straightConnector1">
+            <a:avLst/>
+          </a:prstGeom>
+          <a:ln>
+            <a:tailEnd type="triangle"/>
+          </a:ln>
+        </p:spPr>
+        <p:style>
+          <a:lnRef idx="2">
+            <a:schemeClr val="accent1"/>
+          </a:lnRef>
+          <a:fillRef idx="0">
+            <a:schemeClr val="accent1"/>
+          </a:fillRef>
+          <a:effectRef idx="1">
+            <a:schemeClr val="accent1"/>
+          </a:effectRef>
+          <a:fontRef idx="minor">
+            <a:schemeClr val="tx1"/>
+          </a:fontRef>
+        </p:style>
+      </p:cxnSp>
+      <p:sp>
+        <p:nvSpPr>
+          <p:cNvPr id="65" name="TextBox 64">
+            <a:extLst>
+              <a:ext uri="{FF2B5EF4-FFF2-40B4-BE49-F238E27FC236}">
+                <a16:creationId xmlns:a16="http://schemas.microsoft.com/office/drawing/2014/main" id="{7FC3BB4D-33AA-A0CB-67CB-83A12EB1B298}"/>
+              </a:ext>
+            </a:extLst>
+          </p:cNvPr>
+          <p:cNvSpPr txBox="1"/>
+          <p:nvPr/>
+        </p:nvSpPr>
+        <p:spPr>
+          <a:xfrm>
+            <a:off x="6575613" y="3033011"/>
+            <a:ext cx="1350563" cy="369332"/>
+          </a:xfrm>
+          <a:prstGeom prst="rect">
+            <a:avLst/>
+          </a:prstGeom>
+          <a:noFill/>
+        </p:spPr>
+        <p:txBody>
+          <a:bodyPr wrap="none" rtlCol="0">
+            <a:spAutoFit/>
+          </a:bodyPr>
+          <a:lstStyle/>
+          <a:p>
+            <a:r>
+              <a:rPr lang="en-US" dirty="0"/>
+              <a:t>Deterrence </a:t>
+            </a:r>
+          </a:p>
+        </p:txBody>
+      </p:sp>
+      <p:sp>
+        <p:nvSpPr>
+          <p:cNvPr id="67" name="TextBox 66">
+            <a:extLst>
+              <a:ext uri="{FF2B5EF4-FFF2-40B4-BE49-F238E27FC236}">
+                <a16:creationId xmlns:a16="http://schemas.microsoft.com/office/drawing/2014/main" id="{8CD1B5B1-B4D6-6156-57EB-2EF3F8AFCFCD}"/>
+              </a:ext>
+            </a:extLst>
+          </p:cNvPr>
+          <p:cNvSpPr txBox="1"/>
+          <p:nvPr/>
+        </p:nvSpPr>
+        <p:spPr>
+          <a:xfrm>
+            <a:off x="7926176" y="2097167"/>
+            <a:ext cx="1809598" cy="369332"/>
+          </a:xfrm>
+          <a:prstGeom prst="rect">
+            <a:avLst/>
+          </a:prstGeom>
+          <a:noFill/>
+        </p:spPr>
+        <p:txBody>
+          <a:bodyPr wrap="none" rtlCol="0">
+            <a:spAutoFit/>
+          </a:bodyPr>
+          <a:lstStyle/>
+          <a:p>
+            <a:r>
+              <a:rPr lang="en-US" dirty="0"/>
+              <a:t>Encouragement </a:t>
+            </a:r>
+          </a:p>
+        </p:txBody>
+      </p:sp>
+      <p:sp>
+        <p:nvSpPr>
+          <p:cNvPr id="73" name="TextBox 72">
+            <a:extLst>
+              <a:ext uri="{FF2B5EF4-FFF2-40B4-BE49-F238E27FC236}">
+                <a16:creationId xmlns:a16="http://schemas.microsoft.com/office/drawing/2014/main" id="{6E1D2E12-9CCA-3B53-9427-614183B0B65B}"/>
+              </a:ext>
+            </a:extLst>
+          </p:cNvPr>
+          <p:cNvSpPr txBox="1"/>
+          <p:nvPr/>
+        </p:nvSpPr>
+        <p:spPr>
+          <a:xfrm>
+            <a:off x="6430003" y="3429000"/>
+            <a:ext cx="263214" cy="369332"/>
+          </a:xfrm>
+          <a:prstGeom prst="rect">
+            <a:avLst/>
+          </a:prstGeom>
+          <a:noFill/>
+        </p:spPr>
+        <p:txBody>
+          <a:bodyPr wrap="none" rtlCol="0">
+            <a:spAutoFit/>
+          </a:bodyPr>
+          <a:lstStyle/>
+          <a:p>
+            <a:r>
+              <a:rPr lang="en-US" dirty="0"/>
+              <a:t>-</a:t>
+            </a:r>
+          </a:p>
+        </p:txBody>
+      </p:sp>
+      <p:sp>
+        <p:nvSpPr>
+          <p:cNvPr id="76" name="TextBox 75">
+            <a:extLst>
+              <a:ext uri="{FF2B5EF4-FFF2-40B4-BE49-F238E27FC236}">
+                <a16:creationId xmlns:a16="http://schemas.microsoft.com/office/drawing/2014/main" id="{943CBD7C-79F5-4DE3-6240-C3DC8F8A2105}"/>
+              </a:ext>
+            </a:extLst>
+          </p:cNvPr>
+          <p:cNvSpPr txBox="1"/>
+          <p:nvPr/>
+        </p:nvSpPr>
+        <p:spPr>
+          <a:xfrm>
+            <a:off x="7503081" y="4024523"/>
+            <a:ext cx="1646156" cy="369332"/>
+          </a:xfrm>
+          <a:prstGeom prst="rect">
+            <a:avLst/>
+          </a:prstGeom>
+          <a:noFill/>
+        </p:spPr>
+        <p:txBody>
+          <a:bodyPr wrap="none" rtlCol="0">
+            <a:spAutoFit/>
+          </a:bodyPr>
+          <a:lstStyle/>
+          <a:p>
+            <a:r>
+              <a:rPr lang="en-US" dirty="0"/>
+              <a:t>Discrimination</a:t>
+            </a:r>
+          </a:p>
+        </p:txBody>
+      </p:sp>
+      <p:sp>
+        <p:nvSpPr>
+          <p:cNvPr id="2" name="Rectangle 1">
+            <a:extLst>
+              <a:ext uri="{FF2B5EF4-FFF2-40B4-BE49-F238E27FC236}">
+                <a16:creationId xmlns:a16="http://schemas.microsoft.com/office/drawing/2014/main" id="{B123746B-1DED-FDC8-A0B5-A6E56B8B3E37}"/>
+              </a:ext>
+            </a:extLst>
+          </p:cNvPr>
+          <p:cNvSpPr/>
+          <p:nvPr/>
+        </p:nvSpPr>
+        <p:spPr>
+          <a:xfrm>
+            <a:off x="10152205" y="3705838"/>
+            <a:ext cx="1463040" cy="640080"/>
+          </a:xfrm>
+          <a:prstGeom prst="rect">
+            <a:avLst/>
+          </a:prstGeom>
+        </p:spPr>
+        <p:style>
+          <a:lnRef idx="2">
+            <a:schemeClr val="accent1"/>
+          </a:lnRef>
+          <a:fillRef idx="1">
+            <a:schemeClr val="lt1"/>
+          </a:fillRef>
+          <a:effectRef idx="0">
+            <a:schemeClr val="accent1"/>
+          </a:effectRef>
+          <a:fontRef idx="minor">
+            <a:schemeClr val="dk1"/>
+          </a:fontRef>
+        </p:style>
+        <p:txBody>
+          <a:bodyPr rtlCol="0" anchor="ctr"/>
+          <a:lstStyle/>
+          <a:p>
+            <a:pPr algn="ctr"/>
+            <a:r>
+              <a:rPr lang="en-US" dirty="0"/>
+              <a:t>Human Innovation</a:t>
+            </a:r>
+          </a:p>
+        </p:txBody>
+      </p:sp>
+      <p:cxnSp>
+        <p:nvCxnSpPr>
+          <p:cNvPr id="12" name="Straight Arrow Connector 11">
+            <a:extLst>
+              <a:ext uri="{FF2B5EF4-FFF2-40B4-BE49-F238E27FC236}">
+                <a16:creationId xmlns:a16="http://schemas.microsoft.com/office/drawing/2014/main" id="{7240CAA7-F4AD-F878-553E-46089312A22B}"/>
+              </a:ext>
+            </a:extLst>
+          </p:cNvPr>
+          <p:cNvCxnSpPr>
+            <a:cxnSpLocks/>
+            <a:stCxn id="13" idx="2"/>
+            <a:endCxn id="2" idx="1"/>
+          </p:cNvCxnSpPr>
+          <p:nvPr/>
+        </p:nvCxnSpPr>
+        <p:spPr>
+          <a:xfrm>
+            <a:off x="8830975" y="3371324"/>
+            <a:ext cx="1321230" cy="654554"/>
+          </a:xfrm>
+          <a:prstGeom prst="straightConnector1">
+            <a:avLst/>
+          </a:prstGeom>
+          <a:ln>
+            <a:prstDash val="solid"/>
+            <a:tailEnd type="triangle"/>
+          </a:ln>
+        </p:spPr>
+        <p:style>
+          <a:lnRef idx="2">
+            <a:schemeClr val="accent1"/>
+          </a:lnRef>
+          <a:fillRef idx="0">
+            <a:schemeClr val="accent1"/>
+          </a:fillRef>
+          <a:effectRef idx="1">
+            <a:schemeClr val="accent1"/>
+          </a:effectRef>
+          <a:fontRef idx="minor">
+            <a:schemeClr val="tx1"/>
+          </a:fontRef>
+        </p:style>
+      </p:cxnSp>
+    </p:spTree>
+    <p:extLst>
+      <p:ext uri="{BB962C8B-B14F-4D97-AF65-F5344CB8AC3E}">
+        <p14:creationId xmlns:p14="http://schemas.microsoft.com/office/powerpoint/2010/main" val="1825311658"/>
+      </p:ext>
+    </p:extLst>
+  </p:cSld>
+  <p:clrMapOvr>
+    <a:masterClrMapping/>
+  </p:clrMapOvr>
+</p:sld>
+</file>
+
+<file path=ppt/slides/slide11.xml><?xml version="1.0" encoding="utf-8"?>
+<p:sld xmlns:a="http://schemas.openxmlformats.org/drawingml/2006/main" xmlns:r="http://schemas.openxmlformats.org/officeDocument/2006/relationships" xmlns:p="http://schemas.openxmlformats.org/presentationml/2006/main">
+  <p:cSld>
+    <p:spTree>
+      <p:nvGrpSpPr>
+        <p:cNvPr id="1" name="">
+          <a:extLst>
+            <a:ext uri="{FF2B5EF4-FFF2-40B4-BE49-F238E27FC236}">
+              <a16:creationId xmlns:a16="http://schemas.microsoft.com/office/drawing/2014/main" id="{4FF4F5AB-FDD0-408B-D9B6-B4D6349F2BCC}"/>
+            </a:ext>
+          </a:extLst>
+        </p:cNvPr>
+        <p:cNvGrpSpPr/>
+        <p:nvPr/>
+      </p:nvGrpSpPr>
+      <p:grpSpPr>
+        <a:xfrm>
+          <a:off x="0" y="0"/>
+          <a:ext cx="0" cy="0"/>
+          <a:chOff x="0" y="0"/>
+          <a:chExt cx="0" cy="0"/>
+        </a:xfrm>
+      </p:grpSpPr>
+      <p:sp>
+        <p:nvSpPr>
+          <p:cNvPr id="4" name="Rectangle 3">
+            <a:extLst>
+              <a:ext uri="{FF2B5EF4-FFF2-40B4-BE49-F238E27FC236}">
+                <a16:creationId xmlns:a16="http://schemas.microsoft.com/office/drawing/2014/main" id="{98DA0CA1-1051-AD70-9C89-5601D24048AE}"/>
+              </a:ext>
+            </a:extLst>
+          </p:cNvPr>
+          <p:cNvSpPr/>
+          <p:nvPr/>
+        </p:nvSpPr>
+        <p:spPr>
+          <a:xfrm>
+            <a:off x="4132897" y="3705838"/>
+            <a:ext cx="1828800" cy="640080"/>
+          </a:xfrm>
+          <a:prstGeom prst="rect">
+            <a:avLst/>
+          </a:prstGeom>
+          <a:ln>
+            <a:prstDash val="dash"/>
+          </a:ln>
+        </p:spPr>
+        <p:style>
+          <a:lnRef idx="2">
+            <a:schemeClr val="accent1"/>
+          </a:lnRef>
+          <a:fillRef idx="1">
+            <a:schemeClr val="lt1"/>
+          </a:fillRef>
+          <a:effectRef idx="0">
+            <a:schemeClr val="accent1"/>
+          </a:effectRef>
+          <a:fontRef idx="minor">
+            <a:schemeClr val="dk1"/>
+          </a:fontRef>
+        </p:style>
+        <p:txBody>
+          <a:bodyPr rtlCol="0" anchor="ctr"/>
+          <a:lstStyle/>
+          <a:p>
+            <a:pPr algn="ctr"/>
+            <a:r>
+              <a:rPr lang="en-US" dirty="0"/>
+              <a:t>In-depth Quality Assessment</a:t>
+            </a:r>
+          </a:p>
+        </p:txBody>
+      </p:sp>
+      <p:sp>
+        <p:nvSpPr>
+          <p:cNvPr id="5" name="Rectangle 4">
+            <a:extLst>
+              <a:ext uri="{FF2B5EF4-FFF2-40B4-BE49-F238E27FC236}">
+                <a16:creationId xmlns:a16="http://schemas.microsoft.com/office/drawing/2014/main" id="{DBF55F91-DB01-C3DB-A757-49F09A897175}"/>
+              </a:ext>
+            </a:extLst>
+          </p:cNvPr>
+          <p:cNvSpPr/>
+          <p:nvPr/>
+        </p:nvSpPr>
+        <p:spPr>
+          <a:xfrm>
+            <a:off x="6096000" y="1777127"/>
+            <a:ext cx="1463040" cy="640080"/>
+          </a:xfrm>
+          <a:prstGeom prst="rect">
+            <a:avLst/>
+          </a:prstGeom>
+        </p:spPr>
+        <p:style>
+          <a:lnRef idx="2">
+            <a:schemeClr val="accent1"/>
+          </a:lnRef>
+          <a:fillRef idx="1">
+            <a:schemeClr val="lt1"/>
+          </a:fillRef>
+          <a:effectRef idx="0">
+            <a:schemeClr val="accent1"/>
+          </a:effectRef>
+          <a:fontRef idx="minor">
+            <a:schemeClr val="dk1"/>
+          </a:fontRef>
+        </p:style>
+        <p:txBody>
+          <a:bodyPr rtlCol="0" anchor="ctr"/>
+          <a:lstStyle/>
+          <a:p>
+            <a:pPr algn="ctr"/>
+            <a:r>
+              <a:rPr lang="en-US" dirty="0"/>
+              <a:t>AI label</a:t>
+            </a:r>
+          </a:p>
+        </p:txBody>
+      </p:sp>
+      <p:cxnSp>
+        <p:nvCxnSpPr>
+          <p:cNvPr id="7" name="Straight Arrow Connector 6">
+            <a:extLst>
+              <a:ext uri="{FF2B5EF4-FFF2-40B4-BE49-F238E27FC236}">
+                <a16:creationId xmlns:a16="http://schemas.microsoft.com/office/drawing/2014/main" id="{BD75151D-F743-021D-A02F-1E6283756315}"/>
+              </a:ext>
+            </a:extLst>
+          </p:cNvPr>
+          <p:cNvCxnSpPr>
+            <a:cxnSpLocks/>
+            <a:stCxn id="8" idx="3"/>
+            <a:endCxn id="66" idx="1"/>
+          </p:cNvCxnSpPr>
+          <p:nvPr/>
+        </p:nvCxnSpPr>
+        <p:spPr>
+          <a:xfrm flipV="1">
+            <a:off x="3235885" y="3051284"/>
+            <a:ext cx="897012" cy="451716"/>
+          </a:xfrm>
+          <a:prstGeom prst="straightConnector1">
+            <a:avLst/>
+          </a:prstGeom>
+          <a:ln>
+            <a:tailEnd type="triangle"/>
+          </a:ln>
+        </p:spPr>
+        <p:style>
+          <a:lnRef idx="2">
+            <a:schemeClr val="accent1"/>
+          </a:lnRef>
+          <a:fillRef idx="0">
+            <a:schemeClr val="accent1"/>
+          </a:fillRef>
+          <a:effectRef idx="1">
+            <a:schemeClr val="accent1"/>
+          </a:effectRef>
+          <a:fontRef idx="minor">
+            <a:schemeClr val="tx1"/>
+          </a:fontRef>
+        </p:style>
+      </p:cxnSp>
+      <p:sp>
+        <p:nvSpPr>
+          <p:cNvPr id="8" name="Rectangle 7">
+            <a:extLst>
+              <a:ext uri="{FF2B5EF4-FFF2-40B4-BE49-F238E27FC236}">
+                <a16:creationId xmlns:a16="http://schemas.microsoft.com/office/drawing/2014/main" id="{A0891F2D-227E-1A20-5820-30DE259B56B5}"/>
+              </a:ext>
+            </a:extLst>
+          </p:cNvPr>
+          <p:cNvSpPr/>
+          <p:nvPr/>
+        </p:nvSpPr>
+        <p:spPr>
+          <a:xfrm>
+            <a:off x="1772845" y="3182960"/>
+            <a:ext cx="1463040" cy="640080"/>
+          </a:xfrm>
+          <a:prstGeom prst="rect">
+            <a:avLst/>
+          </a:prstGeom>
+        </p:spPr>
+        <p:style>
+          <a:lnRef idx="2">
+            <a:schemeClr val="accent1"/>
+          </a:lnRef>
+          <a:fillRef idx="1">
+            <a:schemeClr val="lt1"/>
+          </a:fillRef>
+          <a:effectRef idx="0">
+            <a:schemeClr val="accent1"/>
+          </a:effectRef>
+          <a:fontRef idx="minor">
+            <a:schemeClr val="dk1"/>
+          </a:fontRef>
+        </p:style>
+        <p:txBody>
+          <a:bodyPr rtlCol="0" anchor="ctr"/>
+          <a:lstStyle/>
+          <a:p>
+            <a:pPr algn="ctr"/>
+            <a:r>
+              <a:rPr lang="en-US" dirty="0"/>
+              <a:t>(AI) Content</a:t>
+            </a:r>
+          </a:p>
+        </p:txBody>
+      </p:sp>
+      <p:cxnSp>
+        <p:nvCxnSpPr>
+          <p:cNvPr id="22" name="Straight Arrow Connector 21">
+            <a:extLst>
+              <a:ext uri="{FF2B5EF4-FFF2-40B4-BE49-F238E27FC236}">
+                <a16:creationId xmlns:a16="http://schemas.microsoft.com/office/drawing/2014/main" id="{20CF31CC-C31D-80A2-5087-59803CE4C7EF}"/>
+              </a:ext>
+            </a:extLst>
+          </p:cNvPr>
+          <p:cNvCxnSpPr>
+            <a:cxnSpLocks/>
+            <a:stCxn id="5" idx="2"/>
+          </p:cNvCxnSpPr>
+          <p:nvPr/>
+        </p:nvCxnSpPr>
+        <p:spPr>
+          <a:xfrm>
+            <a:off x="6827520" y="2417207"/>
+            <a:ext cx="221091" cy="605661"/>
+          </a:xfrm>
+          <a:prstGeom prst="straightConnector1">
+            <a:avLst/>
+          </a:prstGeom>
+          <a:ln>
+            <a:tailEnd type="triangle"/>
+          </a:ln>
+        </p:spPr>
+        <p:style>
+          <a:lnRef idx="2">
+            <a:schemeClr val="accent1"/>
+          </a:lnRef>
+          <a:fillRef idx="0">
+            <a:schemeClr val="accent1"/>
+          </a:fillRef>
+          <a:effectRef idx="1">
+            <a:schemeClr val="accent1"/>
+          </a:effectRef>
+          <a:fontRef idx="minor">
+            <a:schemeClr val="tx1"/>
+          </a:fontRef>
+        </p:style>
+      </p:cxnSp>
+      <p:cxnSp>
+        <p:nvCxnSpPr>
+          <p:cNvPr id="38" name="Straight Arrow Connector 37">
+            <a:extLst>
+              <a:ext uri="{FF2B5EF4-FFF2-40B4-BE49-F238E27FC236}">
+                <a16:creationId xmlns:a16="http://schemas.microsoft.com/office/drawing/2014/main" id="{163CA99B-FAD8-9D45-CAC8-88559E6411AF}"/>
+              </a:ext>
+            </a:extLst>
+          </p:cNvPr>
+          <p:cNvCxnSpPr>
+            <a:cxnSpLocks/>
+            <a:stCxn id="8" idx="3"/>
+            <a:endCxn id="4" idx="1"/>
+          </p:cNvCxnSpPr>
+          <p:nvPr/>
+        </p:nvCxnSpPr>
+        <p:spPr>
+          <a:xfrm>
+            <a:off x="3235885" y="3503000"/>
+            <a:ext cx="897012" cy="522878"/>
+          </a:xfrm>
+          <a:prstGeom prst="straightConnector1">
+            <a:avLst/>
+          </a:prstGeom>
+          <a:ln>
+            <a:tailEnd type="triangle"/>
+          </a:ln>
+        </p:spPr>
+        <p:style>
+          <a:lnRef idx="2">
+            <a:schemeClr val="accent1"/>
+          </a:lnRef>
+          <a:fillRef idx="0">
+            <a:schemeClr val="accent1"/>
+          </a:fillRef>
+          <a:effectRef idx="1">
+            <a:schemeClr val="accent1"/>
+          </a:effectRef>
+          <a:fontRef idx="minor">
+            <a:schemeClr val="tx1"/>
+          </a:fontRef>
+        </p:style>
+      </p:cxnSp>
+      <p:sp>
+        <p:nvSpPr>
+          <p:cNvPr id="13" name="Rectangle 12">
+            <a:extLst>
+              <a:ext uri="{FF2B5EF4-FFF2-40B4-BE49-F238E27FC236}">
+                <a16:creationId xmlns:a16="http://schemas.microsoft.com/office/drawing/2014/main" id="{B5A8E065-053A-E562-AF10-735D6856E9EE}"/>
+              </a:ext>
+            </a:extLst>
+          </p:cNvPr>
+          <p:cNvSpPr/>
+          <p:nvPr/>
+        </p:nvSpPr>
+        <p:spPr>
+          <a:xfrm>
+            <a:off x="8099455" y="2731244"/>
+            <a:ext cx="1463040" cy="640080"/>
+          </a:xfrm>
+          <a:prstGeom prst="rect">
+            <a:avLst/>
+          </a:prstGeom>
+        </p:spPr>
+        <p:style>
+          <a:lnRef idx="2">
+            <a:schemeClr val="accent1"/>
+          </a:lnRef>
+          <a:fillRef idx="1">
+            <a:schemeClr val="lt1"/>
+          </a:fillRef>
+          <a:effectRef idx="0">
+            <a:schemeClr val="accent1"/>
+          </a:effectRef>
+          <a:fontRef idx="minor">
+            <a:schemeClr val="dk1"/>
+          </a:fontRef>
+        </p:style>
+        <p:txBody>
+          <a:bodyPr rtlCol="0" anchor="ctr"/>
+          <a:lstStyle/>
+          <a:p>
+            <a:pPr algn="ctr"/>
+            <a:r>
+              <a:rPr lang="en-US" dirty="0"/>
+              <a:t>Human Contribution</a:t>
+            </a:r>
+          </a:p>
+        </p:txBody>
+      </p:sp>
+      <p:sp>
+        <p:nvSpPr>
+          <p:cNvPr id="66" name="Rectangle 65">
+            <a:extLst>
+              <a:ext uri="{FF2B5EF4-FFF2-40B4-BE49-F238E27FC236}">
+                <a16:creationId xmlns:a16="http://schemas.microsoft.com/office/drawing/2014/main" id="{D8B07517-CA8E-C5A2-6756-2FDA4F3639B6}"/>
+              </a:ext>
+            </a:extLst>
+          </p:cNvPr>
+          <p:cNvSpPr/>
+          <p:nvPr/>
+        </p:nvSpPr>
+        <p:spPr>
+          <a:xfrm>
+            <a:off x="4132897" y="2731244"/>
+            <a:ext cx="1828800" cy="640080"/>
+          </a:xfrm>
+          <a:prstGeom prst="rect">
+            <a:avLst/>
+          </a:prstGeom>
+          <a:ln>
+            <a:prstDash val="dash"/>
+          </a:ln>
+        </p:spPr>
+        <p:style>
+          <a:lnRef idx="2">
+            <a:schemeClr val="accent1"/>
+          </a:lnRef>
+          <a:fillRef idx="1">
+            <a:schemeClr val="lt1"/>
+          </a:fillRef>
+          <a:effectRef idx="0">
+            <a:schemeClr val="accent1"/>
+          </a:effectRef>
+          <a:fontRef idx="minor">
+            <a:schemeClr val="dk1"/>
+          </a:fontRef>
+        </p:style>
+        <p:txBody>
+          <a:bodyPr rtlCol="0" anchor="ctr"/>
+          <a:lstStyle/>
+          <a:p>
+            <a:pPr algn="ctr"/>
+            <a:r>
+              <a:rPr lang="en-US" dirty="0"/>
+              <a:t>Shallow Quality Signal</a:t>
+            </a:r>
+          </a:p>
+        </p:txBody>
+      </p:sp>
+      <p:cxnSp>
+        <p:nvCxnSpPr>
+          <p:cNvPr id="25" name="Straight Arrow Connector 24">
+            <a:extLst>
+              <a:ext uri="{FF2B5EF4-FFF2-40B4-BE49-F238E27FC236}">
+                <a16:creationId xmlns:a16="http://schemas.microsoft.com/office/drawing/2014/main" id="{79A5E02A-1FD7-52A3-F603-75E65E280E29}"/>
+              </a:ext>
+            </a:extLst>
+          </p:cNvPr>
+          <p:cNvCxnSpPr>
+            <a:cxnSpLocks/>
+            <a:stCxn id="66" idx="3"/>
+            <a:endCxn id="13" idx="1"/>
+          </p:cNvCxnSpPr>
+          <p:nvPr/>
+        </p:nvCxnSpPr>
+        <p:spPr>
+          <a:xfrm>
+            <a:off x="5961697" y="3051284"/>
+            <a:ext cx="2137758" cy="0"/>
+          </a:xfrm>
+          <a:prstGeom prst="straightConnector1">
+            <a:avLst/>
+          </a:prstGeom>
+          <a:ln>
+            <a:tailEnd type="triangle"/>
+          </a:ln>
+        </p:spPr>
+        <p:style>
+          <a:lnRef idx="2">
+            <a:schemeClr val="accent1"/>
+          </a:lnRef>
+          <a:fillRef idx="0">
+            <a:schemeClr val="accent1"/>
+          </a:fillRef>
+          <a:effectRef idx="1">
+            <a:schemeClr val="accent1"/>
+          </a:effectRef>
+          <a:fontRef idx="minor">
+            <a:schemeClr val="tx1"/>
+          </a:fontRef>
+        </p:style>
+      </p:cxnSp>
+      <p:cxnSp>
+        <p:nvCxnSpPr>
+          <p:cNvPr id="30" name="Straight Arrow Connector 29">
+            <a:extLst>
+              <a:ext uri="{FF2B5EF4-FFF2-40B4-BE49-F238E27FC236}">
+                <a16:creationId xmlns:a16="http://schemas.microsoft.com/office/drawing/2014/main" id="{FCC4912E-8DA0-AF65-BFDA-59060C79724D}"/>
+              </a:ext>
+            </a:extLst>
+          </p:cNvPr>
+          <p:cNvCxnSpPr>
+            <a:cxnSpLocks/>
+            <a:stCxn id="4" idx="3"/>
+            <a:endCxn id="2" idx="1"/>
+          </p:cNvCxnSpPr>
+          <p:nvPr/>
+        </p:nvCxnSpPr>
+        <p:spPr>
+          <a:xfrm>
+            <a:off x="5961697" y="4025878"/>
+            <a:ext cx="4190508" cy="0"/>
+          </a:xfrm>
+          <a:prstGeom prst="straightConnector1">
+            <a:avLst/>
+          </a:prstGeom>
+          <a:ln>
+            <a:tailEnd type="triangle"/>
+          </a:ln>
+        </p:spPr>
+        <p:style>
+          <a:lnRef idx="2">
+            <a:schemeClr val="accent1"/>
+          </a:lnRef>
+          <a:fillRef idx="0">
+            <a:schemeClr val="accent1"/>
+          </a:fillRef>
+          <a:effectRef idx="1">
+            <a:schemeClr val="accent1"/>
+          </a:effectRef>
+          <a:fontRef idx="minor">
+            <a:schemeClr val="tx1"/>
+          </a:fontRef>
+        </p:style>
+      </p:cxnSp>
+      <p:cxnSp>
+        <p:nvCxnSpPr>
+          <p:cNvPr id="34" name="Straight Arrow Connector 33">
+            <a:extLst>
+              <a:ext uri="{FF2B5EF4-FFF2-40B4-BE49-F238E27FC236}">
+                <a16:creationId xmlns:a16="http://schemas.microsoft.com/office/drawing/2014/main" id="{8B4896BE-7441-28EA-894F-9199D0F59ACA}"/>
+              </a:ext>
+            </a:extLst>
+          </p:cNvPr>
+          <p:cNvCxnSpPr>
+            <a:cxnSpLocks/>
+          </p:cNvCxnSpPr>
+          <p:nvPr/>
+        </p:nvCxnSpPr>
+        <p:spPr>
+          <a:xfrm flipH="1">
+            <a:off x="6403315" y="2414205"/>
+            <a:ext cx="424205" cy="1610318"/>
+          </a:xfrm>
+          <a:prstGeom prst="straightConnector1">
+            <a:avLst/>
+          </a:prstGeom>
+          <a:ln>
+            <a:tailEnd type="triangle"/>
+          </a:ln>
+        </p:spPr>
+        <p:style>
+          <a:lnRef idx="2">
+            <a:schemeClr val="accent1"/>
+          </a:lnRef>
+          <a:fillRef idx="0">
+            <a:schemeClr val="accent1"/>
+          </a:fillRef>
+          <a:effectRef idx="1">
+            <a:schemeClr val="accent1"/>
+          </a:effectRef>
+          <a:fontRef idx="minor">
+            <a:schemeClr val="tx1"/>
+          </a:fontRef>
+        </p:style>
+      </p:cxnSp>
+      <p:sp>
+        <p:nvSpPr>
+          <p:cNvPr id="43" name="TextBox 42">
+            <a:extLst>
+              <a:ext uri="{FF2B5EF4-FFF2-40B4-BE49-F238E27FC236}">
+                <a16:creationId xmlns:a16="http://schemas.microsoft.com/office/drawing/2014/main" id="{D04E429B-D04E-D830-0F42-7823E311F068}"/>
+              </a:ext>
+            </a:extLst>
+          </p:cNvPr>
+          <p:cNvSpPr txBox="1"/>
+          <p:nvPr/>
+        </p:nvSpPr>
+        <p:spPr>
+          <a:xfrm>
+            <a:off x="7333890" y="2750366"/>
+            <a:ext cx="263214" cy="369332"/>
+          </a:xfrm>
+          <a:prstGeom prst="rect">
+            <a:avLst/>
+          </a:prstGeom>
+          <a:noFill/>
+        </p:spPr>
+        <p:txBody>
+          <a:bodyPr wrap="none" rtlCol="0">
+            <a:spAutoFit/>
+          </a:bodyPr>
+          <a:lstStyle/>
+          <a:p>
+            <a:r>
+              <a:rPr lang="en-US" dirty="0"/>
+              <a:t>-</a:t>
+            </a:r>
+          </a:p>
+        </p:txBody>
+      </p:sp>
+      <p:sp>
+        <p:nvSpPr>
+          <p:cNvPr id="44" name="TextBox 43">
+            <a:extLst>
+              <a:ext uri="{FF2B5EF4-FFF2-40B4-BE49-F238E27FC236}">
+                <a16:creationId xmlns:a16="http://schemas.microsoft.com/office/drawing/2014/main" id="{9035903C-BD90-3184-A0A4-C5CB5714B974}"/>
+              </a:ext>
+            </a:extLst>
+          </p:cNvPr>
+          <p:cNvSpPr txBox="1"/>
+          <p:nvPr/>
+        </p:nvSpPr>
+        <p:spPr>
+          <a:xfrm>
+            <a:off x="6788202" y="2417207"/>
+            <a:ext cx="308098" cy="369332"/>
+          </a:xfrm>
+          <a:prstGeom prst="rect">
+            <a:avLst/>
+          </a:prstGeom>
+          <a:noFill/>
+        </p:spPr>
+        <p:txBody>
+          <a:bodyPr wrap="none" rtlCol="0">
+            <a:spAutoFit/>
+          </a:bodyPr>
+          <a:lstStyle/>
+          <a:p>
+            <a:r>
+              <a:rPr lang="en-US" dirty="0"/>
+              <a:t>+</a:t>
+            </a:r>
+          </a:p>
+        </p:txBody>
+      </p:sp>
+      <p:sp>
+        <p:nvSpPr>
+          <p:cNvPr id="45" name="TextBox 44">
+            <a:extLst>
+              <a:ext uri="{FF2B5EF4-FFF2-40B4-BE49-F238E27FC236}">
+                <a16:creationId xmlns:a16="http://schemas.microsoft.com/office/drawing/2014/main" id="{9B7C9B9A-C7B7-A8FB-95EC-6893734ED202}"/>
+              </a:ext>
+            </a:extLst>
+          </p:cNvPr>
+          <p:cNvSpPr txBox="1"/>
+          <p:nvPr/>
+        </p:nvSpPr>
+        <p:spPr>
+          <a:xfrm>
+            <a:off x="7350912" y="3705838"/>
+            <a:ext cx="308098" cy="369332"/>
+          </a:xfrm>
+          <a:prstGeom prst="rect">
+            <a:avLst/>
+          </a:prstGeom>
+          <a:noFill/>
+        </p:spPr>
+        <p:txBody>
+          <a:bodyPr wrap="none" rtlCol="0">
+            <a:spAutoFit/>
+          </a:bodyPr>
+          <a:lstStyle/>
+          <a:p>
+            <a:r>
+              <a:rPr lang="en-US" dirty="0"/>
+              <a:t>+</a:t>
+            </a:r>
+          </a:p>
+        </p:txBody>
+      </p:sp>
+      <p:cxnSp>
+        <p:nvCxnSpPr>
+          <p:cNvPr id="46" name="Straight Arrow Connector 45">
+            <a:extLst>
+              <a:ext uri="{FF2B5EF4-FFF2-40B4-BE49-F238E27FC236}">
+                <a16:creationId xmlns:a16="http://schemas.microsoft.com/office/drawing/2014/main" id="{E22EFE17-B011-E863-12B5-2ADEF177FBCF}"/>
+              </a:ext>
+            </a:extLst>
+          </p:cNvPr>
+          <p:cNvCxnSpPr>
+            <a:cxnSpLocks/>
+            <a:stCxn id="5" idx="3"/>
+            <a:endCxn id="13" idx="0"/>
+          </p:cNvCxnSpPr>
+          <p:nvPr/>
+        </p:nvCxnSpPr>
+        <p:spPr>
+          <a:xfrm>
+            <a:off x="7559040" y="2097167"/>
+            <a:ext cx="1271935" cy="634077"/>
+          </a:xfrm>
+          <a:prstGeom prst="straightConnector1">
+            <a:avLst/>
+          </a:prstGeom>
+          <a:ln>
+            <a:tailEnd type="triangle"/>
+          </a:ln>
+        </p:spPr>
+        <p:style>
+          <a:lnRef idx="2">
+            <a:schemeClr val="accent1"/>
+          </a:lnRef>
+          <a:fillRef idx="0">
+            <a:schemeClr val="accent1"/>
+          </a:fillRef>
+          <a:effectRef idx="1">
+            <a:schemeClr val="accent1"/>
+          </a:effectRef>
+          <a:fontRef idx="minor">
+            <a:schemeClr val="tx1"/>
+          </a:fontRef>
+        </p:style>
+      </p:cxnSp>
+      <p:sp>
+        <p:nvSpPr>
+          <p:cNvPr id="65" name="TextBox 64">
+            <a:extLst>
+              <a:ext uri="{FF2B5EF4-FFF2-40B4-BE49-F238E27FC236}">
+                <a16:creationId xmlns:a16="http://schemas.microsoft.com/office/drawing/2014/main" id="{F3C3D307-BC62-3C96-9817-329AE1B566C4}"/>
+              </a:ext>
+            </a:extLst>
+          </p:cNvPr>
+          <p:cNvSpPr txBox="1"/>
+          <p:nvPr/>
+        </p:nvSpPr>
+        <p:spPr>
+          <a:xfrm>
+            <a:off x="6575613" y="3033011"/>
+            <a:ext cx="1350563" cy="369332"/>
+          </a:xfrm>
+          <a:prstGeom prst="rect">
+            <a:avLst/>
+          </a:prstGeom>
+          <a:noFill/>
+        </p:spPr>
+        <p:txBody>
+          <a:bodyPr wrap="none" rtlCol="0">
+            <a:spAutoFit/>
+          </a:bodyPr>
+          <a:lstStyle/>
+          <a:p>
+            <a:r>
+              <a:rPr lang="en-US" dirty="0"/>
+              <a:t>Deterrence </a:t>
+            </a:r>
+          </a:p>
+        </p:txBody>
+      </p:sp>
+      <p:sp>
+        <p:nvSpPr>
+          <p:cNvPr id="67" name="TextBox 66">
+            <a:extLst>
+              <a:ext uri="{FF2B5EF4-FFF2-40B4-BE49-F238E27FC236}">
+                <a16:creationId xmlns:a16="http://schemas.microsoft.com/office/drawing/2014/main" id="{933147AA-E4AE-9455-868A-78C7CEA81904}"/>
+              </a:ext>
+            </a:extLst>
+          </p:cNvPr>
+          <p:cNvSpPr txBox="1"/>
+          <p:nvPr/>
+        </p:nvSpPr>
+        <p:spPr>
+          <a:xfrm>
+            <a:off x="7926176" y="2097167"/>
+            <a:ext cx="1809598" cy="369332"/>
+          </a:xfrm>
+          <a:prstGeom prst="rect">
+            <a:avLst/>
+          </a:prstGeom>
+          <a:noFill/>
+        </p:spPr>
+        <p:txBody>
+          <a:bodyPr wrap="none" rtlCol="0">
+            <a:spAutoFit/>
+          </a:bodyPr>
+          <a:lstStyle/>
+          <a:p>
+            <a:r>
+              <a:rPr lang="en-US" dirty="0"/>
+              <a:t>Encouragement </a:t>
+            </a:r>
+          </a:p>
+        </p:txBody>
+      </p:sp>
+      <p:sp>
+        <p:nvSpPr>
+          <p:cNvPr id="73" name="TextBox 72">
+            <a:extLst>
+              <a:ext uri="{FF2B5EF4-FFF2-40B4-BE49-F238E27FC236}">
+                <a16:creationId xmlns:a16="http://schemas.microsoft.com/office/drawing/2014/main" id="{855839AB-1DCE-7244-4937-E1405EDED4AA}"/>
+              </a:ext>
+            </a:extLst>
+          </p:cNvPr>
+          <p:cNvSpPr txBox="1"/>
+          <p:nvPr/>
+        </p:nvSpPr>
+        <p:spPr>
+          <a:xfrm>
+            <a:off x="6430003" y="3429000"/>
+            <a:ext cx="263214" cy="369332"/>
+          </a:xfrm>
+          <a:prstGeom prst="rect">
+            <a:avLst/>
+          </a:prstGeom>
+          <a:noFill/>
+        </p:spPr>
+        <p:txBody>
+          <a:bodyPr wrap="none" rtlCol="0">
+            <a:spAutoFit/>
+          </a:bodyPr>
+          <a:lstStyle/>
+          <a:p>
+            <a:r>
+              <a:rPr lang="en-US" dirty="0"/>
+              <a:t>-</a:t>
+            </a:r>
+          </a:p>
+        </p:txBody>
+      </p:sp>
+      <p:sp>
+        <p:nvSpPr>
+          <p:cNvPr id="76" name="TextBox 75">
+            <a:extLst>
+              <a:ext uri="{FF2B5EF4-FFF2-40B4-BE49-F238E27FC236}">
+                <a16:creationId xmlns:a16="http://schemas.microsoft.com/office/drawing/2014/main" id="{9FC6D2C8-4666-5C91-EF60-6EC7E1E242D0}"/>
+              </a:ext>
+            </a:extLst>
+          </p:cNvPr>
+          <p:cNvSpPr txBox="1"/>
+          <p:nvPr/>
+        </p:nvSpPr>
+        <p:spPr>
+          <a:xfrm>
+            <a:off x="7503081" y="4024523"/>
+            <a:ext cx="1646156" cy="369332"/>
+          </a:xfrm>
+          <a:prstGeom prst="rect">
+            <a:avLst/>
+          </a:prstGeom>
+          <a:noFill/>
+        </p:spPr>
+        <p:txBody>
+          <a:bodyPr wrap="none" rtlCol="0">
+            <a:spAutoFit/>
+          </a:bodyPr>
+          <a:lstStyle/>
+          <a:p>
+            <a:r>
+              <a:rPr lang="en-US" dirty="0"/>
+              <a:t>Discrimination</a:t>
+            </a:r>
+          </a:p>
+        </p:txBody>
+      </p:sp>
+      <p:sp>
+        <p:nvSpPr>
+          <p:cNvPr id="2" name="Rectangle 1">
+            <a:extLst>
+              <a:ext uri="{FF2B5EF4-FFF2-40B4-BE49-F238E27FC236}">
+                <a16:creationId xmlns:a16="http://schemas.microsoft.com/office/drawing/2014/main" id="{76138B85-5EFD-F807-F510-2A190A2009EC}"/>
+              </a:ext>
+            </a:extLst>
+          </p:cNvPr>
+          <p:cNvSpPr/>
+          <p:nvPr/>
+        </p:nvSpPr>
+        <p:spPr>
+          <a:xfrm>
+            <a:off x="10152205" y="3705838"/>
+            <a:ext cx="1463040" cy="640080"/>
+          </a:xfrm>
+          <a:prstGeom prst="rect">
+            <a:avLst/>
+          </a:prstGeom>
+        </p:spPr>
+        <p:style>
+          <a:lnRef idx="2">
+            <a:schemeClr val="accent1"/>
+          </a:lnRef>
+          <a:fillRef idx="1">
+            <a:schemeClr val="lt1"/>
+          </a:fillRef>
+          <a:effectRef idx="0">
+            <a:schemeClr val="accent1"/>
+          </a:effectRef>
+          <a:fontRef idx="minor">
+            <a:schemeClr val="dk1"/>
+          </a:fontRef>
+        </p:style>
+        <p:txBody>
+          <a:bodyPr rtlCol="0" anchor="ctr"/>
+          <a:lstStyle/>
+          <a:p>
+            <a:pPr algn="ctr"/>
+            <a:r>
+              <a:rPr lang="en-US" dirty="0"/>
+              <a:t>Human Innovation</a:t>
+            </a:r>
+          </a:p>
+        </p:txBody>
+      </p:sp>
+      <p:cxnSp>
+        <p:nvCxnSpPr>
+          <p:cNvPr id="3" name="Straight Arrow Connector 2">
+            <a:extLst>
+              <a:ext uri="{FF2B5EF4-FFF2-40B4-BE49-F238E27FC236}">
+                <a16:creationId xmlns:a16="http://schemas.microsoft.com/office/drawing/2014/main" id="{9FE21239-43EF-243C-CAA7-EB648A16EB07}"/>
+              </a:ext>
+            </a:extLst>
+          </p:cNvPr>
+          <p:cNvCxnSpPr>
+            <a:cxnSpLocks/>
+            <a:stCxn id="4" idx="3"/>
+            <a:endCxn id="6" idx="0"/>
+          </p:cNvCxnSpPr>
+          <p:nvPr/>
+        </p:nvCxnSpPr>
+        <p:spPr>
+          <a:xfrm>
+            <a:off x="5961697" y="4025878"/>
+            <a:ext cx="3566930" cy="520598"/>
+          </a:xfrm>
+          <a:prstGeom prst="bentConnector2">
+            <a:avLst/>
+          </a:prstGeom>
+          <a:ln>
+            <a:prstDash val="dash"/>
+            <a:tailEnd type="triangle"/>
+          </a:ln>
+        </p:spPr>
+        <p:style>
+          <a:lnRef idx="2">
+            <a:schemeClr val="accent1"/>
+          </a:lnRef>
+          <a:fillRef idx="0">
+            <a:schemeClr val="accent1"/>
+          </a:fillRef>
+          <a:effectRef idx="1">
+            <a:schemeClr val="accent1"/>
+          </a:effectRef>
+          <a:fontRef idx="minor">
+            <a:schemeClr val="tx1"/>
+          </a:fontRef>
+        </p:style>
+      </p:cxnSp>
+      <p:cxnSp>
+        <p:nvCxnSpPr>
+          <p:cNvPr id="12" name="Straight Arrow Connector 11">
+            <a:extLst>
+              <a:ext uri="{FF2B5EF4-FFF2-40B4-BE49-F238E27FC236}">
+                <a16:creationId xmlns:a16="http://schemas.microsoft.com/office/drawing/2014/main" id="{5F12A5A5-D88A-0694-FF0E-0B0452F2F007}"/>
+              </a:ext>
+            </a:extLst>
+          </p:cNvPr>
+          <p:cNvCxnSpPr>
+            <a:cxnSpLocks/>
+            <a:stCxn id="13" idx="2"/>
+            <a:endCxn id="2" idx="1"/>
+          </p:cNvCxnSpPr>
+          <p:nvPr/>
+        </p:nvCxnSpPr>
+        <p:spPr>
+          <a:xfrm>
+            <a:off x="8830975" y="3371324"/>
+            <a:ext cx="1321230" cy="654554"/>
+          </a:xfrm>
+          <a:prstGeom prst="straightConnector1">
+            <a:avLst/>
+          </a:prstGeom>
+          <a:ln>
+            <a:prstDash val="solid"/>
+            <a:tailEnd type="triangle"/>
+          </a:ln>
+        </p:spPr>
+        <p:style>
+          <a:lnRef idx="2">
+            <a:schemeClr val="accent1"/>
+          </a:lnRef>
+          <a:fillRef idx="0">
+            <a:schemeClr val="accent1"/>
+          </a:fillRef>
+          <a:effectRef idx="1">
+            <a:schemeClr val="accent1"/>
+          </a:effectRef>
+          <a:fontRef idx="minor">
+            <a:schemeClr val="tx1"/>
+          </a:fontRef>
+        </p:style>
+      </p:cxnSp>
+      <p:sp>
+        <p:nvSpPr>
+          <p:cNvPr id="6" name="Rectangle 5">
+            <a:extLst>
+              <a:ext uri="{FF2B5EF4-FFF2-40B4-BE49-F238E27FC236}">
+                <a16:creationId xmlns:a16="http://schemas.microsoft.com/office/drawing/2014/main" id="{291D9B04-49CD-90BA-5C8B-FD2532A19B66}"/>
+              </a:ext>
+            </a:extLst>
+          </p:cNvPr>
+          <p:cNvSpPr/>
+          <p:nvPr/>
+        </p:nvSpPr>
+        <p:spPr>
+          <a:xfrm>
+            <a:off x="8797107" y="4546476"/>
+            <a:ext cx="1463040" cy="640080"/>
+          </a:xfrm>
+          <a:prstGeom prst="rect">
+            <a:avLst/>
+          </a:prstGeom>
+          <a:ln>
+            <a:prstDash val="dash"/>
+          </a:ln>
+        </p:spPr>
+        <p:style>
+          <a:lnRef idx="2">
+            <a:schemeClr val="accent1"/>
+          </a:lnRef>
+          <a:fillRef idx="1">
+            <a:schemeClr val="lt1"/>
+          </a:fillRef>
+          <a:effectRef idx="0">
+            <a:schemeClr val="accent1"/>
+          </a:effectRef>
+          <a:fontRef idx="minor">
+            <a:schemeClr val="dk1"/>
+          </a:fontRef>
+        </p:style>
+        <p:txBody>
+          <a:bodyPr rtlCol="0" anchor="ctr"/>
+          <a:lstStyle/>
+          <a:p>
+            <a:pPr algn="ctr"/>
+            <a:r>
+              <a:rPr lang="en-US" dirty="0"/>
+              <a:t>Human Recognition</a:t>
+            </a:r>
+          </a:p>
+        </p:txBody>
+      </p:sp>
+    </p:spTree>
+    <p:extLst>
+      <p:ext uri="{BB962C8B-B14F-4D97-AF65-F5344CB8AC3E}">
+        <p14:creationId xmlns:p14="http://schemas.microsoft.com/office/powerpoint/2010/main" val="2482353929"/>
+      </p:ext>
+    </p:extLst>
+  </p:cSld>
+  <p:clrMapOvr>
+    <a:masterClrMapping/>
+  </p:clrMapOvr>
+</p:sld>
+</file>
+
+<file path=ppt/slides/slide12.xml><?xml version="1.0" encoding="utf-8"?>
+<p:sld xmlns:a="http://schemas.openxmlformats.org/drawingml/2006/main" xmlns:r="http://schemas.openxmlformats.org/officeDocument/2006/relationships" xmlns:p="http://schemas.openxmlformats.org/presentationml/2006/main">
+  <p:cSld>
+    <p:spTree>
+      <p:nvGrpSpPr>
+        <p:cNvPr id="1" name="">
+          <a:extLst>
+            <a:ext uri="{FF2B5EF4-FFF2-40B4-BE49-F238E27FC236}">
               <a16:creationId xmlns:a16="http://schemas.microsoft.com/office/drawing/2014/main" id="{70703F5A-3F1F-7675-1CAC-8AE82F3D2CCC}"/>
             </a:ext>
           </a:extLst>
@@ -5914,7 +7832,7 @@
 </p:sld>
 </file>
 
-<file path=ppt/slides/slide11.xml><?xml version="1.0" encoding="utf-8"?>
+<file path=ppt/slides/slide13.xml><?xml version="1.0" encoding="utf-8"?>
 <p:sld xmlns:a="http://schemas.openxmlformats.org/drawingml/2006/main" xmlns:r="http://schemas.openxmlformats.org/officeDocument/2006/relationships" xmlns:p="http://schemas.openxmlformats.org/presentationml/2006/main">
   <p:cSld>
     <p:spTree>
@@ -6829,7 +8747,7 @@
 </p:sld>
 </file>
 
-<file path=ppt/slides/slide12.xml><?xml version="1.0" encoding="utf-8"?>
+<file path=ppt/slides/slide14.xml><?xml version="1.0" encoding="utf-8"?>
 <p:sld xmlns:a="http://schemas.openxmlformats.org/drawingml/2006/main" xmlns:r="http://schemas.openxmlformats.org/officeDocument/2006/relationships" xmlns:p="http://schemas.openxmlformats.org/presentationml/2006/main">
   <p:cSld>
     <p:spTree>
@@ -7483,7 +9401,7 @@
 </p:sld>
 </file>
 
-<file path=ppt/slides/slide13.xml><?xml version="1.0" encoding="utf-8"?>
+<file path=ppt/slides/slide15.xml><?xml version="1.0" encoding="utf-8"?>
 <p:sld xmlns:a="http://schemas.openxmlformats.org/drawingml/2006/main" xmlns:r="http://schemas.openxmlformats.org/officeDocument/2006/relationships" xmlns:p="http://schemas.openxmlformats.org/presentationml/2006/main">
   <p:cSld>
     <p:spTree>
@@ -10066,7 +11984,7 @@
 </p:sld>
 </file>
 
-<file path=ppt/slides/slide14.xml><?xml version="1.0" encoding="utf-8"?>
+<file path=ppt/slides/slide16.xml><?xml version="1.0" encoding="utf-8"?>
 <p:sld xmlns:a="http://schemas.openxmlformats.org/drawingml/2006/main" xmlns:r="http://schemas.openxmlformats.org/officeDocument/2006/relationships" xmlns:p="http://schemas.openxmlformats.org/presentationml/2006/main">
   <p:cSld>
     <p:spTree>
@@ -11598,7 +13516,7 @@
 </p:sld>
 </file>
 
-<file path=ppt/slides/slide15.xml><?xml version="1.0" encoding="utf-8"?>
+<file path=ppt/slides/slide17.xml><?xml version="1.0" encoding="utf-8"?>
 <p:sld xmlns:a="http://schemas.openxmlformats.org/drawingml/2006/main" xmlns:r="http://schemas.openxmlformats.org/officeDocument/2006/relationships" xmlns:p="http://schemas.openxmlformats.org/presentationml/2006/main">
   <p:cSld>
     <p:spTree>
@@ -13146,7 +15064,7 @@
 </p:sld>
 </file>
 
-<file path=ppt/slides/slide16.xml><?xml version="1.0" encoding="utf-8"?>
+<file path=ppt/slides/slide18.xml><?xml version="1.0" encoding="utf-8"?>
 <p:sld xmlns:a="http://schemas.openxmlformats.org/drawingml/2006/main" xmlns:r="http://schemas.openxmlformats.org/officeDocument/2006/relationships" xmlns:p="http://schemas.openxmlformats.org/presentationml/2006/main">
   <p:cSld>
     <p:spTree>
@@ -14598,7 +16516,7 @@
 </p:sld>
 </file>
 
-<file path=ppt/slides/slide17.xml><?xml version="1.0" encoding="utf-8"?>
+<file path=ppt/slides/slide19.xml><?xml version="1.0" encoding="utf-8"?>
 <p:sld xmlns:a="http://schemas.openxmlformats.org/drawingml/2006/main" xmlns:r="http://schemas.openxmlformats.org/officeDocument/2006/relationships" xmlns:p="http://schemas.openxmlformats.org/presentationml/2006/main">
   <p:cSld>
     <p:spTree>
@@ -15166,868 +17084,6 @@
     <p:extLst>
       <p:ext uri="{BB962C8B-B14F-4D97-AF65-F5344CB8AC3E}">
         <p14:creationId xmlns:p14="http://schemas.microsoft.com/office/powerpoint/2010/main" val="1782236158"/>
-      </p:ext>
-    </p:extLst>
-  </p:cSld>
-  <p:clrMapOvr>
-    <a:masterClrMapping/>
-  </p:clrMapOvr>
-</p:sld>
-</file>
-
-<file path=ppt/slides/slide18.xml><?xml version="1.0" encoding="utf-8"?>
-<p:sld xmlns:a="http://schemas.openxmlformats.org/drawingml/2006/main" xmlns:r="http://schemas.openxmlformats.org/officeDocument/2006/relationships" xmlns:p="http://schemas.openxmlformats.org/presentationml/2006/main">
-  <p:cSld>
-    <p:spTree>
-      <p:nvGrpSpPr>
-        <p:cNvPr id="1" name="">
-          <a:extLst>
-            <a:ext uri="{FF2B5EF4-FFF2-40B4-BE49-F238E27FC236}">
-              <a16:creationId xmlns:a16="http://schemas.microsoft.com/office/drawing/2014/main" id="{DC63731C-82AF-FC00-6661-F53BAF996CCD}"/>
-            </a:ext>
-          </a:extLst>
-        </p:cNvPr>
-        <p:cNvGrpSpPr/>
-        <p:nvPr/>
-      </p:nvGrpSpPr>
-      <p:grpSpPr>
-        <a:xfrm>
-          <a:off x="0" y="0"/>
-          <a:ext cx="0" cy="0"/>
-          <a:chOff x="0" y="0"/>
-          <a:chExt cx="0" cy="0"/>
-        </a:xfrm>
-      </p:grpSpPr>
-      <p:sp>
-        <p:nvSpPr>
-          <p:cNvPr id="4" name="Rectangle 3">
-            <a:extLst>
-              <a:ext uri="{FF2B5EF4-FFF2-40B4-BE49-F238E27FC236}">
-                <a16:creationId xmlns:a16="http://schemas.microsoft.com/office/drawing/2014/main" id="{D72658E0-8942-2725-8131-A72636726D21}"/>
-              </a:ext>
-            </a:extLst>
-          </p:cNvPr>
-          <p:cNvSpPr/>
-          <p:nvPr/>
-        </p:nvSpPr>
-        <p:spPr>
-          <a:xfrm>
-            <a:off x="4329954" y="2305777"/>
-            <a:ext cx="3334871" cy="640080"/>
-          </a:xfrm>
-          <a:prstGeom prst="rect">
-            <a:avLst/>
-          </a:prstGeom>
-          <a:ln>
-            <a:prstDash val="dash"/>
-          </a:ln>
-        </p:spPr>
-        <p:style>
-          <a:lnRef idx="2">
-            <a:schemeClr val="accent1"/>
-          </a:lnRef>
-          <a:fillRef idx="1">
-            <a:schemeClr val="lt1"/>
-          </a:fillRef>
-          <a:effectRef idx="0">
-            <a:schemeClr val="accent1"/>
-          </a:effectRef>
-          <a:fontRef idx="minor">
-            <a:schemeClr val="dk1"/>
-          </a:fontRef>
-        </p:style>
-        <p:txBody>
-          <a:bodyPr rtlCol="0" anchor="ctr"/>
-          <a:lstStyle/>
-          <a:p>
-            <a:pPr algn="ctr"/>
-            <a:r>
-              <a:rPr lang="en-US" altLang="zh-CN" dirty="0"/>
-              <a:t>Content</a:t>
-            </a:r>
-            <a:r>
-              <a:rPr lang="zh-CN" altLang="en-US" dirty="0"/>
-              <a:t> </a:t>
-            </a:r>
-            <a:r>
-              <a:rPr lang="en-US" altLang="zh-CN" dirty="0"/>
-              <a:t>effect</a:t>
-            </a:r>
-            <a:br>
-              <a:rPr lang="en-US" altLang="zh-CN" dirty="0"/>
-            </a:br>
-            <a:r>
-              <a:rPr lang="en-US" altLang="zh-CN" dirty="0"/>
-              <a:t>(high</a:t>
-            </a:r>
-            <a:r>
-              <a:rPr lang="zh-CN" altLang="en-US" dirty="0"/>
-              <a:t> </a:t>
-            </a:r>
-            <a:r>
-              <a:rPr lang="en-US" altLang="zh-CN" dirty="0"/>
-              <a:t>quality</a:t>
-            </a:r>
-            <a:r>
-              <a:rPr lang="zh-CN" altLang="en-US" dirty="0"/>
-              <a:t> </a:t>
-            </a:r>
-            <a:r>
-              <a:rPr lang="en-US" altLang="zh-CN" dirty="0"/>
-              <a:t>→</a:t>
-            </a:r>
-            <a:r>
-              <a:rPr lang="zh-CN" altLang="en-US" dirty="0"/>
-              <a:t> </a:t>
-            </a:r>
-            <a:r>
-              <a:rPr lang="en-US" altLang="zh-CN" dirty="0"/>
-              <a:t>marginal</a:t>
-            </a:r>
-            <a:r>
-              <a:rPr lang="zh-CN" altLang="en-US" dirty="0"/>
-              <a:t> </a:t>
-            </a:r>
-            <a:r>
-              <a:rPr lang="en-US" altLang="zh-CN" dirty="0"/>
-              <a:t>value</a:t>
-            </a:r>
-            <a:r>
-              <a:rPr lang="zh-CN" altLang="en-US" dirty="0"/>
-              <a:t> </a:t>
-            </a:r>
-            <a:r>
-              <a:rPr lang="en-US" altLang="zh-CN" dirty="0"/>
-              <a:t>↓)</a:t>
-            </a:r>
-            <a:endParaRPr lang="en-US" dirty="0"/>
-          </a:p>
-        </p:txBody>
-      </p:sp>
-      <p:sp>
-        <p:nvSpPr>
-          <p:cNvPr id="5" name="Rectangle 4">
-            <a:extLst>
-              <a:ext uri="{FF2B5EF4-FFF2-40B4-BE49-F238E27FC236}">
-                <a16:creationId xmlns:a16="http://schemas.microsoft.com/office/drawing/2014/main" id="{45B5ECC5-85E0-451E-88CB-E3647102C9C3}"/>
-              </a:ext>
-            </a:extLst>
-          </p:cNvPr>
-          <p:cNvSpPr/>
-          <p:nvPr/>
-        </p:nvSpPr>
-        <p:spPr>
-          <a:xfrm>
-            <a:off x="1265080" y="3748052"/>
-            <a:ext cx="1463040" cy="640080"/>
-          </a:xfrm>
-          <a:prstGeom prst="rect">
-            <a:avLst/>
-          </a:prstGeom>
-        </p:spPr>
-        <p:style>
-          <a:lnRef idx="2">
-            <a:schemeClr val="accent1"/>
-          </a:lnRef>
-          <a:fillRef idx="1">
-            <a:schemeClr val="lt1"/>
-          </a:fillRef>
-          <a:effectRef idx="0">
-            <a:schemeClr val="accent1"/>
-          </a:effectRef>
-          <a:fontRef idx="minor">
-            <a:schemeClr val="dk1"/>
-          </a:fontRef>
-        </p:style>
-        <p:txBody>
-          <a:bodyPr rtlCol="0" anchor="ctr"/>
-          <a:lstStyle/>
-          <a:p>
-            <a:pPr algn="ctr"/>
-            <a:r>
-              <a:rPr lang="en-US" altLang="zh-CN" dirty="0"/>
-              <a:t>AI</a:t>
-            </a:r>
-            <a:endParaRPr lang="en-US" dirty="0"/>
-          </a:p>
-        </p:txBody>
-      </p:sp>
-      <p:sp>
-        <p:nvSpPr>
-          <p:cNvPr id="13" name="Rectangle 12">
-            <a:extLst>
-              <a:ext uri="{FF2B5EF4-FFF2-40B4-BE49-F238E27FC236}">
-                <a16:creationId xmlns:a16="http://schemas.microsoft.com/office/drawing/2014/main" id="{3C3A8775-EB63-AA3C-C538-7843F4E75BC1}"/>
-              </a:ext>
-            </a:extLst>
-          </p:cNvPr>
-          <p:cNvSpPr/>
-          <p:nvPr/>
-        </p:nvSpPr>
-        <p:spPr>
-          <a:xfrm>
-            <a:off x="8958396" y="2625817"/>
-            <a:ext cx="1463040" cy="640080"/>
-          </a:xfrm>
-          <a:prstGeom prst="rect">
-            <a:avLst/>
-          </a:prstGeom>
-        </p:spPr>
-        <p:style>
-          <a:lnRef idx="2">
-            <a:schemeClr val="accent1"/>
-          </a:lnRef>
-          <a:fillRef idx="1">
-            <a:schemeClr val="lt1"/>
-          </a:fillRef>
-          <a:effectRef idx="0">
-            <a:schemeClr val="accent1"/>
-          </a:effectRef>
-          <a:fontRef idx="minor">
-            <a:schemeClr val="dk1"/>
-          </a:fontRef>
-        </p:style>
-        <p:txBody>
-          <a:bodyPr rtlCol="0" anchor="ctr"/>
-          <a:lstStyle/>
-          <a:p>
-            <a:pPr algn="ctr"/>
-            <a:r>
-              <a:rPr lang="en-US" dirty="0"/>
-              <a:t>Answerer Contribution</a:t>
-            </a:r>
-          </a:p>
-        </p:txBody>
-      </p:sp>
-      <p:sp>
-        <p:nvSpPr>
-          <p:cNvPr id="14" name="Rectangle 13">
-            <a:extLst>
-              <a:ext uri="{FF2B5EF4-FFF2-40B4-BE49-F238E27FC236}">
-                <a16:creationId xmlns:a16="http://schemas.microsoft.com/office/drawing/2014/main" id="{B82A1549-A88C-CE02-18E0-F1B1964EF439}"/>
-              </a:ext>
-            </a:extLst>
-          </p:cNvPr>
-          <p:cNvSpPr/>
-          <p:nvPr/>
-        </p:nvSpPr>
-        <p:spPr>
-          <a:xfrm>
-            <a:off x="8958396" y="4515733"/>
-            <a:ext cx="1463040" cy="640080"/>
-          </a:xfrm>
-          <a:prstGeom prst="rect">
-            <a:avLst/>
-          </a:prstGeom>
-        </p:spPr>
-        <p:style>
-          <a:lnRef idx="2">
-            <a:schemeClr val="accent1"/>
-          </a:lnRef>
-          <a:fillRef idx="1">
-            <a:schemeClr val="lt1"/>
-          </a:fillRef>
-          <a:effectRef idx="0">
-            <a:schemeClr val="accent1"/>
-          </a:effectRef>
-          <a:fontRef idx="minor">
-            <a:schemeClr val="dk1"/>
-          </a:fontRef>
-        </p:style>
-        <p:txBody>
-          <a:bodyPr rtlCol="0" anchor="ctr"/>
-          <a:lstStyle/>
-          <a:p>
-            <a:pPr algn="ctr"/>
-            <a:r>
-              <a:rPr lang="en-US" dirty="0"/>
-              <a:t>Viewer Recognition</a:t>
-            </a:r>
-          </a:p>
-        </p:txBody>
-      </p:sp>
-      <p:sp>
-        <p:nvSpPr>
-          <p:cNvPr id="34" name="TextBox 33">
-            <a:extLst>
-              <a:ext uri="{FF2B5EF4-FFF2-40B4-BE49-F238E27FC236}">
-                <a16:creationId xmlns:a16="http://schemas.microsoft.com/office/drawing/2014/main" id="{1E1F9786-74A0-C89E-FF2C-5517656DCDAB}"/>
-              </a:ext>
-            </a:extLst>
-          </p:cNvPr>
-          <p:cNvSpPr txBox="1"/>
-          <p:nvPr/>
-        </p:nvSpPr>
-        <p:spPr>
-          <a:xfrm>
-            <a:off x="1746484" y="1100541"/>
-            <a:ext cx="8385266" cy="369332"/>
-          </a:xfrm>
-          <a:prstGeom prst="rect">
-            <a:avLst/>
-          </a:prstGeom>
-          <a:noFill/>
-        </p:spPr>
-        <p:txBody>
-          <a:bodyPr wrap="square" rtlCol="0">
-            <a:spAutoFit/>
-          </a:bodyPr>
-          <a:lstStyle/>
-          <a:p>
-            <a:pPr algn="ctr"/>
-            <a:r>
-              <a:rPr lang="en-US" dirty="0"/>
-              <a:t>Human-AI</a:t>
-            </a:r>
-            <a:r>
-              <a:rPr lang="zh-CN" altLang="en-US" dirty="0"/>
-              <a:t> </a:t>
-            </a:r>
-            <a:r>
-              <a:rPr lang="en-US" dirty="0"/>
-              <a:t>Competition</a:t>
-            </a:r>
-            <a:r>
-              <a:rPr lang="zh-CN" altLang="en-US" dirty="0"/>
-              <a:t> </a:t>
-            </a:r>
-            <a:r>
-              <a:rPr lang="en-US" altLang="zh-CN" dirty="0"/>
-              <a:t>(regard</a:t>
-            </a:r>
-            <a:r>
-              <a:rPr lang="zh-CN" altLang="en-US" dirty="0"/>
-              <a:t> </a:t>
-            </a:r>
-            <a:r>
-              <a:rPr lang="en-US" altLang="zh-CN" dirty="0"/>
-              <a:t>AI</a:t>
-            </a:r>
-            <a:r>
-              <a:rPr lang="zh-CN" altLang="en-US" dirty="0"/>
-              <a:t> </a:t>
-            </a:r>
-            <a:r>
-              <a:rPr lang="en-US" altLang="zh-CN" dirty="0"/>
-              <a:t>answers</a:t>
-            </a:r>
-            <a:r>
-              <a:rPr lang="zh-CN" altLang="en-US" dirty="0"/>
-              <a:t> </a:t>
-            </a:r>
-            <a:r>
-              <a:rPr lang="en-US" altLang="zh-CN" dirty="0"/>
-              <a:t>as</a:t>
-            </a:r>
-            <a:r>
-              <a:rPr lang="zh-CN" altLang="en-US" dirty="0"/>
-              <a:t> </a:t>
-            </a:r>
-            <a:r>
-              <a:rPr lang="en-US" altLang="zh-CN" dirty="0"/>
-              <a:t>the</a:t>
-            </a:r>
-            <a:r>
-              <a:rPr lang="zh-CN" altLang="en-US" dirty="0"/>
-              <a:t> </a:t>
-            </a:r>
-            <a:r>
-              <a:rPr lang="en-US" altLang="zh-CN" dirty="0"/>
-              <a:t>competitor</a:t>
-            </a:r>
-            <a:r>
-              <a:rPr lang="zh-CN" altLang="en-US" dirty="0"/>
-              <a:t> </a:t>
-            </a:r>
-            <a:r>
-              <a:rPr lang="en-US" altLang="zh-CN" dirty="0"/>
-              <a:t>answer)</a:t>
-            </a:r>
-            <a:endParaRPr lang="en-US" dirty="0"/>
-          </a:p>
-        </p:txBody>
-      </p:sp>
-      <p:cxnSp>
-        <p:nvCxnSpPr>
-          <p:cNvPr id="3" name="Straight Arrow Connector 2">
-            <a:extLst>
-              <a:ext uri="{FF2B5EF4-FFF2-40B4-BE49-F238E27FC236}">
-                <a16:creationId xmlns:a16="http://schemas.microsoft.com/office/drawing/2014/main" id="{265384D4-AF8B-DA98-585C-340B93C3E606}"/>
-              </a:ext>
-            </a:extLst>
-          </p:cNvPr>
-          <p:cNvCxnSpPr>
-            <a:cxnSpLocks/>
-            <a:stCxn id="5" idx="3"/>
-          </p:cNvCxnSpPr>
-          <p:nvPr/>
-        </p:nvCxnSpPr>
-        <p:spPr>
-          <a:xfrm flipV="1">
-            <a:off x="2728120" y="2940675"/>
-            <a:ext cx="1601833" cy="1127417"/>
-          </a:xfrm>
-          <a:prstGeom prst="straightConnector1">
-            <a:avLst/>
-          </a:prstGeom>
-          <a:ln>
-            <a:tailEnd type="triangle"/>
-          </a:ln>
-        </p:spPr>
-        <p:style>
-          <a:lnRef idx="2">
-            <a:schemeClr val="accent1"/>
-          </a:lnRef>
-          <a:fillRef idx="0">
-            <a:schemeClr val="accent1"/>
-          </a:fillRef>
-          <a:effectRef idx="1">
-            <a:schemeClr val="accent1"/>
-          </a:effectRef>
-          <a:fontRef idx="minor">
-            <a:schemeClr val="tx1"/>
-          </a:fontRef>
-        </p:style>
-      </p:cxnSp>
-      <p:sp>
-        <p:nvSpPr>
-          <p:cNvPr id="12" name="Rectangle 11">
-            <a:extLst>
-              <a:ext uri="{FF2B5EF4-FFF2-40B4-BE49-F238E27FC236}">
-                <a16:creationId xmlns:a16="http://schemas.microsoft.com/office/drawing/2014/main" id="{DC78C8FA-A90A-6977-0D77-5F5278CA079F}"/>
-              </a:ext>
-            </a:extLst>
-          </p:cNvPr>
-          <p:cNvSpPr/>
-          <p:nvPr/>
-        </p:nvSpPr>
-        <p:spPr>
-          <a:xfrm>
-            <a:off x="4329953" y="2940675"/>
-            <a:ext cx="3334871" cy="640080"/>
-          </a:xfrm>
-          <a:prstGeom prst="rect">
-            <a:avLst/>
-          </a:prstGeom>
-          <a:ln>
-            <a:prstDash val="dash"/>
-          </a:ln>
-        </p:spPr>
-        <p:style>
-          <a:lnRef idx="2">
-            <a:schemeClr val="accent1"/>
-          </a:lnRef>
-          <a:fillRef idx="1">
-            <a:schemeClr val="lt1"/>
-          </a:fillRef>
-          <a:effectRef idx="0">
-            <a:schemeClr val="accent1"/>
-          </a:effectRef>
-          <a:fontRef idx="minor">
-            <a:schemeClr val="dk1"/>
-          </a:fontRef>
-        </p:style>
-        <p:txBody>
-          <a:bodyPr rtlCol="0" anchor="ctr"/>
-          <a:lstStyle/>
-          <a:p>
-            <a:pPr algn="ctr"/>
-            <a:r>
-              <a:rPr lang="en-US" altLang="zh-CN" dirty="0"/>
-              <a:t>Source</a:t>
-            </a:r>
-            <a:r>
-              <a:rPr lang="zh-CN" altLang="en-US" dirty="0"/>
-              <a:t> </a:t>
-            </a:r>
-            <a:r>
-              <a:rPr lang="en-US" altLang="zh-CN" dirty="0"/>
-              <a:t>effect</a:t>
-            </a:r>
-            <a:br>
-              <a:rPr lang="en-US" altLang="zh-CN" dirty="0"/>
-            </a:br>
-            <a:r>
-              <a:rPr lang="en-US" altLang="zh-CN" dirty="0"/>
-              <a:t>(authority</a:t>
-            </a:r>
-            <a:r>
-              <a:rPr lang="zh-CN" altLang="en-US" dirty="0"/>
-              <a:t> </a:t>
-            </a:r>
-            <a:r>
-              <a:rPr lang="en-US" altLang="zh-CN" dirty="0"/>
-              <a:t>→ marginal</a:t>
-            </a:r>
-            <a:r>
-              <a:rPr lang="zh-CN" altLang="en-US" dirty="0"/>
-              <a:t> </a:t>
-            </a:r>
-            <a:r>
-              <a:rPr lang="en-US" altLang="zh-CN" dirty="0"/>
-              <a:t>value</a:t>
-            </a:r>
-            <a:r>
-              <a:rPr lang="zh-CN" altLang="en-US" dirty="0"/>
-              <a:t> </a:t>
-            </a:r>
-            <a:r>
-              <a:rPr lang="en-US" altLang="zh-CN" dirty="0"/>
-              <a:t>↓)</a:t>
-            </a:r>
-            <a:endParaRPr lang="en-US" dirty="0"/>
-          </a:p>
-        </p:txBody>
-      </p:sp>
-      <p:sp>
-        <p:nvSpPr>
-          <p:cNvPr id="16" name="TextBox 15">
-            <a:extLst>
-              <a:ext uri="{FF2B5EF4-FFF2-40B4-BE49-F238E27FC236}">
-                <a16:creationId xmlns:a16="http://schemas.microsoft.com/office/drawing/2014/main" id="{677B8FC5-3389-10C4-FBF9-F7D5075E934E}"/>
-              </a:ext>
-            </a:extLst>
-          </p:cNvPr>
-          <p:cNvSpPr txBox="1"/>
-          <p:nvPr/>
-        </p:nvSpPr>
-        <p:spPr>
-          <a:xfrm>
-            <a:off x="4653895" y="1885479"/>
-            <a:ext cx="2570443" cy="369332"/>
-          </a:xfrm>
-          <a:prstGeom prst="rect">
-            <a:avLst/>
-          </a:prstGeom>
-          <a:noFill/>
-        </p:spPr>
-        <p:txBody>
-          <a:bodyPr wrap="square" rtlCol="0">
-            <a:spAutoFit/>
-          </a:bodyPr>
-          <a:lstStyle/>
-          <a:p>
-            <a:r>
-              <a:rPr lang="en-US" altLang="zh-CN" dirty="0"/>
-              <a:t>Incentive</a:t>
-            </a:r>
-            <a:r>
-              <a:rPr lang="zh-CN" altLang="en-US" dirty="0"/>
-              <a:t> </a:t>
-            </a:r>
-            <a:r>
-              <a:rPr lang="en-US" altLang="zh-CN" dirty="0"/>
-              <a:t>=</a:t>
-            </a:r>
-            <a:r>
-              <a:rPr lang="zh-CN" altLang="en-US" dirty="0"/>
-              <a:t> </a:t>
-            </a:r>
-            <a:r>
-              <a:rPr lang="en-US" altLang="zh-CN" dirty="0"/>
-              <a:t>value</a:t>
-            </a:r>
-            <a:r>
-              <a:rPr lang="zh-CN" altLang="en-US" dirty="0"/>
-              <a:t> </a:t>
-            </a:r>
-            <a:r>
-              <a:rPr lang="en-US" altLang="zh-CN" dirty="0"/>
-              <a:t>–</a:t>
-            </a:r>
-            <a:r>
-              <a:rPr lang="zh-CN" altLang="en-US" dirty="0"/>
-              <a:t> </a:t>
-            </a:r>
-            <a:r>
-              <a:rPr lang="en-US" altLang="zh-CN" dirty="0"/>
-              <a:t>cost</a:t>
-            </a:r>
-            <a:endParaRPr lang="en-US" dirty="0"/>
-          </a:p>
-        </p:txBody>
-      </p:sp>
-      <p:cxnSp>
-        <p:nvCxnSpPr>
-          <p:cNvPr id="20" name="Straight Arrow Connector 19">
-            <a:extLst>
-              <a:ext uri="{FF2B5EF4-FFF2-40B4-BE49-F238E27FC236}">
-                <a16:creationId xmlns:a16="http://schemas.microsoft.com/office/drawing/2014/main" id="{3E485473-7655-C09D-358E-36BFB2C1CE67}"/>
-              </a:ext>
-            </a:extLst>
-          </p:cNvPr>
-          <p:cNvCxnSpPr>
-            <a:cxnSpLocks/>
-            <a:endCxn id="13" idx="1"/>
-          </p:cNvCxnSpPr>
-          <p:nvPr/>
-        </p:nvCxnSpPr>
-        <p:spPr>
-          <a:xfrm>
-            <a:off x="7548282" y="2940675"/>
-            <a:ext cx="1410114" cy="5182"/>
-          </a:xfrm>
-          <a:prstGeom prst="straightConnector1">
-            <a:avLst/>
-          </a:prstGeom>
-          <a:ln>
-            <a:tailEnd type="triangle"/>
-          </a:ln>
-        </p:spPr>
-        <p:style>
-          <a:lnRef idx="2">
-            <a:schemeClr val="accent1"/>
-          </a:lnRef>
-          <a:fillRef idx="0">
-            <a:schemeClr val="accent1"/>
-          </a:fillRef>
-          <a:effectRef idx="1">
-            <a:schemeClr val="accent1"/>
-          </a:effectRef>
-          <a:fontRef idx="minor">
-            <a:schemeClr val="tx1"/>
-          </a:fontRef>
-        </p:style>
-      </p:cxnSp>
-      <p:cxnSp>
-        <p:nvCxnSpPr>
-          <p:cNvPr id="24" name="Straight Arrow Connector 23">
-            <a:extLst>
-              <a:ext uri="{FF2B5EF4-FFF2-40B4-BE49-F238E27FC236}">
-                <a16:creationId xmlns:a16="http://schemas.microsoft.com/office/drawing/2014/main" id="{AA1684D0-7F2C-7AE7-018C-2EB2889E1457}"/>
-              </a:ext>
-            </a:extLst>
-          </p:cNvPr>
-          <p:cNvCxnSpPr>
-            <a:cxnSpLocks/>
-            <a:stCxn id="5" idx="3"/>
-          </p:cNvCxnSpPr>
-          <p:nvPr/>
-        </p:nvCxnSpPr>
-        <p:spPr>
-          <a:xfrm>
-            <a:off x="2728120" y="4068092"/>
-            <a:ext cx="1601832" cy="767681"/>
-          </a:xfrm>
-          <a:prstGeom prst="straightConnector1">
-            <a:avLst/>
-          </a:prstGeom>
-          <a:ln>
-            <a:tailEnd type="triangle"/>
-          </a:ln>
-        </p:spPr>
-        <p:style>
-          <a:lnRef idx="2">
-            <a:schemeClr val="accent1"/>
-          </a:lnRef>
-          <a:fillRef idx="0">
-            <a:schemeClr val="accent1"/>
-          </a:fillRef>
-          <a:effectRef idx="1">
-            <a:schemeClr val="accent1"/>
-          </a:effectRef>
-          <a:fontRef idx="minor">
-            <a:schemeClr val="tx1"/>
-          </a:fontRef>
-        </p:style>
-      </p:cxnSp>
-      <p:sp>
-        <p:nvSpPr>
-          <p:cNvPr id="27" name="Rectangle 26">
-            <a:extLst>
-              <a:ext uri="{FF2B5EF4-FFF2-40B4-BE49-F238E27FC236}">
-                <a16:creationId xmlns:a16="http://schemas.microsoft.com/office/drawing/2014/main" id="{B6DFD5CA-A49C-9686-D0EA-0E0BFDAE5C79}"/>
-              </a:ext>
-            </a:extLst>
-          </p:cNvPr>
-          <p:cNvSpPr/>
-          <p:nvPr/>
-        </p:nvSpPr>
-        <p:spPr>
-          <a:xfrm>
-            <a:off x="4329953" y="4515733"/>
-            <a:ext cx="3334871" cy="640080"/>
-          </a:xfrm>
-          <a:prstGeom prst="rect">
-            <a:avLst/>
-          </a:prstGeom>
-          <a:ln>
-            <a:prstDash val="dash"/>
-          </a:ln>
-        </p:spPr>
-        <p:style>
-          <a:lnRef idx="2">
-            <a:schemeClr val="accent1"/>
-          </a:lnRef>
-          <a:fillRef idx="1">
-            <a:schemeClr val="lt1"/>
-          </a:fillRef>
-          <a:effectRef idx="0">
-            <a:schemeClr val="accent1"/>
-          </a:effectRef>
-          <a:fontRef idx="minor">
-            <a:schemeClr val="dk1"/>
-          </a:fontRef>
-        </p:style>
-        <p:txBody>
-          <a:bodyPr rtlCol="0" anchor="ctr"/>
-          <a:lstStyle/>
-          <a:p>
-            <a:pPr algn="ctr"/>
-            <a:r>
-              <a:rPr lang="en-US" altLang="zh-CN" dirty="0"/>
-              <a:t>Elevated</a:t>
-            </a:r>
-            <a:r>
-              <a:rPr lang="zh-CN" altLang="en-US" dirty="0"/>
-              <a:t> </a:t>
-            </a:r>
-            <a:r>
-              <a:rPr lang="en-US" altLang="zh-CN" dirty="0"/>
-              <a:t>expectation</a:t>
-            </a:r>
-            <a:br>
-              <a:rPr lang="en-US" altLang="zh-CN" dirty="0"/>
-            </a:br>
-            <a:r>
-              <a:rPr lang="en-US" altLang="zh-CN" dirty="0"/>
-              <a:t>(benchmark</a:t>
-            </a:r>
-            <a:r>
-              <a:rPr lang="zh-CN" altLang="en-US" dirty="0"/>
-              <a:t> </a:t>
-            </a:r>
-            <a:r>
-              <a:rPr lang="en-US" altLang="zh-CN" dirty="0"/>
-              <a:t>↑)</a:t>
-            </a:r>
-            <a:endParaRPr lang="en-US" dirty="0"/>
-          </a:p>
-        </p:txBody>
-      </p:sp>
-      <p:sp>
-        <p:nvSpPr>
-          <p:cNvPr id="28" name="TextBox 27">
-            <a:extLst>
-              <a:ext uri="{FF2B5EF4-FFF2-40B4-BE49-F238E27FC236}">
-                <a16:creationId xmlns:a16="http://schemas.microsoft.com/office/drawing/2014/main" id="{CD191340-2DD1-76F8-4F27-CA6EBB8B01F0}"/>
-              </a:ext>
-            </a:extLst>
-          </p:cNvPr>
-          <p:cNvSpPr txBox="1"/>
-          <p:nvPr/>
-        </p:nvSpPr>
-        <p:spPr>
-          <a:xfrm>
-            <a:off x="3756423" y="4127094"/>
-            <a:ext cx="4528092" cy="369332"/>
-          </a:xfrm>
-          <a:prstGeom prst="rect">
-            <a:avLst/>
-          </a:prstGeom>
-          <a:noFill/>
-        </p:spPr>
-        <p:txBody>
-          <a:bodyPr wrap="square" rtlCol="0">
-            <a:spAutoFit/>
-          </a:bodyPr>
-          <a:lstStyle/>
-          <a:p>
-            <a:r>
-              <a:rPr lang="en-US" altLang="zh-CN" dirty="0"/>
-              <a:t>Incentive</a:t>
-            </a:r>
-            <a:r>
-              <a:rPr lang="zh-CN" altLang="en-US" dirty="0"/>
-              <a:t> </a:t>
-            </a:r>
-            <a:r>
-              <a:rPr lang="en-US" altLang="zh-CN" dirty="0"/>
-              <a:t>=</a:t>
-            </a:r>
-            <a:r>
-              <a:rPr lang="zh-CN" altLang="en-US" dirty="0"/>
-              <a:t> </a:t>
-            </a:r>
-            <a:r>
-              <a:rPr lang="en-US" altLang="zh-CN" dirty="0"/>
-              <a:t>(quality</a:t>
-            </a:r>
-            <a:r>
-              <a:rPr lang="zh-CN" altLang="en-US" dirty="0"/>
-              <a:t> </a:t>
-            </a:r>
-            <a:r>
-              <a:rPr lang="en-US" altLang="zh-CN" dirty="0"/>
-              <a:t>–</a:t>
-            </a:r>
-            <a:r>
-              <a:rPr lang="zh-CN" altLang="en-US" dirty="0"/>
-              <a:t> </a:t>
-            </a:r>
-            <a:r>
-              <a:rPr lang="en-US" altLang="zh-CN" dirty="0"/>
-              <a:t>benchmark)</a:t>
-            </a:r>
-            <a:r>
-              <a:rPr lang="zh-CN" altLang="en-US" dirty="0"/>
-              <a:t>*</a:t>
-            </a:r>
-            <a:r>
-              <a:rPr lang="en-US" altLang="zh-CN" dirty="0"/>
-              <a:t>visibility</a:t>
-            </a:r>
-            <a:endParaRPr lang="en-US" dirty="0"/>
-          </a:p>
-        </p:txBody>
-      </p:sp>
-      <p:cxnSp>
-        <p:nvCxnSpPr>
-          <p:cNvPr id="29" name="Straight Arrow Connector 28">
-            <a:extLst>
-              <a:ext uri="{FF2B5EF4-FFF2-40B4-BE49-F238E27FC236}">
-                <a16:creationId xmlns:a16="http://schemas.microsoft.com/office/drawing/2014/main" id="{5B0EA263-E16B-EF20-5D8E-C56C0E3F20C7}"/>
-              </a:ext>
-            </a:extLst>
-          </p:cNvPr>
-          <p:cNvCxnSpPr>
-            <a:cxnSpLocks/>
-            <a:stCxn id="27" idx="3"/>
-            <a:endCxn id="14" idx="1"/>
-          </p:cNvCxnSpPr>
-          <p:nvPr/>
-        </p:nvCxnSpPr>
-        <p:spPr>
-          <a:xfrm>
-            <a:off x="7664824" y="4835773"/>
-            <a:ext cx="1293572" cy="0"/>
-          </a:xfrm>
-          <a:prstGeom prst="straightConnector1">
-            <a:avLst/>
-          </a:prstGeom>
-          <a:ln>
-            <a:tailEnd type="triangle"/>
-          </a:ln>
-        </p:spPr>
-        <p:style>
-          <a:lnRef idx="2">
-            <a:schemeClr val="accent1"/>
-          </a:lnRef>
-          <a:fillRef idx="0">
-            <a:schemeClr val="accent1"/>
-          </a:fillRef>
-          <a:effectRef idx="1">
-            <a:schemeClr val="accent1"/>
-          </a:effectRef>
-          <a:fontRef idx="minor">
-            <a:schemeClr val="tx1"/>
-          </a:fontRef>
-        </p:style>
-      </p:cxnSp>
-    </p:spTree>
-    <p:extLst>
-      <p:ext uri="{BB962C8B-B14F-4D97-AF65-F5344CB8AC3E}">
-        <p14:creationId xmlns:p14="http://schemas.microsoft.com/office/powerpoint/2010/main" val="1428136669"/>
       </p:ext>
     </p:extLst>
   </p:cSld>
@@ -17390,7 +18446,7 @@
 </p:sld>
 </file>
 
-<file path=ppt/slides/slide3.xml><?xml version="1.0" encoding="utf-8"?>
+<file path=ppt/slides/slide20.xml><?xml version="1.0" encoding="utf-8"?>
 <p:sld xmlns:a="http://schemas.openxmlformats.org/drawingml/2006/main" xmlns:r="http://schemas.openxmlformats.org/officeDocument/2006/relationships" xmlns:p="http://schemas.openxmlformats.org/presentationml/2006/main">
   <p:cSld>
     <p:spTree>
@@ -17398,7 +18454,7 @@
         <p:cNvPr id="1" name="">
           <a:extLst>
             <a:ext uri="{FF2B5EF4-FFF2-40B4-BE49-F238E27FC236}">
-              <a16:creationId xmlns:a16="http://schemas.microsoft.com/office/drawing/2014/main" id="{E28829E9-7187-3669-CABE-D069CB341204}"/>
+              <a16:creationId xmlns:a16="http://schemas.microsoft.com/office/drawing/2014/main" id="{DC63731C-82AF-FC00-6661-F53BAF996CCD}"/>
             </a:ext>
           </a:extLst>
         </p:cNvPr>
@@ -17415,10 +18471,872 @@
       </p:grpSpPr>
       <p:sp>
         <p:nvSpPr>
+          <p:cNvPr id="4" name="Rectangle 3">
+            <a:extLst>
+              <a:ext uri="{FF2B5EF4-FFF2-40B4-BE49-F238E27FC236}">
+                <a16:creationId xmlns:a16="http://schemas.microsoft.com/office/drawing/2014/main" id="{D72658E0-8942-2725-8131-A72636726D21}"/>
+              </a:ext>
+            </a:extLst>
+          </p:cNvPr>
+          <p:cNvSpPr/>
+          <p:nvPr/>
+        </p:nvSpPr>
+        <p:spPr>
+          <a:xfrm>
+            <a:off x="4329954" y="2305777"/>
+            <a:ext cx="3334871" cy="640080"/>
+          </a:xfrm>
+          <a:prstGeom prst="rect">
+            <a:avLst/>
+          </a:prstGeom>
+          <a:ln>
+            <a:prstDash val="dash"/>
+          </a:ln>
+        </p:spPr>
+        <p:style>
+          <a:lnRef idx="2">
+            <a:schemeClr val="accent1"/>
+          </a:lnRef>
+          <a:fillRef idx="1">
+            <a:schemeClr val="lt1"/>
+          </a:fillRef>
+          <a:effectRef idx="0">
+            <a:schemeClr val="accent1"/>
+          </a:effectRef>
+          <a:fontRef idx="minor">
+            <a:schemeClr val="dk1"/>
+          </a:fontRef>
+        </p:style>
+        <p:txBody>
+          <a:bodyPr rtlCol="0" anchor="ctr"/>
+          <a:lstStyle/>
+          <a:p>
+            <a:pPr algn="ctr"/>
+            <a:r>
+              <a:rPr lang="en-US" altLang="zh-CN" dirty="0"/>
+              <a:t>Content</a:t>
+            </a:r>
+            <a:r>
+              <a:rPr lang="zh-CN" altLang="en-US" dirty="0"/>
+              <a:t> </a:t>
+            </a:r>
+            <a:r>
+              <a:rPr lang="en-US" altLang="zh-CN" dirty="0"/>
+              <a:t>effect</a:t>
+            </a:r>
+            <a:br>
+              <a:rPr lang="en-US" altLang="zh-CN" dirty="0"/>
+            </a:br>
+            <a:r>
+              <a:rPr lang="en-US" altLang="zh-CN" dirty="0"/>
+              <a:t>(high</a:t>
+            </a:r>
+            <a:r>
+              <a:rPr lang="zh-CN" altLang="en-US" dirty="0"/>
+              <a:t> </a:t>
+            </a:r>
+            <a:r>
+              <a:rPr lang="en-US" altLang="zh-CN" dirty="0"/>
+              <a:t>quality</a:t>
+            </a:r>
+            <a:r>
+              <a:rPr lang="zh-CN" altLang="en-US" dirty="0"/>
+              <a:t> </a:t>
+            </a:r>
+            <a:r>
+              <a:rPr lang="en-US" altLang="zh-CN" dirty="0"/>
+              <a:t>→</a:t>
+            </a:r>
+            <a:r>
+              <a:rPr lang="zh-CN" altLang="en-US" dirty="0"/>
+              <a:t> </a:t>
+            </a:r>
+            <a:r>
+              <a:rPr lang="en-US" altLang="zh-CN" dirty="0"/>
+              <a:t>marginal</a:t>
+            </a:r>
+            <a:r>
+              <a:rPr lang="zh-CN" altLang="en-US" dirty="0"/>
+              <a:t> </a:t>
+            </a:r>
+            <a:r>
+              <a:rPr lang="en-US" altLang="zh-CN" dirty="0"/>
+              <a:t>value</a:t>
+            </a:r>
+            <a:r>
+              <a:rPr lang="zh-CN" altLang="en-US" dirty="0"/>
+              <a:t> </a:t>
+            </a:r>
+            <a:r>
+              <a:rPr lang="en-US" altLang="zh-CN" dirty="0"/>
+              <a:t>↓)</a:t>
+            </a:r>
+            <a:endParaRPr lang="en-US" dirty="0"/>
+          </a:p>
+        </p:txBody>
+      </p:sp>
+      <p:sp>
+        <p:nvSpPr>
+          <p:cNvPr id="5" name="Rectangle 4">
+            <a:extLst>
+              <a:ext uri="{FF2B5EF4-FFF2-40B4-BE49-F238E27FC236}">
+                <a16:creationId xmlns:a16="http://schemas.microsoft.com/office/drawing/2014/main" id="{45B5ECC5-85E0-451E-88CB-E3647102C9C3}"/>
+              </a:ext>
+            </a:extLst>
+          </p:cNvPr>
+          <p:cNvSpPr/>
+          <p:nvPr/>
+        </p:nvSpPr>
+        <p:spPr>
+          <a:xfrm>
+            <a:off x="1265080" y="3748052"/>
+            <a:ext cx="1463040" cy="640080"/>
+          </a:xfrm>
+          <a:prstGeom prst="rect">
+            <a:avLst/>
+          </a:prstGeom>
+        </p:spPr>
+        <p:style>
+          <a:lnRef idx="2">
+            <a:schemeClr val="accent1"/>
+          </a:lnRef>
+          <a:fillRef idx="1">
+            <a:schemeClr val="lt1"/>
+          </a:fillRef>
+          <a:effectRef idx="0">
+            <a:schemeClr val="accent1"/>
+          </a:effectRef>
+          <a:fontRef idx="minor">
+            <a:schemeClr val="dk1"/>
+          </a:fontRef>
+        </p:style>
+        <p:txBody>
+          <a:bodyPr rtlCol="0" anchor="ctr"/>
+          <a:lstStyle/>
+          <a:p>
+            <a:pPr algn="ctr"/>
+            <a:r>
+              <a:rPr lang="en-US" altLang="zh-CN" dirty="0"/>
+              <a:t>AI</a:t>
+            </a:r>
+            <a:endParaRPr lang="en-US" dirty="0"/>
+          </a:p>
+        </p:txBody>
+      </p:sp>
+      <p:sp>
+        <p:nvSpPr>
           <p:cNvPr id="13" name="Rectangle 12">
             <a:extLst>
               <a:ext uri="{FF2B5EF4-FFF2-40B4-BE49-F238E27FC236}">
-                <a16:creationId xmlns:a16="http://schemas.microsoft.com/office/drawing/2014/main" id="{14BBB605-6E18-5203-A9A5-9AC04E5B172E}"/>
+                <a16:creationId xmlns:a16="http://schemas.microsoft.com/office/drawing/2014/main" id="{3C3A8775-EB63-AA3C-C538-7843F4E75BC1}"/>
+              </a:ext>
+            </a:extLst>
+          </p:cNvPr>
+          <p:cNvSpPr/>
+          <p:nvPr/>
+        </p:nvSpPr>
+        <p:spPr>
+          <a:xfrm>
+            <a:off x="8958396" y="2625817"/>
+            <a:ext cx="1463040" cy="640080"/>
+          </a:xfrm>
+          <a:prstGeom prst="rect">
+            <a:avLst/>
+          </a:prstGeom>
+        </p:spPr>
+        <p:style>
+          <a:lnRef idx="2">
+            <a:schemeClr val="accent1"/>
+          </a:lnRef>
+          <a:fillRef idx="1">
+            <a:schemeClr val="lt1"/>
+          </a:fillRef>
+          <a:effectRef idx="0">
+            <a:schemeClr val="accent1"/>
+          </a:effectRef>
+          <a:fontRef idx="minor">
+            <a:schemeClr val="dk1"/>
+          </a:fontRef>
+        </p:style>
+        <p:txBody>
+          <a:bodyPr rtlCol="0" anchor="ctr"/>
+          <a:lstStyle/>
+          <a:p>
+            <a:pPr algn="ctr"/>
+            <a:r>
+              <a:rPr lang="en-US" dirty="0"/>
+              <a:t>Answerer Contribution</a:t>
+            </a:r>
+          </a:p>
+        </p:txBody>
+      </p:sp>
+      <p:sp>
+        <p:nvSpPr>
+          <p:cNvPr id="14" name="Rectangle 13">
+            <a:extLst>
+              <a:ext uri="{FF2B5EF4-FFF2-40B4-BE49-F238E27FC236}">
+                <a16:creationId xmlns:a16="http://schemas.microsoft.com/office/drawing/2014/main" id="{B82A1549-A88C-CE02-18E0-F1B1964EF439}"/>
+              </a:ext>
+            </a:extLst>
+          </p:cNvPr>
+          <p:cNvSpPr/>
+          <p:nvPr/>
+        </p:nvSpPr>
+        <p:spPr>
+          <a:xfrm>
+            <a:off x="8958396" y="4515733"/>
+            <a:ext cx="1463040" cy="640080"/>
+          </a:xfrm>
+          <a:prstGeom prst="rect">
+            <a:avLst/>
+          </a:prstGeom>
+        </p:spPr>
+        <p:style>
+          <a:lnRef idx="2">
+            <a:schemeClr val="accent1"/>
+          </a:lnRef>
+          <a:fillRef idx="1">
+            <a:schemeClr val="lt1"/>
+          </a:fillRef>
+          <a:effectRef idx="0">
+            <a:schemeClr val="accent1"/>
+          </a:effectRef>
+          <a:fontRef idx="minor">
+            <a:schemeClr val="dk1"/>
+          </a:fontRef>
+        </p:style>
+        <p:txBody>
+          <a:bodyPr rtlCol="0" anchor="ctr"/>
+          <a:lstStyle/>
+          <a:p>
+            <a:pPr algn="ctr"/>
+            <a:r>
+              <a:rPr lang="en-US" dirty="0"/>
+              <a:t>Viewer Recognition</a:t>
+            </a:r>
+          </a:p>
+        </p:txBody>
+      </p:sp>
+      <p:sp>
+        <p:nvSpPr>
+          <p:cNvPr id="34" name="TextBox 33">
+            <a:extLst>
+              <a:ext uri="{FF2B5EF4-FFF2-40B4-BE49-F238E27FC236}">
+                <a16:creationId xmlns:a16="http://schemas.microsoft.com/office/drawing/2014/main" id="{1E1F9786-74A0-C89E-FF2C-5517656DCDAB}"/>
+              </a:ext>
+            </a:extLst>
+          </p:cNvPr>
+          <p:cNvSpPr txBox="1"/>
+          <p:nvPr/>
+        </p:nvSpPr>
+        <p:spPr>
+          <a:xfrm>
+            <a:off x="1746484" y="1100541"/>
+            <a:ext cx="8385266" cy="369332"/>
+          </a:xfrm>
+          <a:prstGeom prst="rect">
+            <a:avLst/>
+          </a:prstGeom>
+          <a:noFill/>
+        </p:spPr>
+        <p:txBody>
+          <a:bodyPr wrap="square" rtlCol="0">
+            <a:spAutoFit/>
+          </a:bodyPr>
+          <a:lstStyle/>
+          <a:p>
+            <a:pPr algn="ctr"/>
+            <a:r>
+              <a:rPr lang="en-US" dirty="0"/>
+              <a:t>Human-AI</a:t>
+            </a:r>
+            <a:r>
+              <a:rPr lang="zh-CN" altLang="en-US" dirty="0"/>
+              <a:t> </a:t>
+            </a:r>
+            <a:r>
+              <a:rPr lang="en-US" dirty="0"/>
+              <a:t>Competition</a:t>
+            </a:r>
+            <a:r>
+              <a:rPr lang="zh-CN" altLang="en-US" dirty="0"/>
+              <a:t> </a:t>
+            </a:r>
+            <a:r>
+              <a:rPr lang="en-US" altLang="zh-CN" dirty="0"/>
+              <a:t>(regard</a:t>
+            </a:r>
+            <a:r>
+              <a:rPr lang="zh-CN" altLang="en-US" dirty="0"/>
+              <a:t> </a:t>
+            </a:r>
+            <a:r>
+              <a:rPr lang="en-US" altLang="zh-CN" dirty="0"/>
+              <a:t>AI</a:t>
+            </a:r>
+            <a:r>
+              <a:rPr lang="zh-CN" altLang="en-US" dirty="0"/>
+              <a:t> </a:t>
+            </a:r>
+            <a:r>
+              <a:rPr lang="en-US" altLang="zh-CN" dirty="0"/>
+              <a:t>answers</a:t>
+            </a:r>
+            <a:r>
+              <a:rPr lang="zh-CN" altLang="en-US" dirty="0"/>
+              <a:t> </a:t>
+            </a:r>
+            <a:r>
+              <a:rPr lang="en-US" altLang="zh-CN" dirty="0"/>
+              <a:t>as</a:t>
+            </a:r>
+            <a:r>
+              <a:rPr lang="zh-CN" altLang="en-US" dirty="0"/>
+              <a:t> </a:t>
+            </a:r>
+            <a:r>
+              <a:rPr lang="en-US" altLang="zh-CN" dirty="0"/>
+              <a:t>the</a:t>
+            </a:r>
+            <a:r>
+              <a:rPr lang="zh-CN" altLang="en-US" dirty="0"/>
+              <a:t> </a:t>
+            </a:r>
+            <a:r>
+              <a:rPr lang="en-US" altLang="zh-CN" dirty="0"/>
+              <a:t>competitor</a:t>
+            </a:r>
+            <a:r>
+              <a:rPr lang="zh-CN" altLang="en-US" dirty="0"/>
+              <a:t> </a:t>
+            </a:r>
+            <a:r>
+              <a:rPr lang="en-US" altLang="zh-CN" dirty="0"/>
+              <a:t>answer)</a:t>
+            </a:r>
+            <a:endParaRPr lang="en-US" dirty="0"/>
+          </a:p>
+        </p:txBody>
+      </p:sp>
+      <p:cxnSp>
+        <p:nvCxnSpPr>
+          <p:cNvPr id="3" name="Straight Arrow Connector 2">
+            <a:extLst>
+              <a:ext uri="{FF2B5EF4-FFF2-40B4-BE49-F238E27FC236}">
+                <a16:creationId xmlns:a16="http://schemas.microsoft.com/office/drawing/2014/main" id="{265384D4-AF8B-DA98-585C-340B93C3E606}"/>
+              </a:ext>
+            </a:extLst>
+          </p:cNvPr>
+          <p:cNvCxnSpPr>
+            <a:cxnSpLocks/>
+            <a:stCxn id="5" idx="3"/>
+          </p:cNvCxnSpPr>
+          <p:nvPr/>
+        </p:nvCxnSpPr>
+        <p:spPr>
+          <a:xfrm flipV="1">
+            <a:off x="2728120" y="2940675"/>
+            <a:ext cx="1601833" cy="1127417"/>
+          </a:xfrm>
+          <a:prstGeom prst="straightConnector1">
+            <a:avLst/>
+          </a:prstGeom>
+          <a:ln>
+            <a:tailEnd type="triangle"/>
+          </a:ln>
+        </p:spPr>
+        <p:style>
+          <a:lnRef idx="2">
+            <a:schemeClr val="accent1"/>
+          </a:lnRef>
+          <a:fillRef idx="0">
+            <a:schemeClr val="accent1"/>
+          </a:fillRef>
+          <a:effectRef idx="1">
+            <a:schemeClr val="accent1"/>
+          </a:effectRef>
+          <a:fontRef idx="minor">
+            <a:schemeClr val="tx1"/>
+          </a:fontRef>
+        </p:style>
+      </p:cxnSp>
+      <p:sp>
+        <p:nvSpPr>
+          <p:cNvPr id="12" name="Rectangle 11">
+            <a:extLst>
+              <a:ext uri="{FF2B5EF4-FFF2-40B4-BE49-F238E27FC236}">
+                <a16:creationId xmlns:a16="http://schemas.microsoft.com/office/drawing/2014/main" id="{DC78C8FA-A90A-6977-0D77-5F5278CA079F}"/>
+              </a:ext>
+            </a:extLst>
+          </p:cNvPr>
+          <p:cNvSpPr/>
+          <p:nvPr/>
+        </p:nvSpPr>
+        <p:spPr>
+          <a:xfrm>
+            <a:off x="4329953" y="2940675"/>
+            <a:ext cx="3334871" cy="640080"/>
+          </a:xfrm>
+          <a:prstGeom prst="rect">
+            <a:avLst/>
+          </a:prstGeom>
+          <a:ln>
+            <a:prstDash val="dash"/>
+          </a:ln>
+        </p:spPr>
+        <p:style>
+          <a:lnRef idx="2">
+            <a:schemeClr val="accent1"/>
+          </a:lnRef>
+          <a:fillRef idx="1">
+            <a:schemeClr val="lt1"/>
+          </a:fillRef>
+          <a:effectRef idx="0">
+            <a:schemeClr val="accent1"/>
+          </a:effectRef>
+          <a:fontRef idx="minor">
+            <a:schemeClr val="dk1"/>
+          </a:fontRef>
+        </p:style>
+        <p:txBody>
+          <a:bodyPr rtlCol="0" anchor="ctr"/>
+          <a:lstStyle/>
+          <a:p>
+            <a:pPr algn="ctr"/>
+            <a:r>
+              <a:rPr lang="en-US" altLang="zh-CN" dirty="0"/>
+              <a:t>Source</a:t>
+            </a:r>
+            <a:r>
+              <a:rPr lang="zh-CN" altLang="en-US" dirty="0"/>
+              <a:t> </a:t>
+            </a:r>
+            <a:r>
+              <a:rPr lang="en-US" altLang="zh-CN" dirty="0"/>
+              <a:t>effect</a:t>
+            </a:r>
+            <a:br>
+              <a:rPr lang="en-US" altLang="zh-CN" dirty="0"/>
+            </a:br>
+            <a:r>
+              <a:rPr lang="en-US" altLang="zh-CN" dirty="0"/>
+              <a:t>(authority</a:t>
+            </a:r>
+            <a:r>
+              <a:rPr lang="zh-CN" altLang="en-US" dirty="0"/>
+              <a:t> </a:t>
+            </a:r>
+            <a:r>
+              <a:rPr lang="en-US" altLang="zh-CN" dirty="0"/>
+              <a:t>→ marginal</a:t>
+            </a:r>
+            <a:r>
+              <a:rPr lang="zh-CN" altLang="en-US" dirty="0"/>
+              <a:t> </a:t>
+            </a:r>
+            <a:r>
+              <a:rPr lang="en-US" altLang="zh-CN" dirty="0"/>
+              <a:t>value</a:t>
+            </a:r>
+            <a:r>
+              <a:rPr lang="zh-CN" altLang="en-US" dirty="0"/>
+              <a:t> </a:t>
+            </a:r>
+            <a:r>
+              <a:rPr lang="en-US" altLang="zh-CN" dirty="0"/>
+              <a:t>↓)</a:t>
+            </a:r>
+            <a:endParaRPr lang="en-US" dirty="0"/>
+          </a:p>
+        </p:txBody>
+      </p:sp>
+      <p:sp>
+        <p:nvSpPr>
+          <p:cNvPr id="16" name="TextBox 15">
+            <a:extLst>
+              <a:ext uri="{FF2B5EF4-FFF2-40B4-BE49-F238E27FC236}">
+                <a16:creationId xmlns:a16="http://schemas.microsoft.com/office/drawing/2014/main" id="{677B8FC5-3389-10C4-FBF9-F7D5075E934E}"/>
+              </a:ext>
+            </a:extLst>
+          </p:cNvPr>
+          <p:cNvSpPr txBox="1"/>
+          <p:nvPr/>
+        </p:nvSpPr>
+        <p:spPr>
+          <a:xfrm>
+            <a:off x="4653895" y="1885479"/>
+            <a:ext cx="2570443" cy="369332"/>
+          </a:xfrm>
+          <a:prstGeom prst="rect">
+            <a:avLst/>
+          </a:prstGeom>
+          <a:noFill/>
+        </p:spPr>
+        <p:txBody>
+          <a:bodyPr wrap="square" rtlCol="0">
+            <a:spAutoFit/>
+          </a:bodyPr>
+          <a:lstStyle/>
+          <a:p>
+            <a:r>
+              <a:rPr lang="en-US" altLang="zh-CN" dirty="0"/>
+              <a:t>Incentive</a:t>
+            </a:r>
+            <a:r>
+              <a:rPr lang="zh-CN" altLang="en-US" dirty="0"/>
+              <a:t> </a:t>
+            </a:r>
+            <a:r>
+              <a:rPr lang="en-US" altLang="zh-CN" dirty="0"/>
+              <a:t>=</a:t>
+            </a:r>
+            <a:r>
+              <a:rPr lang="zh-CN" altLang="en-US" dirty="0"/>
+              <a:t> </a:t>
+            </a:r>
+            <a:r>
+              <a:rPr lang="en-US" altLang="zh-CN" dirty="0"/>
+              <a:t>value</a:t>
+            </a:r>
+            <a:r>
+              <a:rPr lang="zh-CN" altLang="en-US" dirty="0"/>
+              <a:t> </a:t>
+            </a:r>
+            <a:r>
+              <a:rPr lang="en-US" altLang="zh-CN" dirty="0"/>
+              <a:t>–</a:t>
+            </a:r>
+            <a:r>
+              <a:rPr lang="zh-CN" altLang="en-US" dirty="0"/>
+              <a:t> </a:t>
+            </a:r>
+            <a:r>
+              <a:rPr lang="en-US" altLang="zh-CN" dirty="0"/>
+              <a:t>cost</a:t>
+            </a:r>
+            <a:endParaRPr lang="en-US" dirty="0"/>
+          </a:p>
+        </p:txBody>
+      </p:sp>
+      <p:cxnSp>
+        <p:nvCxnSpPr>
+          <p:cNvPr id="20" name="Straight Arrow Connector 19">
+            <a:extLst>
+              <a:ext uri="{FF2B5EF4-FFF2-40B4-BE49-F238E27FC236}">
+                <a16:creationId xmlns:a16="http://schemas.microsoft.com/office/drawing/2014/main" id="{3E485473-7655-C09D-358E-36BFB2C1CE67}"/>
+              </a:ext>
+            </a:extLst>
+          </p:cNvPr>
+          <p:cNvCxnSpPr>
+            <a:cxnSpLocks/>
+            <a:endCxn id="13" idx="1"/>
+          </p:cNvCxnSpPr>
+          <p:nvPr/>
+        </p:nvCxnSpPr>
+        <p:spPr>
+          <a:xfrm>
+            <a:off x="7548282" y="2940675"/>
+            <a:ext cx="1410114" cy="5182"/>
+          </a:xfrm>
+          <a:prstGeom prst="straightConnector1">
+            <a:avLst/>
+          </a:prstGeom>
+          <a:ln>
+            <a:tailEnd type="triangle"/>
+          </a:ln>
+        </p:spPr>
+        <p:style>
+          <a:lnRef idx="2">
+            <a:schemeClr val="accent1"/>
+          </a:lnRef>
+          <a:fillRef idx="0">
+            <a:schemeClr val="accent1"/>
+          </a:fillRef>
+          <a:effectRef idx="1">
+            <a:schemeClr val="accent1"/>
+          </a:effectRef>
+          <a:fontRef idx="minor">
+            <a:schemeClr val="tx1"/>
+          </a:fontRef>
+        </p:style>
+      </p:cxnSp>
+      <p:cxnSp>
+        <p:nvCxnSpPr>
+          <p:cNvPr id="24" name="Straight Arrow Connector 23">
+            <a:extLst>
+              <a:ext uri="{FF2B5EF4-FFF2-40B4-BE49-F238E27FC236}">
+                <a16:creationId xmlns:a16="http://schemas.microsoft.com/office/drawing/2014/main" id="{AA1684D0-7F2C-7AE7-018C-2EB2889E1457}"/>
+              </a:ext>
+            </a:extLst>
+          </p:cNvPr>
+          <p:cNvCxnSpPr>
+            <a:cxnSpLocks/>
+            <a:stCxn id="5" idx="3"/>
+          </p:cNvCxnSpPr>
+          <p:nvPr/>
+        </p:nvCxnSpPr>
+        <p:spPr>
+          <a:xfrm>
+            <a:off x="2728120" y="4068092"/>
+            <a:ext cx="1601832" cy="767681"/>
+          </a:xfrm>
+          <a:prstGeom prst="straightConnector1">
+            <a:avLst/>
+          </a:prstGeom>
+          <a:ln>
+            <a:tailEnd type="triangle"/>
+          </a:ln>
+        </p:spPr>
+        <p:style>
+          <a:lnRef idx="2">
+            <a:schemeClr val="accent1"/>
+          </a:lnRef>
+          <a:fillRef idx="0">
+            <a:schemeClr val="accent1"/>
+          </a:fillRef>
+          <a:effectRef idx="1">
+            <a:schemeClr val="accent1"/>
+          </a:effectRef>
+          <a:fontRef idx="minor">
+            <a:schemeClr val="tx1"/>
+          </a:fontRef>
+        </p:style>
+      </p:cxnSp>
+      <p:sp>
+        <p:nvSpPr>
+          <p:cNvPr id="27" name="Rectangle 26">
+            <a:extLst>
+              <a:ext uri="{FF2B5EF4-FFF2-40B4-BE49-F238E27FC236}">
+                <a16:creationId xmlns:a16="http://schemas.microsoft.com/office/drawing/2014/main" id="{B6DFD5CA-A49C-9686-D0EA-0E0BFDAE5C79}"/>
+              </a:ext>
+            </a:extLst>
+          </p:cNvPr>
+          <p:cNvSpPr/>
+          <p:nvPr/>
+        </p:nvSpPr>
+        <p:spPr>
+          <a:xfrm>
+            <a:off x="4329953" y="4515733"/>
+            <a:ext cx="3334871" cy="640080"/>
+          </a:xfrm>
+          <a:prstGeom prst="rect">
+            <a:avLst/>
+          </a:prstGeom>
+          <a:ln>
+            <a:prstDash val="dash"/>
+          </a:ln>
+        </p:spPr>
+        <p:style>
+          <a:lnRef idx="2">
+            <a:schemeClr val="accent1"/>
+          </a:lnRef>
+          <a:fillRef idx="1">
+            <a:schemeClr val="lt1"/>
+          </a:fillRef>
+          <a:effectRef idx="0">
+            <a:schemeClr val="accent1"/>
+          </a:effectRef>
+          <a:fontRef idx="minor">
+            <a:schemeClr val="dk1"/>
+          </a:fontRef>
+        </p:style>
+        <p:txBody>
+          <a:bodyPr rtlCol="0" anchor="ctr"/>
+          <a:lstStyle/>
+          <a:p>
+            <a:pPr algn="ctr"/>
+            <a:r>
+              <a:rPr lang="en-US" altLang="zh-CN" dirty="0"/>
+              <a:t>Elevated</a:t>
+            </a:r>
+            <a:r>
+              <a:rPr lang="zh-CN" altLang="en-US" dirty="0"/>
+              <a:t> </a:t>
+            </a:r>
+            <a:r>
+              <a:rPr lang="en-US" altLang="zh-CN" dirty="0"/>
+              <a:t>expectation</a:t>
+            </a:r>
+            <a:br>
+              <a:rPr lang="en-US" altLang="zh-CN" dirty="0"/>
+            </a:br>
+            <a:r>
+              <a:rPr lang="en-US" altLang="zh-CN" dirty="0"/>
+              <a:t>(benchmark</a:t>
+            </a:r>
+            <a:r>
+              <a:rPr lang="zh-CN" altLang="en-US" dirty="0"/>
+              <a:t> </a:t>
+            </a:r>
+            <a:r>
+              <a:rPr lang="en-US" altLang="zh-CN" dirty="0"/>
+              <a:t>↑)</a:t>
+            </a:r>
+            <a:endParaRPr lang="en-US" dirty="0"/>
+          </a:p>
+        </p:txBody>
+      </p:sp>
+      <p:sp>
+        <p:nvSpPr>
+          <p:cNvPr id="28" name="TextBox 27">
+            <a:extLst>
+              <a:ext uri="{FF2B5EF4-FFF2-40B4-BE49-F238E27FC236}">
+                <a16:creationId xmlns:a16="http://schemas.microsoft.com/office/drawing/2014/main" id="{CD191340-2DD1-76F8-4F27-CA6EBB8B01F0}"/>
+              </a:ext>
+            </a:extLst>
+          </p:cNvPr>
+          <p:cNvSpPr txBox="1"/>
+          <p:nvPr/>
+        </p:nvSpPr>
+        <p:spPr>
+          <a:xfrm>
+            <a:off x="3756423" y="4127094"/>
+            <a:ext cx="4528092" cy="369332"/>
+          </a:xfrm>
+          <a:prstGeom prst="rect">
+            <a:avLst/>
+          </a:prstGeom>
+          <a:noFill/>
+        </p:spPr>
+        <p:txBody>
+          <a:bodyPr wrap="square" rtlCol="0">
+            <a:spAutoFit/>
+          </a:bodyPr>
+          <a:lstStyle/>
+          <a:p>
+            <a:r>
+              <a:rPr lang="en-US" altLang="zh-CN" dirty="0"/>
+              <a:t>Incentive</a:t>
+            </a:r>
+            <a:r>
+              <a:rPr lang="zh-CN" altLang="en-US" dirty="0"/>
+              <a:t> </a:t>
+            </a:r>
+            <a:r>
+              <a:rPr lang="en-US" altLang="zh-CN" dirty="0"/>
+              <a:t>=</a:t>
+            </a:r>
+            <a:r>
+              <a:rPr lang="zh-CN" altLang="en-US" dirty="0"/>
+              <a:t> </a:t>
+            </a:r>
+            <a:r>
+              <a:rPr lang="en-US" altLang="zh-CN" dirty="0"/>
+              <a:t>(quality</a:t>
+            </a:r>
+            <a:r>
+              <a:rPr lang="zh-CN" altLang="en-US" dirty="0"/>
+              <a:t> </a:t>
+            </a:r>
+            <a:r>
+              <a:rPr lang="en-US" altLang="zh-CN" dirty="0"/>
+              <a:t>–</a:t>
+            </a:r>
+            <a:r>
+              <a:rPr lang="zh-CN" altLang="en-US" dirty="0"/>
+              <a:t> </a:t>
+            </a:r>
+            <a:r>
+              <a:rPr lang="en-US" altLang="zh-CN" dirty="0"/>
+              <a:t>benchmark)</a:t>
+            </a:r>
+            <a:r>
+              <a:rPr lang="zh-CN" altLang="en-US" dirty="0"/>
+              <a:t>*</a:t>
+            </a:r>
+            <a:r>
+              <a:rPr lang="en-US" altLang="zh-CN" dirty="0"/>
+              <a:t>visibility</a:t>
+            </a:r>
+            <a:endParaRPr lang="en-US" dirty="0"/>
+          </a:p>
+        </p:txBody>
+      </p:sp>
+      <p:cxnSp>
+        <p:nvCxnSpPr>
+          <p:cNvPr id="29" name="Straight Arrow Connector 28">
+            <a:extLst>
+              <a:ext uri="{FF2B5EF4-FFF2-40B4-BE49-F238E27FC236}">
+                <a16:creationId xmlns:a16="http://schemas.microsoft.com/office/drawing/2014/main" id="{5B0EA263-E16B-EF20-5D8E-C56C0E3F20C7}"/>
+              </a:ext>
+            </a:extLst>
+          </p:cNvPr>
+          <p:cNvCxnSpPr>
+            <a:cxnSpLocks/>
+            <a:stCxn id="27" idx="3"/>
+            <a:endCxn id="14" idx="1"/>
+          </p:cNvCxnSpPr>
+          <p:nvPr/>
+        </p:nvCxnSpPr>
+        <p:spPr>
+          <a:xfrm>
+            <a:off x="7664824" y="4835773"/>
+            <a:ext cx="1293572" cy="0"/>
+          </a:xfrm>
+          <a:prstGeom prst="straightConnector1">
+            <a:avLst/>
+          </a:prstGeom>
+          <a:ln>
+            <a:tailEnd type="triangle"/>
+          </a:ln>
+        </p:spPr>
+        <p:style>
+          <a:lnRef idx="2">
+            <a:schemeClr val="accent1"/>
+          </a:lnRef>
+          <a:fillRef idx="0">
+            <a:schemeClr val="accent1"/>
+          </a:fillRef>
+          <a:effectRef idx="1">
+            <a:schemeClr val="accent1"/>
+          </a:effectRef>
+          <a:fontRef idx="minor">
+            <a:schemeClr val="tx1"/>
+          </a:fontRef>
+        </p:style>
+      </p:cxnSp>
+    </p:spTree>
+    <p:extLst>
+      <p:ext uri="{BB962C8B-B14F-4D97-AF65-F5344CB8AC3E}">
+        <p14:creationId xmlns:p14="http://schemas.microsoft.com/office/powerpoint/2010/main" val="1428136669"/>
+      </p:ext>
+    </p:extLst>
+  </p:cSld>
+  <p:clrMapOvr>
+    <a:masterClrMapping/>
+  </p:clrMapOvr>
+</p:sld>
+</file>
+
+<file path=ppt/slides/slide3.xml><?xml version="1.0" encoding="utf-8"?>
+<p:sld xmlns:a="http://schemas.openxmlformats.org/drawingml/2006/main" xmlns:r="http://schemas.openxmlformats.org/officeDocument/2006/relationships" xmlns:p="http://schemas.openxmlformats.org/presentationml/2006/main">
+  <p:cSld>
+    <p:spTree>
+      <p:nvGrpSpPr>
+        <p:cNvPr id="1" name="">
+          <a:extLst>
+            <a:ext uri="{FF2B5EF4-FFF2-40B4-BE49-F238E27FC236}">
+              <a16:creationId xmlns:a16="http://schemas.microsoft.com/office/drawing/2014/main" id="{F9706048-46E8-7166-5D91-F34D7A9F7F34}"/>
+            </a:ext>
+          </a:extLst>
+        </p:cNvPr>
+        <p:cNvGrpSpPr/>
+        <p:nvPr/>
+      </p:nvGrpSpPr>
+      <p:grpSpPr>
+        <a:xfrm>
+          <a:off x="0" y="0"/>
+          <a:ext cx="0" cy="0"/>
+          <a:chOff x="0" y="0"/>
+          <a:chExt cx="0" cy="0"/>
+        </a:xfrm>
+      </p:grpSpPr>
+      <p:sp>
+        <p:nvSpPr>
+          <p:cNvPr id="13" name="Rectangle 12">
+            <a:extLst>
+              <a:ext uri="{FF2B5EF4-FFF2-40B4-BE49-F238E27FC236}">
+                <a16:creationId xmlns:a16="http://schemas.microsoft.com/office/drawing/2014/main" id="{48AF8BC2-58C6-794D-C271-DD234105EAC5}"/>
               </a:ext>
             </a:extLst>
           </p:cNvPr>
@@ -17465,7 +19383,7 @@
           <p:cNvPr id="23" name="Rectangle 22">
             <a:extLst>
               <a:ext uri="{FF2B5EF4-FFF2-40B4-BE49-F238E27FC236}">
-                <a16:creationId xmlns:a16="http://schemas.microsoft.com/office/drawing/2014/main" id="{986CDFB3-9B43-2A08-3590-7B9E2F946A05}"/>
+                <a16:creationId xmlns:a16="http://schemas.microsoft.com/office/drawing/2014/main" id="{996C115A-10CD-605C-8836-EA71D41B1C3F}"/>
               </a:ext>
             </a:extLst>
           </p:cNvPr>
@@ -17512,7 +19430,7 @@
           <p:cNvPr id="25" name="Rectangle 24">
             <a:extLst>
               <a:ext uri="{FF2B5EF4-FFF2-40B4-BE49-F238E27FC236}">
-                <a16:creationId xmlns:a16="http://schemas.microsoft.com/office/drawing/2014/main" id="{348704F2-2DF8-2C73-98E9-F5410D386459}"/>
+                <a16:creationId xmlns:a16="http://schemas.microsoft.com/office/drawing/2014/main" id="{D7DA90EB-6C5C-BB70-C663-8773905E8F31}"/>
               </a:ext>
             </a:extLst>
           </p:cNvPr>
@@ -17559,7 +19477,7 @@
           <p:cNvPr id="2" name="Rectangle 1">
             <a:extLst>
               <a:ext uri="{FF2B5EF4-FFF2-40B4-BE49-F238E27FC236}">
-                <a16:creationId xmlns:a16="http://schemas.microsoft.com/office/drawing/2014/main" id="{7527F029-9B42-DA2F-9E3B-BC66AB67DBBA}"/>
+                <a16:creationId xmlns:a16="http://schemas.microsoft.com/office/drawing/2014/main" id="{962C64F4-210C-9B84-8502-4785777B7DEC}"/>
               </a:ext>
             </a:extLst>
           </p:cNvPr>
@@ -17607,7 +19525,7 @@
           <p:cNvPr id="6" name="Straight Arrow Connector 5">
             <a:extLst>
               <a:ext uri="{FF2B5EF4-FFF2-40B4-BE49-F238E27FC236}">
-                <a16:creationId xmlns:a16="http://schemas.microsoft.com/office/drawing/2014/main" id="{B4ECDDEA-4EB6-E468-B840-CBD71B6DE2AE}"/>
+                <a16:creationId xmlns:a16="http://schemas.microsoft.com/office/drawing/2014/main" id="{D0543269-AAD2-E172-CCDD-24804ED736F7}"/>
               </a:ext>
             </a:extLst>
           </p:cNvPr>
@@ -17650,7 +19568,7 @@
           <p:cNvPr id="8" name="Straight Arrow Connector 7">
             <a:extLst>
               <a:ext uri="{FF2B5EF4-FFF2-40B4-BE49-F238E27FC236}">
-                <a16:creationId xmlns:a16="http://schemas.microsoft.com/office/drawing/2014/main" id="{03F88E2F-B337-9A81-2BD6-A211803AC49A}"/>
+                <a16:creationId xmlns:a16="http://schemas.microsoft.com/office/drawing/2014/main" id="{E4E5E069-4505-40F1-0C4C-C5C52150D3B2}"/>
               </a:ext>
             </a:extLst>
           </p:cNvPr>
@@ -17693,7 +19611,7 @@
           <p:cNvPr id="33" name="Rectangle 32">
             <a:extLst>
               <a:ext uri="{FF2B5EF4-FFF2-40B4-BE49-F238E27FC236}">
-                <a16:creationId xmlns:a16="http://schemas.microsoft.com/office/drawing/2014/main" id="{B079454A-E0CF-9E57-54E6-C67ABC8908EB}"/>
+                <a16:creationId xmlns:a16="http://schemas.microsoft.com/office/drawing/2014/main" id="{B6DDC00D-DC45-08FF-C157-0588400DF14A}"/>
               </a:ext>
             </a:extLst>
           </p:cNvPr>
@@ -17740,7 +19658,7 @@
           <p:cNvPr id="48" name="TextBox 47">
             <a:extLst>
               <a:ext uri="{FF2B5EF4-FFF2-40B4-BE49-F238E27FC236}">
-                <a16:creationId xmlns:a16="http://schemas.microsoft.com/office/drawing/2014/main" id="{DCC834AB-9AC0-764B-1659-3A8AFFE24F00}"/>
+                <a16:creationId xmlns:a16="http://schemas.microsoft.com/office/drawing/2014/main" id="{8B12593E-F048-4A0C-DCBA-862F6B956875}"/>
               </a:ext>
             </a:extLst>
           </p:cNvPr>
@@ -17775,7 +19693,7 @@
           <p:cNvPr id="49" name="TextBox 48">
             <a:extLst>
               <a:ext uri="{FF2B5EF4-FFF2-40B4-BE49-F238E27FC236}">
-                <a16:creationId xmlns:a16="http://schemas.microsoft.com/office/drawing/2014/main" id="{F55D43CB-4F57-FF83-5413-60795543320B}"/>
+                <a16:creationId xmlns:a16="http://schemas.microsoft.com/office/drawing/2014/main" id="{E3597091-4AB4-D3AB-0CBA-A9351382DDDF}"/>
               </a:ext>
             </a:extLst>
           </p:cNvPr>
@@ -17810,7 +19728,7 @@
           <p:cNvPr id="50" name="TextBox 49">
             <a:extLst>
               <a:ext uri="{FF2B5EF4-FFF2-40B4-BE49-F238E27FC236}">
-                <a16:creationId xmlns:a16="http://schemas.microsoft.com/office/drawing/2014/main" id="{734F28FD-5C71-D5EE-3F6C-31CC00AA03AC}"/>
+                <a16:creationId xmlns:a16="http://schemas.microsoft.com/office/drawing/2014/main" id="{F4A04090-9A6D-A421-DC52-6EC8A64BE2E7}"/>
               </a:ext>
             </a:extLst>
           </p:cNvPr>
@@ -17845,7 +19763,7 @@
           <p:cNvPr id="51" name="TextBox 50">
             <a:extLst>
               <a:ext uri="{FF2B5EF4-FFF2-40B4-BE49-F238E27FC236}">
-                <a16:creationId xmlns:a16="http://schemas.microsoft.com/office/drawing/2014/main" id="{DAED42F5-ABF7-02DF-7666-A9CAFF944EB0}"/>
+                <a16:creationId xmlns:a16="http://schemas.microsoft.com/office/drawing/2014/main" id="{ABF0A993-EC76-FA80-4FFF-FE9383C46CC4}"/>
               </a:ext>
             </a:extLst>
           </p:cNvPr>
@@ -17880,7 +19798,7 @@
           <p:cNvPr id="52" name="TextBox 51">
             <a:extLst>
               <a:ext uri="{FF2B5EF4-FFF2-40B4-BE49-F238E27FC236}">
-                <a16:creationId xmlns:a16="http://schemas.microsoft.com/office/drawing/2014/main" id="{89C62F07-0119-B3BD-A56E-A30193177E7A}"/>
+                <a16:creationId xmlns:a16="http://schemas.microsoft.com/office/drawing/2014/main" id="{51BF350B-5962-82AA-E4ED-5A10CE14A1CB}"/>
               </a:ext>
             </a:extLst>
           </p:cNvPr>
@@ -17915,7 +19833,7 @@
           <p:cNvPr id="21" name="Straight Arrow Connector 20">
             <a:extLst>
               <a:ext uri="{FF2B5EF4-FFF2-40B4-BE49-F238E27FC236}">
-                <a16:creationId xmlns:a16="http://schemas.microsoft.com/office/drawing/2014/main" id="{99890A7D-CD99-6365-AB5F-7A38CC97F8B3}"/>
+                <a16:creationId xmlns:a16="http://schemas.microsoft.com/office/drawing/2014/main" id="{ED621279-B148-DC94-3768-FFBEF09961D9}"/>
               </a:ext>
             </a:extLst>
           </p:cNvPr>
@@ -17957,7 +19875,7 @@
           <p:cNvPr id="30" name="Right Brace 29">
             <a:extLst>
               <a:ext uri="{FF2B5EF4-FFF2-40B4-BE49-F238E27FC236}">
-                <a16:creationId xmlns:a16="http://schemas.microsoft.com/office/drawing/2014/main" id="{45EDFF2F-D66B-DE4A-3761-5B88394F4220}"/>
+                <a16:creationId xmlns:a16="http://schemas.microsoft.com/office/drawing/2014/main" id="{D3BD823A-F25B-AA07-858B-20E83EBE3161}"/>
               </a:ext>
             </a:extLst>
           </p:cNvPr>
@@ -18004,7 +19922,7 @@
           <p:cNvPr id="31" name="TextBox 30">
             <a:extLst>
               <a:ext uri="{FF2B5EF4-FFF2-40B4-BE49-F238E27FC236}">
-                <a16:creationId xmlns:a16="http://schemas.microsoft.com/office/drawing/2014/main" id="{907D29C9-119C-F3AF-CBEB-F48C872861E3}"/>
+                <a16:creationId xmlns:a16="http://schemas.microsoft.com/office/drawing/2014/main" id="{748965FE-7209-3777-3F97-F9F09F5B3C9F}"/>
               </a:ext>
             </a:extLst>
           </p:cNvPr>
@@ -18039,7 +19957,7 @@
           <p:cNvPr id="32" name="Straight Arrow Connector 31">
             <a:extLst>
               <a:ext uri="{FF2B5EF4-FFF2-40B4-BE49-F238E27FC236}">
-                <a16:creationId xmlns:a16="http://schemas.microsoft.com/office/drawing/2014/main" id="{45189541-55E3-8853-D866-3594447903F1}"/>
+                <a16:creationId xmlns:a16="http://schemas.microsoft.com/office/drawing/2014/main" id="{A6445F47-C3F6-D2A7-49A8-2A9CFB66FF4C}"/>
               </a:ext>
             </a:extLst>
           </p:cNvPr>
@@ -18081,7 +19999,7 @@
           <p:cNvPr id="44" name="Straight Arrow Connector 43">
             <a:extLst>
               <a:ext uri="{FF2B5EF4-FFF2-40B4-BE49-F238E27FC236}">
-                <a16:creationId xmlns:a16="http://schemas.microsoft.com/office/drawing/2014/main" id="{1B73291B-B81A-A88B-D188-1EEE890FA53F}"/>
+                <a16:creationId xmlns:a16="http://schemas.microsoft.com/office/drawing/2014/main" id="{3B642CAF-A6C3-4590-8C35-2BB389DD0E05}"/>
               </a:ext>
             </a:extLst>
           </p:cNvPr>
@@ -18123,7 +20041,7 @@
           <p:cNvPr id="61" name="Rectangle 60">
             <a:extLst>
               <a:ext uri="{FF2B5EF4-FFF2-40B4-BE49-F238E27FC236}">
-                <a16:creationId xmlns:a16="http://schemas.microsoft.com/office/drawing/2014/main" id="{781F7739-0CB9-8461-2B59-4F3C47D0983A}"/>
+                <a16:creationId xmlns:a16="http://schemas.microsoft.com/office/drawing/2014/main" id="{368138F8-63B7-A6EB-9E25-4E08A56097D6}"/>
               </a:ext>
             </a:extLst>
           </p:cNvPr>
@@ -18170,7 +20088,7 @@
           <p:cNvPr id="62" name="Straight Arrow Connector 61">
             <a:extLst>
               <a:ext uri="{FF2B5EF4-FFF2-40B4-BE49-F238E27FC236}">
-                <a16:creationId xmlns:a16="http://schemas.microsoft.com/office/drawing/2014/main" id="{7A3DA69C-46C9-B63A-2321-2E35120ABC16}"/>
+                <a16:creationId xmlns:a16="http://schemas.microsoft.com/office/drawing/2014/main" id="{3AC460E6-7891-B5B6-0B69-4E3E4EFBB83B}"/>
               </a:ext>
             </a:extLst>
           </p:cNvPr>
@@ -18212,7 +20130,7 @@
           <p:cNvPr id="39" name="Straight Arrow Connector 38">
             <a:extLst>
               <a:ext uri="{FF2B5EF4-FFF2-40B4-BE49-F238E27FC236}">
-                <a16:creationId xmlns:a16="http://schemas.microsoft.com/office/drawing/2014/main" id="{FA41A933-7212-60D9-78FB-5D95364BBF1E}"/>
+                <a16:creationId xmlns:a16="http://schemas.microsoft.com/office/drawing/2014/main" id="{D56530F4-9494-21BB-B050-EB00E74A36FE}"/>
               </a:ext>
             </a:extLst>
           </p:cNvPr>
@@ -18255,7 +20173,7 @@
           <p:cNvPr id="43" name="Straight Arrow Connector 42">
             <a:extLst>
               <a:ext uri="{FF2B5EF4-FFF2-40B4-BE49-F238E27FC236}">
-                <a16:creationId xmlns:a16="http://schemas.microsoft.com/office/drawing/2014/main" id="{D6BC0B60-C9E1-8D7E-54D6-0EDB2E8FB755}"/>
+                <a16:creationId xmlns:a16="http://schemas.microsoft.com/office/drawing/2014/main" id="{6D25CCA9-96BD-63C9-40D7-27359F7F4C74}"/>
               </a:ext>
             </a:extLst>
           </p:cNvPr>
@@ -18298,7 +20216,7 @@
           <p:cNvPr id="63" name="TextBox 62">
             <a:extLst>
               <a:ext uri="{FF2B5EF4-FFF2-40B4-BE49-F238E27FC236}">
-                <a16:creationId xmlns:a16="http://schemas.microsoft.com/office/drawing/2014/main" id="{8EA412F3-92FF-CEDA-2E28-51FF0011F583}"/>
+                <a16:creationId xmlns:a16="http://schemas.microsoft.com/office/drawing/2014/main" id="{1793BD73-D73D-4C72-070D-7E8791DC26D4}"/>
               </a:ext>
             </a:extLst>
           </p:cNvPr>
@@ -18333,7 +20251,7 @@
           <p:cNvPr id="64" name="TextBox 63">
             <a:extLst>
               <a:ext uri="{FF2B5EF4-FFF2-40B4-BE49-F238E27FC236}">
-                <a16:creationId xmlns:a16="http://schemas.microsoft.com/office/drawing/2014/main" id="{8F0D024D-76F6-D43E-4D60-15B225708B6A}"/>
+                <a16:creationId xmlns:a16="http://schemas.microsoft.com/office/drawing/2014/main" id="{9B92E2BA-60FA-BEFE-3D9D-8975556DA432}"/>
               </a:ext>
             </a:extLst>
           </p:cNvPr>
@@ -18363,10 +20281,54 @@
           </a:p>
         </p:txBody>
       </p:sp>
+      <p:sp>
+        <p:nvSpPr>
+          <p:cNvPr id="3" name="TextBox 2">
+            <a:extLst>
+              <a:ext uri="{FF2B5EF4-FFF2-40B4-BE49-F238E27FC236}">
+                <a16:creationId xmlns:a16="http://schemas.microsoft.com/office/drawing/2014/main" id="{505116B8-78AE-400B-4EEC-F3CA611EFB89}"/>
+              </a:ext>
+            </a:extLst>
+          </p:cNvPr>
+          <p:cNvSpPr txBox="1"/>
+          <p:nvPr/>
+        </p:nvSpPr>
+        <p:spPr>
+          <a:xfrm>
+            <a:off x="203457" y="128587"/>
+            <a:ext cx="1428596" cy="369332"/>
+          </a:xfrm>
+          <a:prstGeom prst="rect">
+            <a:avLst/>
+          </a:prstGeom>
+          <a:noFill/>
+        </p:spPr>
+        <p:txBody>
+          <a:bodyPr wrap="none" rtlCol="0">
+            <a:spAutoFit/>
+          </a:bodyPr>
+          <a:lstStyle/>
+          <a:p>
+            <a:r>
+              <a:rPr lang="en-US" altLang="zh-CN" dirty="0"/>
+              <a:t>Xin’s</a:t>
+            </a:r>
+            <a:r>
+              <a:rPr lang="zh-CN" altLang="en-US" dirty="0"/>
+              <a:t> </a:t>
+            </a:r>
+            <a:r>
+              <a:rPr lang="en-US" altLang="zh-CN" dirty="0"/>
+              <a:t>original</a:t>
+            </a:r>
+            <a:endParaRPr lang="en-US" dirty="0"/>
+          </a:p>
+        </p:txBody>
+      </p:sp>
     </p:spTree>
     <p:extLst>
       <p:ext uri="{BB962C8B-B14F-4D97-AF65-F5344CB8AC3E}">
-        <p14:creationId xmlns:p14="http://schemas.microsoft.com/office/powerpoint/2010/main" val="3725003368"/>
+        <p14:creationId xmlns:p14="http://schemas.microsoft.com/office/powerpoint/2010/main" val="1791130517"/>
       </p:ext>
     </p:extLst>
   </p:cSld>
@@ -18377,6 +20339,2155 @@
 </file>
 
 <file path=ppt/slides/slide4.xml><?xml version="1.0" encoding="utf-8"?>
+<p:sld xmlns:a="http://schemas.openxmlformats.org/drawingml/2006/main" xmlns:r="http://schemas.openxmlformats.org/officeDocument/2006/relationships" xmlns:p="http://schemas.openxmlformats.org/presentationml/2006/main">
+  <p:cSld>
+    <p:spTree>
+      <p:nvGrpSpPr>
+        <p:cNvPr id="1" name="">
+          <a:extLst>
+            <a:ext uri="{FF2B5EF4-FFF2-40B4-BE49-F238E27FC236}">
+              <a16:creationId xmlns:a16="http://schemas.microsoft.com/office/drawing/2014/main" id="{1F55E2F1-0D35-30BD-E58E-49613D6033FA}"/>
+            </a:ext>
+          </a:extLst>
+        </p:cNvPr>
+        <p:cNvGrpSpPr/>
+        <p:nvPr/>
+      </p:nvGrpSpPr>
+      <p:grpSpPr>
+        <a:xfrm>
+          <a:off x="0" y="0"/>
+          <a:ext cx="0" cy="0"/>
+          <a:chOff x="0" y="0"/>
+          <a:chExt cx="0" cy="0"/>
+        </a:xfrm>
+      </p:grpSpPr>
+      <p:sp>
+        <p:nvSpPr>
+          <p:cNvPr id="13" name="Rectangle 12">
+            <a:extLst>
+              <a:ext uri="{FF2B5EF4-FFF2-40B4-BE49-F238E27FC236}">
+                <a16:creationId xmlns:a16="http://schemas.microsoft.com/office/drawing/2014/main" id="{AB56367E-E97E-A0CF-8FFF-F95D2021A22A}"/>
+              </a:ext>
+            </a:extLst>
+          </p:cNvPr>
+          <p:cNvSpPr/>
+          <p:nvPr/>
+        </p:nvSpPr>
+        <p:spPr>
+          <a:xfrm>
+            <a:off x="8826514" y="5530977"/>
+            <a:ext cx="1992431" cy="640080"/>
+          </a:xfrm>
+          <a:prstGeom prst="rect">
+            <a:avLst/>
+          </a:prstGeom>
+        </p:spPr>
+        <p:style>
+          <a:lnRef idx="2">
+            <a:schemeClr val="accent1"/>
+          </a:lnRef>
+          <a:fillRef idx="1">
+            <a:schemeClr val="lt1"/>
+          </a:fillRef>
+          <a:effectRef idx="0">
+            <a:schemeClr val="accent1"/>
+          </a:effectRef>
+          <a:fontRef idx="minor">
+            <a:schemeClr val="dk1"/>
+          </a:fontRef>
+        </p:style>
+        <p:txBody>
+          <a:bodyPr rtlCol="0" anchor="ctr"/>
+          <a:lstStyle/>
+          <a:p>
+            <a:pPr algn="ctr"/>
+            <a:r>
+              <a:rPr lang="en-US" dirty="0"/>
+              <a:t>Answer Innovation</a:t>
+            </a:r>
+          </a:p>
+        </p:txBody>
+      </p:sp>
+      <p:sp>
+        <p:nvSpPr>
+          <p:cNvPr id="23" name="Rectangle 22">
+            <a:extLst>
+              <a:ext uri="{FF2B5EF4-FFF2-40B4-BE49-F238E27FC236}">
+                <a16:creationId xmlns:a16="http://schemas.microsoft.com/office/drawing/2014/main" id="{E27A3378-0A68-DC31-33AC-9CE2B45FCB2F}"/>
+              </a:ext>
+            </a:extLst>
+          </p:cNvPr>
+          <p:cNvSpPr/>
+          <p:nvPr/>
+        </p:nvSpPr>
+        <p:spPr>
+          <a:xfrm>
+            <a:off x="8741313" y="3097255"/>
+            <a:ext cx="1992431" cy="640080"/>
+          </a:xfrm>
+          <a:prstGeom prst="rect">
+            <a:avLst/>
+          </a:prstGeom>
+        </p:spPr>
+        <p:style>
+          <a:lnRef idx="2">
+            <a:schemeClr val="accent1"/>
+          </a:lnRef>
+          <a:fillRef idx="1">
+            <a:schemeClr val="lt1"/>
+          </a:fillRef>
+          <a:effectRef idx="0">
+            <a:schemeClr val="accent1"/>
+          </a:effectRef>
+          <a:fontRef idx="minor">
+            <a:schemeClr val="dk1"/>
+          </a:fontRef>
+        </p:style>
+        <p:txBody>
+          <a:bodyPr rtlCol="0" anchor="ctr"/>
+          <a:lstStyle/>
+          <a:p>
+            <a:pPr algn="ctr"/>
+            <a:r>
+              <a:rPr lang="en-US" altLang="zh-CN" dirty="0"/>
+              <a:t>Huiman</a:t>
+            </a:r>
+            <a:r>
+              <a:rPr lang="zh-CN" altLang="en-US" dirty="0"/>
+              <a:t> </a:t>
+            </a:r>
+            <a:r>
+              <a:rPr lang="en-US" dirty="0"/>
+              <a:t>Answer Participation</a:t>
+            </a:r>
+          </a:p>
+        </p:txBody>
+      </p:sp>
+      <p:cxnSp>
+        <p:nvCxnSpPr>
+          <p:cNvPr id="21" name="Straight Arrow Connector 20">
+            <a:extLst>
+              <a:ext uri="{FF2B5EF4-FFF2-40B4-BE49-F238E27FC236}">
+                <a16:creationId xmlns:a16="http://schemas.microsoft.com/office/drawing/2014/main" id="{00B7FD01-8D37-AB63-3565-CCE24490089B}"/>
+              </a:ext>
+            </a:extLst>
+          </p:cNvPr>
+          <p:cNvCxnSpPr>
+            <a:cxnSpLocks/>
+            <a:stCxn id="19" idx="3"/>
+            <a:endCxn id="13" idx="1"/>
+          </p:cNvCxnSpPr>
+          <p:nvPr/>
+        </p:nvCxnSpPr>
+        <p:spPr>
+          <a:xfrm>
+            <a:off x="4193289" y="4229875"/>
+            <a:ext cx="4633225" cy="1621142"/>
+          </a:xfrm>
+          <a:prstGeom prst="straightConnector1">
+            <a:avLst/>
+          </a:prstGeom>
+          <a:ln>
+            <a:tailEnd type="triangle"/>
+          </a:ln>
+        </p:spPr>
+        <p:style>
+          <a:lnRef idx="2">
+            <a:schemeClr val="accent1"/>
+          </a:lnRef>
+          <a:fillRef idx="0">
+            <a:schemeClr val="accent1"/>
+          </a:fillRef>
+          <a:effectRef idx="1">
+            <a:schemeClr val="accent1"/>
+          </a:effectRef>
+          <a:fontRef idx="minor">
+            <a:schemeClr val="tx1"/>
+          </a:fontRef>
+        </p:style>
+      </p:cxnSp>
+      <p:cxnSp>
+        <p:nvCxnSpPr>
+          <p:cNvPr id="4" name="Straight Arrow Connector 3">
+            <a:extLst>
+              <a:ext uri="{FF2B5EF4-FFF2-40B4-BE49-F238E27FC236}">
+                <a16:creationId xmlns:a16="http://schemas.microsoft.com/office/drawing/2014/main" id="{285D65B7-EA44-0C86-4020-BD4449218244}"/>
+              </a:ext>
+            </a:extLst>
+          </p:cNvPr>
+          <p:cNvCxnSpPr>
+            <a:cxnSpLocks/>
+            <a:stCxn id="10" idx="2"/>
+          </p:cNvCxnSpPr>
+          <p:nvPr/>
+        </p:nvCxnSpPr>
+        <p:spPr>
+          <a:xfrm>
+            <a:off x="5307501" y="2660764"/>
+            <a:ext cx="763322" cy="1117832"/>
+          </a:xfrm>
+          <a:prstGeom prst="straightConnector1">
+            <a:avLst/>
+          </a:prstGeom>
+          <a:ln>
+            <a:tailEnd type="triangle"/>
+          </a:ln>
+        </p:spPr>
+        <p:style>
+          <a:lnRef idx="2">
+            <a:schemeClr val="accent1"/>
+          </a:lnRef>
+          <a:fillRef idx="0">
+            <a:schemeClr val="accent1"/>
+          </a:fillRef>
+          <a:effectRef idx="1">
+            <a:schemeClr val="accent1"/>
+          </a:effectRef>
+          <a:fontRef idx="minor">
+            <a:schemeClr val="tx1"/>
+          </a:fontRef>
+        </p:style>
+      </p:cxnSp>
+      <p:sp>
+        <p:nvSpPr>
+          <p:cNvPr id="9" name="Rectangle 8">
+            <a:extLst>
+              <a:ext uri="{FF2B5EF4-FFF2-40B4-BE49-F238E27FC236}">
+                <a16:creationId xmlns:a16="http://schemas.microsoft.com/office/drawing/2014/main" id="{DA096F67-EF2F-B2EB-D14C-7F00BB44513C}"/>
+              </a:ext>
+            </a:extLst>
+          </p:cNvPr>
+          <p:cNvSpPr/>
+          <p:nvPr/>
+        </p:nvSpPr>
+        <p:spPr>
+          <a:xfrm>
+            <a:off x="6601863" y="1994686"/>
+            <a:ext cx="1992431" cy="640080"/>
+          </a:xfrm>
+          <a:prstGeom prst="rect">
+            <a:avLst/>
+          </a:prstGeom>
+          <a:ln/>
+        </p:spPr>
+        <p:style>
+          <a:lnRef idx="2">
+            <a:schemeClr val="accent1"/>
+          </a:lnRef>
+          <a:fillRef idx="1">
+            <a:schemeClr val="lt1"/>
+          </a:fillRef>
+          <a:effectRef idx="0">
+            <a:schemeClr val="accent1"/>
+          </a:effectRef>
+          <a:fontRef idx="minor">
+            <a:schemeClr val="dk1"/>
+          </a:fontRef>
+        </p:style>
+        <p:txBody>
+          <a:bodyPr rtlCol="0" anchor="ctr"/>
+          <a:lstStyle/>
+          <a:p>
+            <a:pPr algn="ctr"/>
+            <a:r>
+              <a:rPr lang="en-US" dirty="0"/>
+              <a:t>Quality</a:t>
+            </a:r>
+          </a:p>
+        </p:txBody>
+      </p:sp>
+      <p:sp>
+        <p:nvSpPr>
+          <p:cNvPr id="10" name="Rectangle 9">
+            <a:extLst>
+              <a:ext uri="{FF2B5EF4-FFF2-40B4-BE49-F238E27FC236}">
+                <a16:creationId xmlns:a16="http://schemas.microsoft.com/office/drawing/2014/main" id="{79921101-2D81-93F7-E39F-70EC78050317}"/>
+              </a:ext>
+            </a:extLst>
+          </p:cNvPr>
+          <p:cNvSpPr/>
+          <p:nvPr/>
+        </p:nvSpPr>
+        <p:spPr>
+          <a:xfrm>
+            <a:off x="4311285" y="2020684"/>
+            <a:ext cx="1992431" cy="640080"/>
+          </a:xfrm>
+          <a:prstGeom prst="rect">
+            <a:avLst/>
+          </a:prstGeom>
+        </p:spPr>
+        <p:style>
+          <a:lnRef idx="2">
+            <a:schemeClr val="accent1"/>
+          </a:lnRef>
+          <a:fillRef idx="1">
+            <a:schemeClr val="lt1"/>
+          </a:fillRef>
+          <a:effectRef idx="0">
+            <a:schemeClr val="accent1"/>
+          </a:effectRef>
+          <a:fontRef idx="minor">
+            <a:schemeClr val="dk1"/>
+          </a:fontRef>
+        </p:style>
+        <p:txBody>
+          <a:bodyPr rtlCol="0" anchor="ctr"/>
+          <a:lstStyle/>
+          <a:p>
+            <a:pPr algn="ctr"/>
+            <a:r>
+              <a:rPr lang="en-US" dirty="0"/>
+              <a:t>Length</a:t>
+            </a:r>
+          </a:p>
+        </p:txBody>
+      </p:sp>
+      <p:cxnSp>
+        <p:nvCxnSpPr>
+          <p:cNvPr id="16" name="Straight Arrow Connector 15">
+            <a:extLst>
+              <a:ext uri="{FF2B5EF4-FFF2-40B4-BE49-F238E27FC236}">
+                <a16:creationId xmlns:a16="http://schemas.microsoft.com/office/drawing/2014/main" id="{A89CE316-6021-FA27-7008-EC96C1ED4FAD}"/>
+              </a:ext>
+            </a:extLst>
+          </p:cNvPr>
+          <p:cNvCxnSpPr>
+            <a:cxnSpLocks/>
+            <a:stCxn id="9" idx="2"/>
+          </p:cNvCxnSpPr>
+          <p:nvPr/>
+        </p:nvCxnSpPr>
+        <p:spPr>
+          <a:xfrm flipH="1">
+            <a:off x="7067038" y="2634766"/>
+            <a:ext cx="531041" cy="728501"/>
+          </a:xfrm>
+          <a:prstGeom prst="straightConnector1">
+            <a:avLst/>
+          </a:prstGeom>
+          <a:ln>
+            <a:tailEnd type="triangle"/>
+          </a:ln>
+        </p:spPr>
+        <p:style>
+          <a:lnRef idx="2">
+            <a:schemeClr val="accent1"/>
+          </a:lnRef>
+          <a:fillRef idx="0">
+            <a:schemeClr val="accent1"/>
+          </a:fillRef>
+          <a:effectRef idx="1">
+            <a:schemeClr val="accent1"/>
+          </a:effectRef>
+          <a:fontRef idx="minor">
+            <a:schemeClr val="tx1"/>
+          </a:fontRef>
+        </p:style>
+      </p:cxnSp>
+      <p:sp>
+        <p:nvSpPr>
+          <p:cNvPr id="19" name="Rectangle 18">
+            <a:extLst>
+              <a:ext uri="{FF2B5EF4-FFF2-40B4-BE49-F238E27FC236}">
+                <a16:creationId xmlns:a16="http://schemas.microsoft.com/office/drawing/2014/main" id="{88854D61-7D27-D7AC-C51D-79D546146B82}"/>
+              </a:ext>
+            </a:extLst>
+          </p:cNvPr>
+          <p:cNvSpPr/>
+          <p:nvPr/>
+        </p:nvSpPr>
+        <p:spPr>
+          <a:xfrm>
+            <a:off x="2200858" y="3909835"/>
+            <a:ext cx="1992431" cy="640080"/>
+          </a:xfrm>
+          <a:prstGeom prst="rect">
+            <a:avLst/>
+          </a:prstGeom>
+        </p:spPr>
+        <p:style>
+          <a:lnRef idx="2">
+            <a:schemeClr val="accent1"/>
+          </a:lnRef>
+          <a:fillRef idx="1">
+            <a:schemeClr val="lt1"/>
+          </a:fillRef>
+          <a:effectRef idx="0">
+            <a:schemeClr val="accent1"/>
+          </a:effectRef>
+          <a:fontRef idx="minor">
+            <a:schemeClr val="dk1"/>
+          </a:fontRef>
+        </p:style>
+        <p:txBody>
+          <a:bodyPr rtlCol="0" anchor="ctr"/>
+          <a:lstStyle/>
+          <a:p>
+            <a:pPr algn="ctr"/>
+            <a:r>
+              <a:rPr lang="en-US" altLang="zh-CN" dirty="0"/>
+              <a:t>AI</a:t>
+            </a:r>
+            <a:endParaRPr lang="en-US" dirty="0"/>
+          </a:p>
+        </p:txBody>
+      </p:sp>
+      <p:cxnSp>
+        <p:nvCxnSpPr>
+          <p:cNvPr id="20" name="Straight Arrow Connector 19">
+            <a:extLst>
+              <a:ext uri="{FF2B5EF4-FFF2-40B4-BE49-F238E27FC236}">
+                <a16:creationId xmlns:a16="http://schemas.microsoft.com/office/drawing/2014/main" id="{43A4B5EA-7985-33D1-14E5-1BB8EEC92D8F}"/>
+              </a:ext>
+            </a:extLst>
+          </p:cNvPr>
+          <p:cNvCxnSpPr>
+            <a:cxnSpLocks/>
+            <a:stCxn id="19" idx="3"/>
+            <a:endCxn id="23" idx="1"/>
+          </p:cNvCxnSpPr>
+          <p:nvPr/>
+        </p:nvCxnSpPr>
+        <p:spPr>
+          <a:xfrm flipV="1">
+            <a:off x="4193289" y="3417295"/>
+            <a:ext cx="4548024" cy="812580"/>
+          </a:xfrm>
+          <a:prstGeom prst="straightConnector1">
+            <a:avLst/>
+          </a:prstGeom>
+          <a:ln>
+            <a:tailEnd type="triangle"/>
+          </a:ln>
+        </p:spPr>
+        <p:style>
+          <a:lnRef idx="2">
+            <a:schemeClr val="accent1"/>
+          </a:lnRef>
+          <a:fillRef idx="0">
+            <a:schemeClr val="accent1"/>
+          </a:fillRef>
+          <a:effectRef idx="1">
+            <a:schemeClr val="accent1"/>
+          </a:effectRef>
+          <a:fontRef idx="minor">
+            <a:schemeClr val="tx1"/>
+          </a:fontRef>
+        </p:style>
+      </p:cxnSp>
+      <p:sp>
+        <p:nvSpPr>
+          <p:cNvPr id="29" name="TextBox 28">
+            <a:extLst>
+              <a:ext uri="{FF2B5EF4-FFF2-40B4-BE49-F238E27FC236}">
+                <a16:creationId xmlns:a16="http://schemas.microsoft.com/office/drawing/2014/main" id="{E57576E5-1317-1ACF-F12E-2E97E6574E27}"/>
+              </a:ext>
+            </a:extLst>
+          </p:cNvPr>
+          <p:cNvSpPr txBox="1"/>
+          <p:nvPr/>
+        </p:nvSpPr>
+        <p:spPr>
+          <a:xfrm>
+            <a:off x="4677273" y="1118126"/>
+            <a:ext cx="613309" cy="369332"/>
+          </a:xfrm>
+          <a:prstGeom prst="rect">
+            <a:avLst/>
+          </a:prstGeom>
+          <a:noFill/>
+        </p:spPr>
+        <p:txBody>
+          <a:bodyPr wrap="none" rtlCol="0">
+            <a:spAutoFit/>
+          </a:bodyPr>
+          <a:lstStyle/>
+          <a:p>
+            <a:r>
+              <a:rPr lang="en-US" dirty="0"/>
+              <a:t>Fast</a:t>
+            </a:r>
+          </a:p>
+        </p:txBody>
+      </p:sp>
+      <p:sp>
+        <p:nvSpPr>
+          <p:cNvPr id="34" name="TextBox 33">
+            <a:extLst>
+              <a:ext uri="{FF2B5EF4-FFF2-40B4-BE49-F238E27FC236}">
+                <a16:creationId xmlns:a16="http://schemas.microsoft.com/office/drawing/2014/main" id="{E320F17C-0DC3-3942-9092-6163A2B67644}"/>
+              </a:ext>
+            </a:extLst>
+          </p:cNvPr>
+          <p:cNvSpPr txBox="1"/>
+          <p:nvPr/>
+        </p:nvSpPr>
+        <p:spPr>
+          <a:xfrm>
+            <a:off x="7528359" y="1145263"/>
+            <a:ext cx="664926" cy="369332"/>
+          </a:xfrm>
+          <a:prstGeom prst="rect">
+            <a:avLst/>
+          </a:prstGeom>
+          <a:noFill/>
+        </p:spPr>
+        <p:txBody>
+          <a:bodyPr wrap="none" rtlCol="0">
+            <a:spAutoFit/>
+          </a:bodyPr>
+          <a:lstStyle/>
+          <a:p>
+            <a:r>
+              <a:rPr lang="en-US" dirty="0"/>
+              <a:t>Slow</a:t>
+            </a:r>
+          </a:p>
+        </p:txBody>
+      </p:sp>
+      <p:sp>
+        <p:nvSpPr>
+          <p:cNvPr id="35" name="Right Brace 34">
+            <a:extLst>
+              <a:ext uri="{FF2B5EF4-FFF2-40B4-BE49-F238E27FC236}">
+                <a16:creationId xmlns:a16="http://schemas.microsoft.com/office/drawing/2014/main" id="{403CD545-E910-107A-A8E6-B8F9E52460F3}"/>
+              </a:ext>
+            </a:extLst>
+          </p:cNvPr>
+          <p:cNvSpPr/>
+          <p:nvPr/>
+        </p:nvSpPr>
+        <p:spPr>
+          <a:xfrm rot="16046947">
+            <a:off x="6228422" y="928951"/>
+            <a:ext cx="369334" cy="1447851"/>
+          </a:xfrm>
+          <a:prstGeom prst="rightBrace">
+            <a:avLst>
+              <a:gd name="adj1" fmla="val 41330"/>
+              <a:gd name="adj2" fmla="val 50000"/>
+            </a:avLst>
+          </a:prstGeom>
+        </p:spPr>
+        <p:style>
+          <a:lnRef idx="2">
+            <a:schemeClr val="accent1"/>
+          </a:lnRef>
+          <a:fillRef idx="0">
+            <a:schemeClr val="accent1"/>
+          </a:fillRef>
+          <a:effectRef idx="1">
+            <a:schemeClr val="accent1"/>
+          </a:effectRef>
+          <a:fontRef idx="minor">
+            <a:schemeClr val="tx1"/>
+          </a:fontRef>
+        </p:style>
+        <p:txBody>
+          <a:bodyPr rtlCol="0" anchor="ctr"/>
+          <a:lstStyle/>
+          <a:p>
+            <a:pPr algn="ctr"/>
+            <a:endParaRPr lang="en-US"/>
+          </a:p>
+        </p:txBody>
+      </p:sp>
+      <p:sp>
+        <p:nvSpPr>
+          <p:cNvPr id="36" name="TextBox 35">
+            <a:extLst>
+              <a:ext uri="{FF2B5EF4-FFF2-40B4-BE49-F238E27FC236}">
+                <a16:creationId xmlns:a16="http://schemas.microsoft.com/office/drawing/2014/main" id="{E0D60A9A-DEB8-1AB0-499D-39E5F09DC7E8}"/>
+              </a:ext>
+            </a:extLst>
+          </p:cNvPr>
+          <p:cNvSpPr txBox="1"/>
+          <p:nvPr/>
+        </p:nvSpPr>
+        <p:spPr>
+          <a:xfrm>
+            <a:off x="5307500" y="615562"/>
+            <a:ext cx="1793504" cy="369332"/>
+          </a:xfrm>
+          <a:prstGeom prst="rect">
+            <a:avLst/>
+          </a:prstGeom>
+          <a:noFill/>
+        </p:spPr>
+        <p:txBody>
+          <a:bodyPr wrap="none" rtlCol="0">
+            <a:spAutoFit/>
+          </a:bodyPr>
+          <a:lstStyle/>
+          <a:p>
+            <a:r>
+              <a:rPr lang="en-US" dirty="0"/>
+              <a:t>Dual Processing</a:t>
+            </a:r>
+          </a:p>
+        </p:txBody>
+      </p:sp>
+      <p:cxnSp>
+        <p:nvCxnSpPr>
+          <p:cNvPr id="18" name="Straight Arrow Connector 17">
+            <a:extLst>
+              <a:ext uri="{FF2B5EF4-FFF2-40B4-BE49-F238E27FC236}">
+                <a16:creationId xmlns:a16="http://schemas.microsoft.com/office/drawing/2014/main" id="{F929E469-24F3-D4AB-344C-4040F5BB96A7}"/>
+              </a:ext>
+            </a:extLst>
+          </p:cNvPr>
+          <p:cNvCxnSpPr>
+            <a:cxnSpLocks/>
+            <a:stCxn id="10" idx="2"/>
+          </p:cNvCxnSpPr>
+          <p:nvPr/>
+        </p:nvCxnSpPr>
+        <p:spPr>
+          <a:xfrm>
+            <a:off x="5307501" y="2660764"/>
+            <a:ext cx="366924" cy="1952230"/>
+          </a:xfrm>
+          <a:prstGeom prst="straightConnector1">
+            <a:avLst/>
+          </a:prstGeom>
+          <a:ln>
+            <a:tailEnd type="triangle"/>
+          </a:ln>
+        </p:spPr>
+        <p:style>
+          <a:lnRef idx="2">
+            <a:schemeClr val="accent1"/>
+          </a:lnRef>
+          <a:fillRef idx="0">
+            <a:schemeClr val="accent1"/>
+          </a:fillRef>
+          <a:effectRef idx="1">
+            <a:schemeClr val="accent1"/>
+          </a:effectRef>
+          <a:fontRef idx="minor">
+            <a:schemeClr val="tx1"/>
+          </a:fontRef>
+        </p:style>
+      </p:cxnSp>
+      <p:cxnSp>
+        <p:nvCxnSpPr>
+          <p:cNvPr id="26" name="Straight Arrow Connector 25">
+            <a:extLst>
+              <a:ext uri="{FF2B5EF4-FFF2-40B4-BE49-F238E27FC236}">
+                <a16:creationId xmlns:a16="http://schemas.microsoft.com/office/drawing/2014/main" id="{3D1DDCE9-D24C-5650-86A7-3883002D221A}"/>
+              </a:ext>
+            </a:extLst>
+          </p:cNvPr>
+          <p:cNvCxnSpPr>
+            <a:cxnSpLocks/>
+            <a:stCxn id="9" idx="2"/>
+          </p:cNvCxnSpPr>
+          <p:nvPr/>
+        </p:nvCxnSpPr>
+        <p:spPr>
+          <a:xfrm flipH="1">
+            <a:off x="7446950" y="2634766"/>
+            <a:ext cx="151129" cy="2556849"/>
+          </a:xfrm>
+          <a:prstGeom prst="straightConnector1">
+            <a:avLst/>
+          </a:prstGeom>
+          <a:ln>
+            <a:tailEnd type="triangle"/>
+          </a:ln>
+        </p:spPr>
+        <p:style>
+          <a:lnRef idx="2">
+            <a:schemeClr val="accent1"/>
+          </a:lnRef>
+          <a:fillRef idx="0">
+            <a:schemeClr val="accent1"/>
+          </a:fillRef>
+          <a:effectRef idx="1">
+            <a:schemeClr val="accent1"/>
+          </a:effectRef>
+          <a:fontRef idx="minor">
+            <a:schemeClr val="tx1"/>
+          </a:fontRef>
+        </p:style>
+      </p:cxnSp>
+      <p:sp>
+        <p:nvSpPr>
+          <p:cNvPr id="30" name="TextBox 29">
+            <a:extLst>
+              <a:ext uri="{FF2B5EF4-FFF2-40B4-BE49-F238E27FC236}">
+                <a16:creationId xmlns:a16="http://schemas.microsoft.com/office/drawing/2014/main" id="{39BAD1A8-1502-5454-194C-DBCD35C7901D}"/>
+              </a:ext>
+            </a:extLst>
+          </p:cNvPr>
+          <p:cNvSpPr txBox="1"/>
+          <p:nvPr/>
+        </p:nvSpPr>
+        <p:spPr>
+          <a:xfrm>
+            <a:off x="203457" y="128587"/>
+            <a:ext cx="2508444" cy="369332"/>
+          </a:xfrm>
+          <a:prstGeom prst="rect">
+            <a:avLst/>
+          </a:prstGeom>
+          <a:noFill/>
+        </p:spPr>
+        <p:txBody>
+          <a:bodyPr wrap="none" rtlCol="0">
+            <a:spAutoFit/>
+          </a:bodyPr>
+          <a:lstStyle/>
+          <a:p>
+            <a:r>
+              <a:rPr lang="en-US" altLang="zh-CN" dirty="0"/>
+              <a:t>260606</a:t>
+            </a:r>
+            <a:r>
+              <a:rPr lang="zh-CN" altLang="en-US" dirty="0"/>
+              <a:t> </a:t>
+            </a:r>
+            <a:r>
+              <a:rPr lang="en-US" altLang="zh-CN" dirty="0"/>
+              <a:t>comprehensive</a:t>
+            </a:r>
+            <a:endParaRPr lang="en-US" dirty="0"/>
+          </a:p>
+        </p:txBody>
+      </p:sp>
+      <p:sp>
+        <p:nvSpPr>
+          <p:cNvPr id="31" name="TextBox 30">
+            <a:extLst>
+              <a:ext uri="{FF2B5EF4-FFF2-40B4-BE49-F238E27FC236}">
+                <a16:creationId xmlns:a16="http://schemas.microsoft.com/office/drawing/2014/main" id="{AEC34E36-76DC-6773-E691-9881747E189F}"/>
+              </a:ext>
+            </a:extLst>
+          </p:cNvPr>
+          <p:cNvSpPr txBox="1"/>
+          <p:nvPr/>
+        </p:nvSpPr>
+        <p:spPr>
+          <a:xfrm>
+            <a:off x="506459" y="5203353"/>
+            <a:ext cx="6826099" cy="2308324"/>
+          </a:xfrm>
+          <a:prstGeom prst="rect">
+            <a:avLst/>
+          </a:prstGeom>
+          <a:noFill/>
+        </p:spPr>
+        <p:txBody>
+          <a:bodyPr wrap="none" rtlCol="0">
+            <a:spAutoFit/>
+          </a:bodyPr>
+          <a:lstStyle/>
+          <a:p>
+            <a:pPr marL="342900" indent="-342900">
+              <a:buAutoNum type="arabicPeriod"/>
+            </a:pPr>
+            <a:endParaRPr lang="en-US" altLang="zh-CN" dirty="0"/>
+          </a:p>
+          <a:p>
+            <a:pPr marL="342900" indent="-342900">
+              <a:buAutoNum type="arabicPeriod"/>
+            </a:pPr>
+            <a:endParaRPr lang="en-US" altLang="zh-CN" dirty="0"/>
+          </a:p>
+          <a:p>
+            <a:pPr marL="342900" indent="-342900">
+              <a:buAutoNum type="arabicPeriod"/>
+            </a:pPr>
+            <a:r>
+              <a:rPr lang="en-US" altLang="zh-CN" dirty="0"/>
+              <a:t>Extended</a:t>
+            </a:r>
+            <a:r>
+              <a:rPr lang="zh-CN" altLang="en-US" dirty="0"/>
+              <a:t> </a:t>
+            </a:r>
+            <a:r>
+              <a:rPr lang="en-US" altLang="zh-CN" dirty="0"/>
+              <a:t>abstract</a:t>
+            </a:r>
+            <a:r>
+              <a:rPr lang="zh-CN" altLang="en-US" dirty="0"/>
+              <a:t> </a:t>
+            </a:r>
+            <a:r>
+              <a:rPr lang="en-US" altLang="zh-CN" dirty="0"/>
+              <a:t>(organize</a:t>
+            </a:r>
+            <a:r>
+              <a:rPr lang="zh-CN" altLang="en-US" dirty="0"/>
+              <a:t> </a:t>
+            </a:r>
+            <a:r>
+              <a:rPr lang="en-US" altLang="zh-CN" dirty="0"/>
+              <a:t>results)</a:t>
+            </a:r>
+          </a:p>
+          <a:p>
+            <a:pPr marL="342900" indent="-342900">
+              <a:buAutoNum type="arabicPeriod"/>
+            </a:pPr>
+            <a:r>
+              <a:rPr lang="en-US" altLang="zh-CN" dirty="0"/>
+              <a:t>[Stage</a:t>
+            </a:r>
+            <a:r>
+              <a:rPr lang="zh-CN" altLang="en-US" dirty="0"/>
+              <a:t> </a:t>
+            </a:r>
+            <a:r>
+              <a:rPr lang="en-US" altLang="zh-CN" dirty="0"/>
+              <a:t>1]</a:t>
+            </a:r>
+            <a:r>
+              <a:rPr lang="zh-CN" altLang="en-US" dirty="0"/>
+              <a:t> </a:t>
+            </a:r>
+            <a:r>
+              <a:rPr lang="en-US" altLang="zh-CN" dirty="0"/>
+              <a:t>AI</a:t>
+            </a:r>
+            <a:r>
+              <a:rPr lang="zh-CN" altLang="en-US" dirty="0"/>
+              <a:t> </a:t>
+            </a:r>
+            <a:r>
+              <a:rPr lang="en-US" altLang="zh-CN" dirty="0"/>
+              <a:t>-&gt;</a:t>
+            </a:r>
+            <a:r>
+              <a:rPr lang="zh-CN" altLang="en-US" dirty="0"/>
+              <a:t> </a:t>
+            </a:r>
+            <a:r>
+              <a:rPr lang="en-US" altLang="zh-CN" dirty="0"/>
+              <a:t>observe</a:t>
+            </a:r>
+            <a:r>
+              <a:rPr lang="zh-CN" altLang="en-US" dirty="0"/>
+              <a:t> </a:t>
+            </a:r>
+            <a:r>
+              <a:rPr lang="en-US" altLang="zh-CN" dirty="0"/>
+              <a:t>this</a:t>
+            </a:r>
+            <a:r>
+              <a:rPr lang="zh-CN" altLang="en-US" dirty="0"/>
+              <a:t> </a:t>
+            </a:r>
+            <a:r>
+              <a:rPr lang="en-US" altLang="zh-CN" dirty="0"/>
+              <a:t>signal,</a:t>
+            </a:r>
+            <a:r>
+              <a:rPr lang="zh-CN" altLang="en-US" dirty="0"/>
+              <a:t> </a:t>
+            </a:r>
+            <a:br>
+              <a:rPr lang="en-US" altLang="zh-CN" dirty="0"/>
+            </a:br>
+            <a:r>
+              <a:rPr lang="en-US" altLang="zh-CN" dirty="0"/>
+              <a:t>[Stage</a:t>
+            </a:r>
+            <a:r>
+              <a:rPr lang="zh-CN" altLang="en-US" dirty="0"/>
+              <a:t> </a:t>
+            </a:r>
+            <a:r>
+              <a:rPr lang="en-US" altLang="zh-CN" dirty="0"/>
+              <a:t>2]</a:t>
+            </a:r>
+            <a:r>
+              <a:rPr lang="zh-CN" altLang="en-US" dirty="0"/>
+              <a:t> </a:t>
+            </a:r>
+            <a:r>
+              <a:rPr lang="en-US" altLang="zh-CN" dirty="0"/>
+              <a:t>analyze</a:t>
+            </a:r>
+            <a:r>
+              <a:rPr lang="zh-CN" altLang="en-US" dirty="0"/>
+              <a:t> </a:t>
+            </a:r>
+            <a:r>
+              <a:rPr lang="en-US" altLang="zh-CN" dirty="0"/>
+              <a:t>cue</a:t>
+            </a:r>
+            <a:r>
+              <a:rPr lang="zh-CN" altLang="en-US" dirty="0"/>
+              <a:t> </a:t>
+            </a:r>
+            <a:r>
+              <a:rPr lang="en-US" altLang="zh-CN" dirty="0"/>
+              <a:t>(length</a:t>
+            </a:r>
+            <a:r>
+              <a:rPr lang="zh-CN" altLang="en-US" dirty="0"/>
+              <a:t> </a:t>
+            </a:r>
+            <a:r>
+              <a:rPr lang="en-US" altLang="zh-CN" dirty="0"/>
+              <a:t>[fast]</a:t>
+            </a:r>
+            <a:r>
+              <a:rPr lang="zh-CN" altLang="en-US" dirty="0"/>
+              <a:t> </a:t>
+            </a:r>
+            <a:r>
+              <a:rPr lang="en-US" altLang="zh-CN" dirty="0"/>
+              <a:t>quality</a:t>
+            </a:r>
+            <a:r>
+              <a:rPr lang="zh-CN" altLang="en-US" dirty="0"/>
+              <a:t> </a:t>
+            </a:r>
+            <a:r>
+              <a:rPr lang="en-US" altLang="zh-CN" dirty="0"/>
+              <a:t>[slow])</a:t>
+            </a:r>
+            <a:br>
+              <a:rPr lang="en-US" altLang="zh-CN" dirty="0"/>
+            </a:br>
+            <a:br>
+              <a:rPr lang="en-US" altLang="zh-CN" dirty="0"/>
+            </a:br>
+            <a:r>
+              <a:rPr lang="en-US" altLang="zh-CN" dirty="0"/>
+              <a:t>generate</a:t>
+            </a:r>
+            <a:r>
+              <a:rPr lang="zh-CN" altLang="en-US" dirty="0"/>
+              <a:t> </a:t>
+            </a:r>
+            <a:r>
+              <a:rPr lang="en-US" altLang="zh-CN" dirty="0"/>
+              <a:t>a</a:t>
+            </a:r>
+            <a:r>
+              <a:rPr lang="zh-CN" altLang="en-US" dirty="0"/>
+              <a:t> </a:t>
+            </a:r>
+            <a:r>
+              <a:rPr lang="en-US" altLang="zh-CN" dirty="0"/>
+              <a:t>detailed</a:t>
+            </a:r>
+            <a:r>
+              <a:rPr lang="zh-CN" altLang="en-US" dirty="0"/>
+              <a:t> </a:t>
+            </a:r>
+            <a:r>
+              <a:rPr lang="en-US" altLang="zh-CN" dirty="0"/>
+              <a:t>theoretical</a:t>
+            </a:r>
+            <a:r>
+              <a:rPr lang="zh-CN" altLang="en-US" dirty="0"/>
+              <a:t> </a:t>
+            </a:r>
+            <a:r>
+              <a:rPr lang="en-US" altLang="zh-CN" dirty="0"/>
+              <a:t>development,</a:t>
+            </a:r>
+            <a:r>
+              <a:rPr lang="zh-CN" altLang="en-US" dirty="0"/>
+              <a:t> </a:t>
+            </a:r>
+            <a:br>
+              <a:rPr lang="en-US" altLang="zh-CN" dirty="0"/>
+            </a:br>
+            <a:r>
+              <a:rPr lang="zh-CN" altLang="en-US" dirty="0"/>
+              <a:t>体现</a:t>
+            </a:r>
+            <a:r>
+              <a:rPr lang="en-US" altLang="zh-CN" dirty="0"/>
+              <a:t>incentive</a:t>
+            </a:r>
+            <a:r>
+              <a:rPr lang="zh-CN" altLang="en-US" dirty="0"/>
+              <a:t> </a:t>
+            </a:r>
+            <a:r>
+              <a:rPr lang="en-US" altLang="zh-CN" dirty="0"/>
+              <a:t>for</a:t>
+            </a:r>
+            <a:r>
+              <a:rPr lang="zh-CN" altLang="en-US" dirty="0"/>
+              <a:t> </a:t>
+            </a:r>
+            <a:r>
+              <a:rPr lang="en-US" altLang="zh-CN" dirty="0"/>
+              <a:t>human</a:t>
+            </a:r>
+            <a:r>
+              <a:rPr lang="zh-CN" altLang="en-US" dirty="0"/>
+              <a:t> </a:t>
+            </a:r>
+            <a:r>
+              <a:rPr lang="en-US" altLang="zh-CN" dirty="0"/>
+              <a:t>answerer,</a:t>
+            </a:r>
+            <a:r>
+              <a:rPr lang="zh-CN" altLang="en-US" dirty="0"/>
+              <a:t> </a:t>
+            </a:r>
+            <a:r>
+              <a:rPr lang="en-US" altLang="zh-CN" dirty="0"/>
+              <a:t>competition</a:t>
+            </a:r>
+            <a:r>
+              <a:rPr lang="zh-CN" altLang="en-US" dirty="0"/>
+              <a:t> </a:t>
+            </a:r>
+            <a:r>
+              <a:rPr lang="en-US" altLang="zh-CN" dirty="0"/>
+              <a:t>(AI</a:t>
+            </a:r>
+            <a:r>
+              <a:rPr lang="zh-CN" altLang="en-US" dirty="0"/>
+              <a:t> </a:t>
+            </a:r>
+            <a:r>
+              <a:rPr lang="en-US" altLang="zh-CN" dirty="0"/>
+              <a:t>with</a:t>
+            </a:r>
+            <a:r>
+              <a:rPr lang="zh-CN" altLang="en-US" dirty="0"/>
+              <a:t> </a:t>
+            </a:r>
+            <a:r>
+              <a:rPr lang="en-US" altLang="zh-CN" dirty="0"/>
+              <a:t>human)</a:t>
+            </a:r>
+            <a:endParaRPr lang="en-US" dirty="0"/>
+          </a:p>
+        </p:txBody>
+      </p:sp>
+    </p:spTree>
+    <p:extLst>
+      <p:ext uri="{BB962C8B-B14F-4D97-AF65-F5344CB8AC3E}">
+        <p14:creationId xmlns:p14="http://schemas.microsoft.com/office/powerpoint/2010/main" val="1783631655"/>
+      </p:ext>
+    </p:extLst>
+  </p:cSld>
+  <p:clrMapOvr>
+    <a:masterClrMapping/>
+  </p:clrMapOvr>
+</p:sld>
+</file>
+
+<file path=ppt/slides/slide5.xml><?xml version="1.0" encoding="utf-8"?>
+<p:sld xmlns:a="http://schemas.openxmlformats.org/drawingml/2006/main" xmlns:r="http://schemas.openxmlformats.org/officeDocument/2006/relationships" xmlns:p="http://schemas.openxmlformats.org/presentationml/2006/main">
+  <p:cSld>
+    <p:spTree>
+      <p:nvGrpSpPr>
+        <p:cNvPr id="1" name="">
+          <a:extLst>
+            <a:ext uri="{FF2B5EF4-FFF2-40B4-BE49-F238E27FC236}">
+              <a16:creationId xmlns:a16="http://schemas.microsoft.com/office/drawing/2014/main" id="{47F35565-7A8C-4687-3F8E-2DF67A0ABAF0}"/>
+            </a:ext>
+          </a:extLst>
+        </p:cNvPr>
+        <p:cNvGrpSpPr/>
+        <p:nvPr/>
+      </p:nvGrpSpPr>
+      <p:grpSpPr>
+        <a:xfrm>
+          <a:off x="0" y="0"/>
+          <a:ext cx="0" cy="0"/>
+          <a:chOff x="0" y="0"/>
+          <a:chExt cx="0" cy="0"/>
+        </a:xfrm>
+      </p:grpSpPr>
+      <p:sp>
+        <p:nvSpPr>
+          <p:cNvPr id="13" name="Rectangle 12">
+            <a:extLst>
+              <a:ext uri="{FF2B5EF4-FFF2-40B4-BE49-F238E27FC236}">
+                <a16:creationId xmlns:a16="http://schemas.microsoft.com/office/drawing/2014/main" id="{42BBC832-1BE3-C3F3-FF29-80CC71D394BA}"/>
+              </a:ext>
+            </a:extLst>
+          </p:cNvPr>
+          <p:cNvSpPr/>
+          <p:nvPr/>
+        </p:nvSpPr>
+        <p:spPr>
+          <a:xfrm>
+            <a:off x="9255847" y="5330355"/>
+            <a:ext cx="1992431" cy="640080"/>
+          </a:xfrm>
+          <a:prstGeom prst="rect">
+            <a:avLst/>
+          </a:prstGeom>
+        </p:spPr>
+        <p:style>
+          <a:lnRef idx="2">
+            <a:schemeClr val="accent1"/>
+          </a:lnRef>
+          <a:fillRef idx="1">
+            <a:schemeClr val="lt1"/>
+          </a:fillRef>
+          <a:effectRef idx="0">
+            <a:schemeClr val="accent1"/>
+          </a:effectRef>
+          <a:fontRef idx="minor">
+            <a:schemeClr val="dk1"/>
+          </a:fontRef>
+        </p:style>
+        <p:txBody>
+          <a:bodyPr rtlCol="0" anchor="ctr"/>
+          <a:lstStyle/>
+          <a:p>
+            <a:pPr algn="ctr"/>
+            <a:r>
+              <a:rPr lang="en-US" dirty="0"/>
+              <a:t>Answer Innovation</a:t>
+            </a:r>
+          </a:p>
+        </p:txBody>
+      </p:sp>
+      <p:sp>
+        <p:nvSpPr>
+          <p:cNvPr id="23" name="Rectangle 22">
+            <a:extLst>
+              <a:ext uri="{FF2B5EF4-FFF2-40B4-BE49-F238E27FC236}">
+                <a16:creationId xmlns:a16="http://schemas.microsoft.com/office/drawing/2014/main" id="{9B7321FF-A6D9-D9D8-60FB-9356BA837A25}"/>
+              </a:ext>
+            </a:extLst>
+          </p:cNvPr>
+          <p:cNvSpPr/>
+          <p:nvPr/>
+        </p:nvSpPr>
+        <p:spPr>
+          <a:xfrm>
+            <a:off x="9155650" y="2355583"/>
+            <a:ext cx="1992431" cy="640080"/>
+          </a:xfrm>
+          <a:prstGeom prst="rect">
+            <a:avLst/>
+          </a:prstGeom>
+        </p:spPr>
+        <p:style>
+          <a:lnRef idx="2">
+            <a:schemeClr val="accent1"/>
+          </a:lnRef>
+          <a:fillRef idx="1">
+            <a:schemeClr val="lt1"/>
+          </a:fillRef>
+          <a:effectRef idx="0">
+            <a:schemeClr val="accent1"/>
+          </a:effectRef>
+          <a:fontRef idx="minor">
+            <a:schemeClr val="dk1"/>
+          </a:fontRef>
+        </p:style>
+        <p:txBody>
+          <a:bodyPr rtlCol="0" anchor="ctr"/>
+          <a:lstStyle/>
+          <a:p>
+            <a:pPr algn="ctr"/>
+            <a:r>
+              <a:rPr lang="en-US" altLang="zh-CN" dirty="0"/>
+              <a:t>Huiman</a:t>
+            </a:r>
+            <a:r>
+              <a:rPr lang="zh-CN" altLang="en-US" dirty="0"/>
+              <a:t> </a:t>
+            </a:r>
+            <a:r>
+              <a:rPr lang="en-US" dirty="0"/>
+              <a:t>Answer Participation</a:t>
+            </a:r>
+          </a:p>
+        </p:txBody>
+      </p:sp>
+      <p:sp>
+        <p:nvSpPr>
+          <p:cNvPr id="2" name="Rectangle 1">
+            <a:extLst>
+              <a:ext uri="{FF2B5EF4-FFF2-40B4-BE49-F238E27FC236}">
+                <a16:creationId xmlns:a16="http://schemas.microsoft.com/office/drawing/2014/main" id="{38A8BE21-8C7A-2948-F3EE-785542CD3C52}"/>
+              </a:ext>
+            </a:extLst>
+          </p:cNvPr>
+          <p:cNvSpPr/>
+          <p:nvPr/>
+        </p:nvSpPr>
+        <p:spPr>
+          <a:xfrm>
+            <a:off x="7016199" y="4402018"/>
+            <a:ext cx="1992431" cy="640080"/>
+          </a:xfrm>
+          <a:prstGeom prst="rect">
+            <a:avLst/>
+          </a:prstGeom>
+          <a:ln/>
+        </p:spPr>
+        <p:style>
+          <a:lnRef idx="2">
+            <a:schemeClr val="accent1"/>
+          </a:lnRef>
+          <a:fillRef idx="1">
+            <a:schemeClr val="lt1"/>
+          </a:fillRef>
+          <a:effectRef idx="0">
+            <a:schemeClr val="accent1"/>
+          </a:effectRef>
+          <a:fontRef idx="minor">
+            <a:schemeClr val="dk1"/>
+          </a:fontRef>
+        </p:style>
+        <p:txBody>
+          <a:bodyPr rtlCol="0" anchor="ctr"/>
+          <a:lstStyle/>
+          <a:p>
+            <a:pPr algn="ctr"/>
+            <a:r>
+              <a:rPr lang="en-US" altLang="zh-CN" dirty="0"/>
+              <a:t>Prior</a:t>
+            </a:r>
+            <a:r>
+              <a:rPr lang="zh-CN" altLang="en-US" dirty="0"/>
+              <a:t> </a:t>
+            </a:r>
+            <a:r>
+              <a:rPr lang="en-US" dirty="0"/>
+              <a:t>Answer Quality</a:t>
+            </a:r>
+          </a:p>
+        </p:txBody>
+      </p:sp>
+      <p:cxnSp>
+        <p:nvCxnSpPr>
+          <p:cNvPr id="8" name="Straight Arrow Connector 7">
+            <a:extLst>
+              <a:ext uri="{FF2B5EF4-FFF2-40B4-BE49-F238E27FC236}">
+                <a16:creationId xmlns:a16="http://schemas.microsoft.com/office/drawing/2014/main" id="{8EFC45B0-8D9A-6B7D-0970-D04FFAFF2C4A}"/>
+              </a:ext>
+            </a:extLst>
+          </p:cNvPr>
+          <p:cNvCxnSpPr>
+            <a:cxnSpLocks/>
+            <a:stCxn id="33" idx="2"/>
+          </p:cNvCxnSpPr>
+          <p:nvPr/>
+        </p:nvCxnSpPr>
+        <p:spPr>
+          <a:xfrm>
+            <a:off x="5721838" y="5042098"/>
+            <a:ext cx="864608" cy="583888"/>
+          </a:xfrm>
+          <a:prstGeom prst="straightConnector1">
+            <a:avLst/>
+          </a:prstGeom>
+          <a:ln>
+            <a:tailEnd type="triangle"/>
+          </a:ln>
+        </p:spPr>
+        <p:style>
+          <a:lnRef idx="2">
+            <a:schemeClr val="accent1"/>
+          </a:lnRef>
+          <a:fillRef idx="0">
+            <a:schemeClr val="accent1"/>
+          </a:fillRef>
+          <a:effectRef idx="1">
+            <a:schemeClr val="accent1"/>
+          </a:effectRef>
+          <a:fontRef idx="minor">
+            <a:schemeClr val="tx1"/>
+          </a:fontRef>
+        </p:style>
+      </p:cxnSp>
+      <p:sp>
+        <p:nvSpPr>
+          <p:cNvPr id="33" name="Rectangle 32">
+            <a:extLst>
+              <a:ext uri="{FF2B5EF4-FFF2-40B4-BE49-F238E27FC236}">
+                <a16:creationId xmlns:a16="http://schemas.microsoft.com/office/drawing/2014/main" id="{1BD9C20D-E1A3-F221-EFC1-7DD23D50743D}"/>
+              </a:ext>
+            </a:extLst>
+          </p:cNvPr>
+          <p:cNvSpPr/>
+          <p:nvPr/>
+        </p:nvSpPr>
+        <p:spPr>
+          <a:xfrm>
+            <a:off x="4725622" y="4402018"/>
+            <a:ext cx="1992431" cy="640080"/>
+          </a:xfrm>
+          <a:prstGeom prst="rect">
+            <a:avLst/>
+          </a:prstGeom>
+        </p:spPr>
+        <p:style>
+          <a:lnRef idx="2">
+            <a:schemeClr val="accent1"/>
+          </a:lnRef>
+          <a:fillRef idx="1">
+            <a:schemeClr val="lt1"/>
+          </a:fillRef>
+          <a:effectRef idx="0">
+            <a:schemeClr val="accent1"/>
+          </a:effectRef>
+          <a:fontRef idx="minor">
+            <a:schemeClr val="dk1"/>
+          </a:fontRef>
+        </p:style>
+        <p:txBody>
+          <a:bodyPr rtlCol="0" anchor="ctr"/>
+          <a:lstStyle/>
+          <a:p>
+            <a:pPr algn="ctr"/>
+            <a:r>
+              <a:rPr lang="en-US" altLang="zh-CN" dirty="0"/>
+              <a:t>Prior</a:t>
+            </a:r>
+            <a:r>
+              <a:rPr lang="zh-CN" altLang="en-US" dirty="0"/>
+              <a:t> </a:t>
+            </a:r>
+            <a:r>
+              <a:rPr lang="en-US" dirty="0"/>
+              <a:t>Answer Length</a:t>
+            </a:r>
+          </a:p>
+        </p:txBody>
+      </p:sp>
+      <p:cxnSp>
+        <p:nvCxnSpPr>
+          <p:cNvPr id="21" name="Straight Arrow Connector 20">
+            <a:extLst>
+              <a:ext uri="{FF2B5EF4-FFF2-40B4-BE49-F238E27FC236}">
+                <a16:creationId xmlns:a16="http://schemas.microsoft.com/office/drawing/2014/main" id="{68C5B7EF-1EFF-AED8-EA81-681A19A9D7C7}"/>
+              </a:ext>
+            </a:extLst>
+          </p:cNvPr>
+          <p:cNvCxnSpPr>
+            <a:cxnSpLocks/>
+            <a:stCxn id="61" idx="3"/>
+            <a:endCxn id="13" idx="1"/>
+          </p:cNvCxnSpPr>
+          <p:nvPr/>
+        </p:nvCxnSpPr>
+        <p:spPr>
+          <a:xfrm>
+            <a:off x="4607626" y="5650395"/>
+            <a:ext cx="4648221" cy="0"/>
+          </a:xfrm>
+          <a:prstGeom prst="straightConnector1">
+            <a:avLst/>
+          </a:prstGeom>
+          <a:ln>
+            <a:tailEnd type="triangle"/>
+          </a:ln>
+        </p:spPr>
+        <p:style>
+          <a:lnRef idx="2">
+            <a:schemeClr val="accent1"/>
+          </a:lnRef>
+          <a:fillRef idx="0">
+            <a:schemeClr val="accent1"/>
+          </a:fillRef>
+          <a:effectRef idx="1">
+            <a:schemeClr val="accent1"/>
+          </a:effectRef>
+          <a:fontRef idx="minor">
+            <a:schemeClr val="tx1"/>
+          </a:fontRef>
+        </p:style>
+      </p:cxnSp>
+      <p:sp>
+        <p:nvSpPr>
+          <p:cNvPr id="61" name="Rectangle 60">
+            <a:extLst>
+              <a:ext uri="{FF2B5EF4-FFF2-40B4-BE49-F238E27FC236}">
+                <a16:creationId xmlns:a16="http://schemas.microsoft.com/office/drawing/2014/main" id="{37CBE7BB-16CE-0412-50BE-50BEBED9B6C6}"/>
+              </a:ext>
+            </a:extLst>
+          </p:cNvPr>
+          <p:cNvSpPr/>
+          <p:nvPr/>
+        </p:nvSpPr>
+        <p:spPr>
+          <a:xfrm>
+            <a:off x="2615195" y="5330355"/>
+            <a:ext cx="1992431" cy="640080"/>
+          </a:xfrm>
+          <a:prstGeom prst="rect">
+            <a:avLst/>
+          </a:prstGeom>
+        </p:spPr>
+        <p:style>
+          <a:lnRef idx="2">
+            <a:schemeClr val="accent1"/>
+          </a:lnRef>
+          <a:fillRef idx="1">
+            <a:schemeClr val="lt1"/>
+          </a:fillRef>
+          <a:effectRef idx="0">
+            <a:schemeClr val="accent1"/>
+          </a:effectRef>
+          <a:fontRef idx="minor">
+            <a:schemeClr val="dk1"/>
+          </a:fontRef>
+        </p:style>
+        <p:txBody>
+          <a:bodyPr rtlCol="0" anchor="ctr"/>
+          <a:lstStyle/>
+          <a:p>
+            <a:pPr algn="ctr"/>
+            <a:r>
+              <a:rPr lang="en-US" altLang="zh-CN" dirty="0"/>
+              <a:t>Prior</a:t>
+            </a:r>
+            <a:r>
+              <a:rPr lang="zh-CN" altLang="en-US" dirty="0"/>
+              <a:t> </a:t>
+            </a:r>
+            <a:r>
+              <a:rPr lang="en-US" altLang="zh-CN" dirty="0"/>
+              <a:t>is</a:t>
+            </a:r>
+            <a:r>
+              <a:rPr lang="zh-CN" altLang="en-US" dirty="0"/>
+              <a:t> </a:t>
+            </a:r>
+            <a:r>
+              <a:rPr lang="en-US" dirty="0"/>
+              <a:t>AI</a:t>
+            </a:r>
+            <a:r>
+              <a:rPr lang="zh-CN" altLang="en-US" dirty="0"/>
+              <a:t> </a:t>
+            </a:r>
+            <a:r>
+              <a:rPr lang="en-US" altLang="zh-CN" dirty="0"/>
+              <a:t>or</a:t>
+            </a:r>
+            <a:r>
+              <a:rPr lang="zh-CN" altLang="en-US" dirty="0"/>
+              <a:t> </a:t>
+            </a:r>
+            <a:r>
+              <a:rPr lang="en-US" altLang="zh-CN" dirty="0"/>
+              <a:t>human</a:t>
+            </a:r>
+            <a:endParaRPr lang="en-US" dirty="0"/>
+          </a:p>
+        </p:txBody>
+      </p:sp>
+      <p:cxnSp>
+        <p:nvCxnSpPr>
+          <p:cNvPr id="43" name="Straight Arrow Connector 42">
+            <a:extLst>
+              <a:ext uri="{FF2B5EF4-FFF2-40B4-BE49-F238E27FC236}">
+                <a16:creationId xmlns:a16="http://schemas.microsoft.com/office/drawing/2014/main" id="{9B20AA13-624C-B826-16FB-DE101F6B3FD7}"/>
+              </a:ext>
+            </a:extLst>
+          </p:cNvPr>
+          <p:cNvCxnSpPr>
+            <a:cxnSpLocks/>
+            <a:stCxn id="2" idx="2"/>
+          </p:cNvCxnSpPr>
+          <p:nvPr/>
+        </p:nvCxnSpPr>
+        <p:spPr>
+          <a:xfrm flipH="1">
+            <a:off x="7582662" y="5042098"/>
+            <a:ext cx="429753" cy="608297"/>
+          </a:xfrm>
+          <a:prstGeom prst="straightConnector1">
+            <a:avLst/>
+          </a:prstGeom>
+          <a:ln>
+            <a:tailEnd type="triangle"/>
+          </a:ln>
+        </p:spPr>
+        <p:style>
+          <a:lnRef idx="2">
+            <a:schemeClr val="accent1"/>
+          </a:lnRef>
+          <a:fillRef idx="0">
+            <a:schemeClr val="accent1"/>
+          </a:fillRef>
+          <a:effectRef idx="1">
+            <a:schemeClr val="accent1"/>
+          </a:effectRef>
+          <a:fontRef idx="minor">
+            <a:schemeClr val="tx1"/>
+          </a:fontRef>
+        </p:style>
+      </p:cxnSp>
+      <p:cxnSp>
+        <p:nvCxnSpPr>
+          <p:cNvPr id="4" name="Straight Arrow Connector 3">
+            <a:extLst>
+              <a:ext uri="{FF2B5EF4-FFF2-40B4-BE49-F238E27FC236}">
+                <a16:creationId xmlns:a16="http://schemas.microsoft.com/office/drawing/2014/main" id="{F045FC41-F8D7-7F97-DAA7-45E27045306B}"/>
+              </a:ext>
+            </a:extLst>
+          </p:cNvPr>
+          <p:cNvCxnSpPr>
+            <a:cxnSpLocks/>
+            <a:stCxn id="10" idx="2"/>
+          </p:cNvCxnSpPr>
+          <p:nvPr/>
+        </p:nvCxnSpPr>
+        <p:spPr>
+          <a:xfrm>
+            <a:off x="5721838" y="1919092"/>
+            <a:ext cx="864608" cy="702503"/>
+          </a:xfrm>
+          <a:prstGeom prst="straightConnector1">
+            <a:avLst/>
+          </a:prstGeom>
+          <a:ln>
+            <a:tailEnd type="triangle"/>
+          </a:ln>
+        </p:spPr>
+        <p:style>
+          <a:lnRef idx="2">
+            <a:schemeClr val="accent1"/>
+          </a:lnRef>
+          <a:fillRef idx="0">
+            <a:schemeClr val="accent1"/>
+          </a:fillRef>
+          <a:effectRef idx="1">
+            <a:schemeClr val="accent1"/>
+          </a:effectRef>
+          <a:fontRef idx="minor">
+            <a:schemeClr val="tx1"/>
+          </a:fontRef>
+        </p:style>
+      </p:cxnSp>
+      <p:sp>
+        <p:nvSpPr>
+          <p:cNvPr id="9" name="Rectangle 8">
+            <a:extLst>
+              <a:ext uri="{FF2B5EF4-FFF2-40B4-BE49-F238E27FC236}">
+                <a16:creationId xmlns:a16="http://schemas.microsoft.com/office/drawing/2014/main" id="{BB11233B-2F14-C0B0-2452-3127A12DB2F6}"/>
+              </a:ext>
+            </a:extLst>
+          </p:cNvPr>
+          <p:cNvSpPr/>
+          <p:nvPr/>
+        </p:nvSpPr>
+        <p:spPr>
+          <a:xfrm>
+            <a:off x="7016200" y="1253014"/>
+            <a:ext cx="1992431" cy="640080"/>
+          </a:xfrm>
+          <a:prstGeom prst="rect">
+            <a:avLst/>
+          </a:prstGeom>
+          <a:ln/>
+        </p:spPr>
+        <p:style>
+          <a:lnRef idx="2">
+            <a:schemeClr val="accent1"/>
+          </a:lnRef>
+          <a:fillRef idx="1">
+            <a:schemeClr val="lt1"/>
+          </a:fillRef>
+          <a:effectRef idx="0">
+            <a:schemeClr val="accent1"/>
+          </a:effectRef>
+          <a:fontRef idx="minor">
+            <a:schemeClr val="dk1"/>
+          </a:fontRef>
+        </p:style>
+        <p:txBody>
+          <a:bodyPr rtlCol="0" anchor="ctr"/>
+          <a:lstStyle/>
+          <a:p>
+            <a:pPr algn="ctr"/>
+            <a:r>
+              <a:rPr lang="en-US" altLang="zh-CN" dirty="0"/>
+              <a:t>AI</a:t>
+            </a:r>
+            <a:r>
+              <a:rPr lang="zh-CN" altLang="en-US" dirty="0"/>
+              <a:t> </a:t>
+            </a:r>
+            <a:r>
+              <a:rPr lang="en-US" dirty="0"/>
+              <a:t>Quality</a:t>
+            </a:r>
+          </a:p>
+        </p:txBody>
+      </p:sp>
+      <p:sp>
+        <p:nvSpPr>
+          <p:cNvPr id="10" name="Rectangle 9">
+            <a:extLst>
+              <a:ext uri="{FF2B5EF4-FFF2-40B4-BE49-F238E27FC236}">
+                <a16:creationId xmlns:a16="http://schemas.microsoft.com/office/drawing/2014/main" id="{388FE77C-B75B-1F11-3310-44DBD1F6479B}"/>
+              </a:ext>
+            </a:extLst>
+          </p:cNvPr>
+          <p:cNvSpPr/>
+          <p:nvPr/>
+        </p:nvSpPr>
+        <p:spPr>
+          <a:xfrm>
+            <a:off x="4725622" y="1279012"/>
+            <a:ext cx="1992431" cy="640080"/>
+          </a:xfrm>
+          <a:prstGeom prst="rect">
+            <a:avLst/>
+          </a:prstGeom>
+        </p:spPr>
+        <p:style>
+          <a:lnRef idx="2">
+            <a:schemeClr val="accent1"/>
+          </a:lnRef>
+          <a:fillRef idx="1">
+            <a:schemeClr val="lt1"/>
+          </a:fillRef>
+          <a:effectRef idx="0">
+            <a:schemeClr val="accent1"/>
+          </a:effectRef>
+          <a:fontRef idx="minor">
+            <a:schemeClr val="dk1"/>
+          </a:fontRef>
+        </p:style>
+        <p:txBody>
+          <a:bodyPr rtlCol="0" anchor="ctr"/>
+          <a:lstStyle/>
+          <a:p>
+            <a:pPr algn="ctr"/>
+            <a:r>
+              <a:rPr lang="en-US" altLang="zh-CN" dirty="0"/>
+              <a:t>AI</a:t>
+            </a:r>
+            <a:r>
+              <a:rPr lang="zh-CN" altLang="en-US" dirty="0"/>
+              <a:t> </a:t>
+            </a:r>
+            <a:r>
+              <a:rPr lang="en-US" dirty="0"/>
+              <a:t>Length</a:t>
+            </a:r>
+          </a:p>
+        </p:txBody>
+      </p:sp>
+      <p:cxnSp>
+        <p:nvCxnSpPr>
+          <p:cNvPr id="16" name="Straight Arrow Connector 15">
+            <a:extLst>
+              <a:ext uri="{FF2B5EF4-FFF2-40B4-BE49-F238E27FC236}">
+                <a16:creationId xmlns:a16="http://schemas.microsoft.com/office/drawing/2014/main" id="{16A77BFA-FC65-D45F-EAC1-5F7531E33695}"/>
+              </a:ext>
+            </a:extLst>
+          </p:cNvPr>
+          <p:cNvCxnSpPr>
+            <a:cxnSpLocks/>
+            <a:stCxn id="9" idx="2"/>
+          </p:cNvCxnSpPr>
+          <p:nvPr/>
+        </p:nvCxnSpPr>
+        <p:spPr>
+          <a:xfrm flipH="1">
+            <a:off x="7481375" y="1893094"/>
+            <a:ext cx="531041" cy="728501"/>
+          </a:xfrm>
+          <a:prstGeom prst="straightConnector1">
+            <a:avLst/>
+          </a:prstGeom>
+          <a:ln>
+            <a:tailEnd type="triangle"/>
+          </a:ln>
+        </p:spPr>
+        <p:style>
+          <a:lnRef idx="2">
+            <a:schemeClr val="accent1"/>
+          </a:lnRef>
+          <a:fillRef idx="0">
+            <a:schemeClr val="accent1"/>
+          </a:fillRef>
+          <a:effectRef idx="1">
+            <a:schemeClr val="accent1"/>
+          </a:effectRef>
+          <a:fontRef idx="minor">
+            <a:schemeClr val="tx1"/>
+          </a:fontRef>
+        </p:style>
+      </p:cxnSp>
+      <p:sp>
+        <p:nvSpPr>
+          <p:cNvPr id="19" name="Rectangle 18">
+            <a:extLst>
+              <a:ext uri="{FF2B5EF4-FFF2-40B4-BE49-F238E27FC236}">
+                <a16:creationId xmlns:a16="http://schemas.microsoft.com/office/drawing/2014/main" id="{D39A1D72-D4C2-6769-8C5D-E6B53F5D9A46}"/>
+              </a:ext>
+            </a:extLst>
+          </p:cNvPr>
+          <p:cNvSpPr/>
+          <p:nvPr/>
+        </p:nvSpPr>
+        <p:spPr>
+          <a:xfrm>
+            <a:off x="2615195" y="2256671"/>
+            <a:ext cx="1992431" cy="640080"/>
+          </a:xfrm>
+          <a:prstGeom prst="rect">
+            <a:avLst/>
+          </a:prstGeom>
+        </p:spPr>
+        <p:style>
+          <a:lnRef idx="2">
+            <a:schemeClr val="accent1"/>
+          </a:lnRef>
+          <a:fillRef idx="1">
+            <a:schemeClr val="lt1"/>
+          </a:fillRef>
+          <a:effectRef idx="0">
+            <a:schemeClr val="accent1"/>
+          </a:effectRef>
+          <a:fontRef idx="minor">
+            <a:schemeClr val="dk1"/>
+          </a:fontRef>
+        </p:style>
+        <p:txBody>
+          <a:bodyPr rtlCol="0" anchor="ctr"/>
+          <a:lstStyle/>
+          <a:p>
+            <a:pPr algn="ctr"/>
+            <a:r>
+              <a:rPr lang="en-US" altLang="zh-CN" dirty="0"/>
+              <a:t>Has</a:t>
+            </a:r>
+            <a:r>
+              <a:rPr lang="zh-CN" altLang="en-US" dirty="0"/>
+              <a:t> </a:t>
+            </a:r>
+            <a:r>
+              <a:rPr lang="en-US" altLang="zh-CN" dirty="0"/>
+              <a:t>AI</a:t>
+            </a:r>
+            <a:r>
+              <a:rPr lang="zh-CN" altLang="en-US" dirty="0"/>
+              <a:t> </a:t>
+            </a:r>
+            <a:r>
+              <a:rPr lang="en-US" altLang="zh-CN" dirty="0"/>
+              <a:t>answer</a:t>
+            </a:r>
+            <a:endParaRPr lang="en-US" dirty="0"/>
+          </a:p>
+        </p:txBody>
+      </p:sp>
+      <p:cxnSp>
+        <p:nvCxnSpPr>
+          <p:cNvPr id="20" name="Straight Arrow Connector 19">
+            <a:extLst>
+              <a:ext uri="{FF2B5EF4-FFF2-40B4-BE49-F238E27FC236}">
+                <a16:creationId xmlns:a16="http://schemas.microsoft.com/office/drawing/2014/main" id="{15B26752-9FD1-2C3D-A02C-7D5A2AC10021}"/>
+              </a:ext>
+            </a:extLst>
+          </p:cNvPr>
+          <p:cNvCxnSpPr>
+            <a:cxnSpLocks/>
+            <a:stCxn id="19" idx="3"/>
+            <a:endCxn id="23" idx="1"/>
+          </p:cNvCxnSpPr>
+          <p:nvPr/>
+        </p:nvCxnSpPr>
+        <p:spPr>
+          <a:xfrm>
+            <a:off x="4607626" y="2576711"/>
+            <a:ext cx="4548024" cy="98912"/>
+          </a:xfrm>
+          <a:prstGeom prst="straightConnector1">
+            <a:avLst/>
+          </a:prstGeom>
+          <a:ln>
+            <a:tailEnd type="triangle"/>
+          </a:ln>
+        </p:spPr>
+        <p:style>
+          <a:lnRef idx="2">
+            <a:schemeClr val="accent1"/>
+          </a:lnRef>
+          <a:fillRef idx="0">
+            <a:schemeClr val="accent1"/>
+          </a:fillRef>
+          <a:effectRef idx="1">
+            <a:schemeClr val="accent1"/>
+          </a:effectRef>
+          <a:fontRef idx="minor">
+            <a:schemeClr val="tx1"/>
+          </a:fontRef>
+        </p:style>
+      </p:cxnSp>
+      <p:sp>
+        <p:nvSpPr>
+          <p:cNvPr id="29" name="TextBox 28">
+            <a:extLst>
+              <a:ext uri="{FF2B5EF4-FFF2-40B4-BE49-F238E27FC236}">
+                <a16:creationId xmlns:a16="http://schemas.microsoft.com/office/drawing/2014/main" id="{CA9E0640-3E70-B56C-847C-F7D7DB9F81D6}"/>
+              </a:ext>
+            </a:extLst>
+          </p:cNvPr>
+          <p:cNvSpPr txBox="1"/>
+          <p:nvPr/>
+        </p:nvSpPr>
+        <p:spPr>
+          <a:xfrm>
+            <a:off x="5091610" y="376454"/>
+            <a:ext cx="613309" cy="369332"/>
+          </a:xfrm>
+          <a:prstGeom prst="rect">
+            <a:avLst/>
+          </a:prstGeom>
+          <a:noFill/>
+        </p:spPr>
+        <p:txBody>
+          <a:bodyPr wrap="none" rtlCol="0">
+            <a:spAutoFit/>
+          </a:bodyPr>
+          <a:lstStyle/>
+          <a:p>
+            <a:r>
+              <a:rPr lang="en-US" dirty="0"/>
+              <a:t>Fast</a:t>
+            </a:r>
+          </a:p>
+        </p:txBody>
+      </p:sp>
+      <p:sp>
+        <p:nvSpPr>
+          <p:cNvPr id="34" name="TextBox 33">
+            <a:extLst>
+              <a:ext uri="{FF2B5EF4-FFF2-40B4-BE49-F238E27FC236}">
+                <a16:creationId xmlns:a16="http://schemas.microsoft.com/office/drawing/2014/main" id="{EAB66206-50D4-8FDB-366D-5D1A426716E6}"/>
+              </a:ext>
+            </a:extLst>
+          </p:cNvPr>
+          <p:cNvSpPr txBox="1"/>
+          <p:nvPr/>
+        </p:nvSpPr>
+        <p:spPr>
+          <a:xfrm>
+            <a:off x="7942696" y="403591"/>
+            <a:ext cx="664926" cy="369332"/>
+          </a:xfrm>
+          <a:prstGeom prst="rect">
+            <a:avLst/>
+          </a:prstGeom>
+          <a:noFill/>
+        </p:spPr>
+        <p:txBody>
+          <a:bodyPr wrap="none" rtlCol="0">
+            <a:spAutoFit/>
+          </a:bodyPr>
+          <a:lstStyle/>
+          <a:p>
+            <a:r>
+              <a:rPr lang="en-US" dirty="0"/>
+              <a:t>Slow</a:t>
+            </a:r>
+          </a:p>
+        </p:txBody>
+      </p:sp>
+      <p:sp>
+        <p:nvSpPr>
+          <p:cNvPr id="35" name="Right Brace 34">
+            <a:extLst>
+              <a:ext uri="{FF2B5EF4-FFF2-40B4-BE49-F238E27FC236}">
+                <a16:creationId xmlns:a16="http://schemas.microsoft.com/office/drawing/2014/main" id="{43930A1D-C311-8792-50A9-C4B7742768C7}"/>
+              </a:ext>
+            </a:extLst>
+          </p:cNvPr>
+          <p:cNvSpPr/>
+          <p:nvPr/>
+        </p:nvSpPr>
+        <p:spPr>
+          <a:xfrm rot="16046947">
+            <a:off x="6642759" y="187279"/>
+            <a:ext cx="369334" cy="1447851"/>
+          </a:xfrm>
+          <a:prstGeom prst="rightBrace">
+            <a:avLst>
+              <a:gd name="adj1" fmla="val 41330"/>
+              <a:gd name="adj2" fmla="val 50000"/>
+            </a:avLst>
+          </a:prstGeom>
+        </p:spPr>
+        <p:style>
+          <a:lnRef idx="2">
+            <a:schemeClr val="accent1"/>
+          </a:lnRef>
+          <a:fillRef idx="0">
+            <a:schemeClr val="accent1"/>
+          </a:fillRef>
+          <a:effectRef idx="1">
+            <a:schemeClr val="accent1"/>
+          </a:effectRef>
+          <a:fontRef idx="minor">
+            <a:schemeClr val="tx1"/>
+          </a:fontRef>
+        </p:style>
+        <p:txBody>
+          <a:bodyPr rtlCol="0" anchor="ctr"/>
+          <a:lstStyle/>
+          <a:p>
+            <a:pPr algn="ctr"/>
+            <a:endParaRPr lang="en-US"/>
+          </a:p>
+        </p:txBody>
+      </p:sp>
+      <p:sp>
+        <p:nvSpPr>
+          <p:cNvPr id="36" name="TextBox 35">
+            <a:extLst>
+              <a:ext uri="{FF2B5EF4-FFF2-40B4-BE49-F238E27FC236}">
+                <a16:creationId xmlns:a16="http://schemas.microsoft.com/office/drawing/2014/main" id="{B3F36B0F-BC3F-B644-A9A4-C2BFA0B470AE}"/>
+              </a:ext>
+            </a:extLst>
+          </p:cNvPr>
+          <p:cNvSpPr txBox="1"/>
+          <p:nvPr/>
+        </p:nvSpPr>
+        <p:spPr>
+          <a:xfrm>
+            <a:off x="5721837" y="-126110"/>
+            <a:ext cx="1793504" cy="369332"/>
+          </a:xfrm>
+          <a:prstGeom prst="rect">
+            <a:avLst/>
+          </a:prstGeom>
+          <a:noFill/>
+        </p:spPr>
+        <p:txBody>
+          <a:bodyPr wrap="none" rtlCol="0">
+            <a:spAutoFit/>
+          </a:bodyPr>
+          <a:lstStyle/>
+          <a:p>
+            <a:r>
+              <a:rPr lang="en-US" dirty="0"/>
+              <a:t>Dual Processing</a:t>
+            </a:r>
+          </a:p>
+        </p:txBody>
+      </p:sp>
+      <p:sp>
+        <p:nvSpPr>
+          <p:cNvPr id="37" name="TextBox 36">
+            <a:extLst>
+              <a:ext uri="{FF2B5EF4-FFF2-40B4-BE49-F238E27FC236}">
+                <a16:creationId xmlns:a16="http://schemas.microsoft.com/office/drawing/2014/main" id="{757AD3EE-9EDE-245F-69C4-9C432A09D307}"/>
+              </a:ext>
+            </a:extLst>
+          </p:cNvPr>
+          <p:cNvSpPr txBox="1"/>
+          <p:nvPr/>
+        </p:nvSpPr>
+        <p:spPr>
+          <a:xfrm>
+            <a:off x="5091610" y="3535892"/>
+            <a:ext cx="613309" cy="369332"/>
+          </a:xfrm>
+          <a:prstGeom prst="rect">
+            <a:avLst/>
+          </a:prstGeom>
+          <a:noFill/>
+        </p:spPr>
+        <p:txBody>
+          <a:bodyPr wrap="none" rtlCol="0">
+            <a:spAutoFit/>
+          </a:bodyPr>
+          <a:lstStyle/>
+          <a:p>
+            <a:r>
+              <a:rPr lang="en-US" dirty="0"/>
+              <a:t>Fast</a:t>
+            </a:r>
+          </a:p>
+        </p:txBody>
+      </p:sp>
+      <p:sp>
+        <p:nvSpPr>
+          <p:cNvPr id="38" name="TextBox 37">
+            <a:extLst>
+              <a:ext uri="{FF2B5EF4-FFF2-40B4-BE49-F238E27FC236}">
+                <a16:creationId xmlns:a16="http://schemas.microsoft.com/office/drawing/2014/main" id="{F6C370C2-9316-8827-64C6-F4706145E4D0}"/>
+              </a:ext>
+            </a:extLst>
+          </p:cNvPr>
+          <p:cNvSpPr txBox="1"/>
+          <p:nvPr/>
+        </p:nvSpPr>
+        <p:spPr>
+          <a:xfrm>
+            <a:off x="7942696" y="3563029"/>
+            <a:ext cx="664926" cy="369332"/>
+          </a:xfrm>
+          <a:prstGeom prst="rect">
+            <a:avLst/>
+          </a:prstGeom>
+          <a:noFill/>
+        </p:spPr>
+        <p:txBody>
+          <a:bodyPr wrap="none" rtlCol="0">
+            <a:spAutoFit/>
+          </a:bodyPr>
+          <a:lstStyle/>
+          <a:p>
+            <a:r>
+              <a:rPr lang="en-US" dirty="0"/>
+              <a:t>Slow</a:t>
+            </a:r>
+          </a:p>
+        </p:txBody>
+      </p:sp>
+      <p:sp>
+        <p:nvSpPr>
+          <p:cNvPr id="39" name="Right Brace 38">
+            <a:extLst>
+              <a:ext uri="{FF2B5EF4-FFF2-40B4-BE49-F238E27FC236}">
+                <a16:creationId xmlns:a16="http://schemas.microsoft.com/office/drawing/2014/main" id="{D73A06A7-CF0B-A36F-A9FE-EA160013DF5C}"/>
+              </a:ext>
+            </a:extLst>
+          </p:cNvPr>
+          <p:cNvSpPr/>
+          <p:nvPr/>
+        </p:nvSpPr>
+        <p:spPr>
+          <a:xfrm rot="16046947">
+            <a:off x="6642759" y="3346717"/>
+            <a:ext cx="369334" cy="1447851"/>
+          </a:xfrm>
+          <a:prstGeom prst="rightBrace">
+            <a:avLst>
+              <a:gd name="adj1" fmla="val 41330"/>
+              <a:gd name="adj2" fmla="val 50000"/>
+            </a:avLst>
+          </a:prstGeom>
+        </p:spPr>
+        <p:style>
+          <a:lnRef idx="2">
+            <a:schemeClr val="accent1"/>
+          </a:lnRef>
+          <a:fillRef idx="0">
+            <a:schemeClr val="accent1"/>
+          </a:fillRef>
+          <a:effectRef idx="1">
+            <a:schemeClr val="accent1"/>
+          </a:effectRef>
+          <a:fontRef idx="minor">
+            <a:schemeClr val="tx1"/>
+          </a:fontRef>
+        </p:style>
+        <p:txBody>
+          <a:bodyPr rtlCol="0" anchor="ctr"/>
+          <a:lstStyle/>
+          <a:p>
+            <a:pPr algn="ctr"/>
+            <a:endParaRPr lang="en-US"/>
+          </a:p>
+        </p:txBody>
+      </p:sp>
+      <p:sp>
+        <p:nvSpPr>
+          <p:cNvPr id="40" name="TextBox 39">
+            <a:extLst>
+              <a:ext uri="{FF2B5EF4-FFF2-40B4-BE49-F238E27FC236}">
+                <a16:creationId xmlns:a16="http://schemas.microsoft.com/office/drawing/2014/main" id="{93B6DD0C-B41C-4117-C5AB-7A5B503E6342}"/>
+              </a:ext>
+            </a:extLst>
+          </p:cNvPr>
+          <p:cNvSpPr txBox="1"/>
+          <p:nvPr/>
+        </p:nvSpPr>
+        <p:spPr>
+          <a:xfrm>
+            <a:off x="5721837" y="3033328"/>
+            <a:ext cx="1793504" cy="369332"/>
+          </a:xfrm>
+          <a:prstGeom prst="rect">
+            <a:avLst/>
+          </a:prstGeom>
+          <a:noFill/>
+        </p:spPr>
+        <p:txBody>
+          <a:bodyPr wrap="none" rtlCol="0">
+            <a:spAutoFit/>
+          </a:bodyPr>
+          <a:lstStyle/>
+          <a:p>
+            <a:r>
+              <a:rPr lang="en-US" dirty="0"/>
+              <a:t>Dual Processing</a:t>
+            </a:r>
+          </a:p>
+        </p:txBody>
+      </p:sp>
+      <p:sp>
+        <p:nvSpPr>
+          <p:cNvPr id="41" name="TextBox 40">
+            <a:extLst>
+              <a:ext uri="{FF2B5EF4-FFF2-40B4-BE49-F238E27FC236}">
+                <a16:creationId xmlns:a16="http://schemas.microsoft.com/office/drawing/2014/main" id="{037DF92E-23EA-73AB-D27C-53869354BEC5}"/>
+              </a:ext>
+            </a:extLst>
+          </p:cNvPr>
+          <p:cNvSpPr txBox="1"/>
+          <p:nvPr/>
+        </p:nvSpPr>
+        <p:spPr>
+          <a:xfrm>
+            <a:off x="203457" y="128587"/>
+            <a:ext cx="1675459" cy="369332"/>
+          </a:xfrm>
+          <a:prstGeom prst="rect">
+            <a:avLst/>
+          </a:prstGeom>
+          <a:noFill/>
+        </p:spPr>
+        <p:txBody>
+          <a:bodyPr wrap="none" rtlCol="0">
+            <a:spAutoFit/>
+          </a:bodyPr>
+          <a:lstStyle/>
+          <a:p>
+            <a:r>
+              <a:rPr lang="en-US" altLang="zh-CN" dirty="0"/>
+              <a:t>260606</a:t>
+            </a:r>
+            <a:r>
+              <a:rPr lang="zh-CN" altLang="en-US" dirty="0"/>
+              <a:t> </a:t>
+            </a:r>
+            <a:r>
+              <a:rPr lang="en-US" altLang="zh-CN" dirty="0"/>
+              <a:t>exactly</a:t>
+            </a:r>
+            <a:endParaRPr lang="en-US" dirty="0"/>
+          </a:p>
+        </p:txBody>
+      </p:sp>
+    </p:spTree>
+    <p:extLst>
+      <p:ext uri="{BB962C8B-B14F-4D97-AF65-F5344CB8AC3E}">
+        <p14:creationId xmlns:p14="http://schemas.microsoft.com/office/powerpoint/2010/main" val="4018480069"/>
+      </p:ext>
+    </p:extLst>
+  </p:cSld>
+  <p:clrMapOvr>
+    <a:masterClrMapping/>
+  </p:clrMapOvr>
+</p:sld>
+</file>
+
+<file path=ppt/slides/slide6.xml><?xml version="1.0" encoding="utf-8"?>
 <p:sld xmlns:a="http://schemas.openxmlformats.org/drawingml/2006/main" xmlns:r="http://schemas.openxmlformats.org/officeDocument/2006/relationships" xmlns:p="http://schemas.openxmlformats.org/presentationml/2006/main">
   <p:cSld>
     <p:spTree>
@@ -19240,7 +23351,7 @@
 </p:sld>
 </file>
 
-<file path=ppt/slides/slide5.xml><?xml version="1.0" encoding="utf-8"?>
+<file path=ppt/slides/slide7.xml><?xml version="1.0" encoding="utf-8"?>
 <p:sld xmlns:a="http://schemas.openxmlformats.org/drawingml/2006/main" xmlns:r="http://schemas.openxmlformats.org/officeDocument/2006/relationships" xmlns:p="http://schemas.openxmlformats.org/presentationml/2006/main">
   <p:cSld>
     <p:spTree>
@@ -20185,7 +24296,7 @@
 </p:sld>
 </file>
 
-<file path=ppt/slides/slide6.xml><?xml version="1.0" encoding="utf-8"?>
+<file path=ppt/slides/slide8.xml><?xml version="1.0" encoding="utf-8"?>
 <p:sld xmlns:a="http://schemas.openxmlformats.org/drawingml/2006/main" xmlns:r="http://schemas.openxmlformats.org/officeDocument/2006/relationships" xmlns:p="http://schemas.openxmlformats.org/presentationml/2006/main">
   <p:cSld>
     <p:spTree>
@@ -20686,7 +24797,7 @@
 </p:sld>
 </file>
 
-<file path=ppt/slides/slide7.xml><?xml version="1.0" encoding="utf-8"?>
+<file path=ppt/slides/slide9.xml><?xml version="1.0" encoding="utf-8"?>
 <p:sld xmlns:a="http://schemas.openxmlformats.org/drawingml/2006/main" xmlns:r="http://schemas.openxmlformats.org/officeDocument/2006/relationships" xmlns:p="http://schemas.openxmlformats.org/presentationml/2006/main">
   <p:cSld>
     <p:spTree>
@@ -21612,1922 +25723,6 @@
     <p:extLst>
       <p:ext uri="{BB962C8B-B14F-4D97-AF65-F5344CB8AC3E}">
         <p14:creationId xmlns:p14="http://schemas.microsoft.com/office/powerpoint/2010/main" val="3748024202"/>
-      </p:ext>
-    </p:extLst>
-  </p:cSld>
-  <p:clrMapOvr>
-    <a:masterClrMapping/>
-  </p:clrMapOvr>
-</p:sld>
-</file>
-
-<file path=ppt/slides/slide8.xml><?xml version="1.0" encoding="utf-8"?>
-<p:sld xmlns:a="http://schemas.openxmlformats.org/drawingml/2006/main" xmlns:r="http://schemas.openxmlformats.org/officeDocument/2006/relationships" xmlns:p="http://schemas.openxmlformats.org/presentationml/2006/main">
-  <p:cSld>
-    <p:spTree>
-      <p:nvGrpSpPr>
-        <p:cNvPr id="1" name="">
-          <a:extLst>
-            <a:ext uri="{FF2B5EF4-FFF2-40B4-BE49-F238E27FC236}">
-              <a16:creationId xmlns:a16="http://schemas.microsoft.com/office/drawing/2014/main" id="{1EA410EF-9DB5-850A-3184-A2689F6C608E}"/>
-            </a:ext>
-          </a:extLst>
-        </p:cNvPr>
-        <p:cNvGrpSpPr/>
-        <p:nvPr/>
-      </p:nvGrpSpPr>
-      <p:grpSpPr>
-        <a:xfrm>
-          <a:off x="0" y="0"/>
-          <a:ext cx="0" cy="0"/>
-          <a:chOff x="0" y="0"/>
-          <a:chExt cx="0" cy="0"/>
-        </a:xfrm>
-      </p:grpSpPr>
-      <p:sp>
-        <p:nvSpPr>
-          <p:cNvPr id="4" name="Rectangle 3">
-            <a:extLst>
-              <a:ext uri="{FF2B5EF4-FFF2-40B4-BE49-F238E27FC236}">
-                <a16:creationId xmlns:a16="http://schemas.microsoft.com/office/drawing/2014/main" id="{B73C661D-0D37-FA83-8DE1-42B17C54C890}"/>
-              </a:ext>
-            </a:extLst>
-          </p:cNvPr>
-          <p:cNvSpPr/>
-          <p:nvPr/>
-        </p:nvSpPr>
-        <p:spPr>
-          <a:xfrm>
-            <a:off x="4132897" y="3705838"/>
-            <a:ext cx="1828800" cy="640080"/>
-          </a:xfrm>
-          <a:prstGeom prst="rect">
-            <a:avLst/>
-          </a:prstGeom>
-          <a:ln>
-            <a:prstDash val="dash"/>
-          </a:ln>
-        </p:spPr>
-        <p:style>
-          <a:lnRef idx="2">
-            <a:schemeClr val="accent1"/>
-          </a:lnRef>
-          <a:fillRef idx="1">
-            <a:schemeClr val="lt1"/>
-          </a:fillRef>
-          <a:effectRef idx="0">
-            <a:schemeClr val="accent1"/>
-          </a:effectRef>
-          <a:fontRef idx="minor">
-            <a:schemeClr val="dk1"/>
-          </a:fontRef>
-        </p:style>
-        <p:txBody>
-          <a:bodyPr rtlCol="0" anchor="ctr"/>
-          <a:lstStyle/>
-          <a:p>
-            <a:pPr algn="ctr"/>
-            <a:r>
-              <a:rPr lang="en-US" dirty="0"/>
-              <a:t>In-depth Quality Assessment</a:t>
-            </a:r>
-          </a:p>
-        </p:txBody>
-      </p:sp>
-      <p:sp>
-        <p:nvSpPr>
-          <p:cNvPr id="5" name="Rectangle 4">
-            <a:extLst>
-              <a:ext uri="{FF2B5EF4-FFF2-40B4-BE49-F238E27FC236}">
-                <a16:creationId xmlns:a16="http://schemas.microsoft.com/office/drawing/2014/main" id="{A5BA183F-573C-6DD3-DC81-D87CD9C0C109}"/>
-              </a:ext>
-            </a:extLst>
-          </p:cNvPr>
-          <p:cNvSpPr/>
-          <p:nvPr/>
-        </p:nvSpPr>
-        <p:spPr>
-          <a:xfrm>
-            <a:off x="6096000" y="1777127"/>
-            <a:ext cx="1463040" cy="640080"/>
-          </a:xfrm>
-          <a:prstGeom prst="rect">
-            <a:avLst/>
-          </a:prstGeom>
-        </p:spPr>
-        <p:style>
-          <a:lnRef idx="2">
-            <a:schemeClr val="accent1"/>
-          </a:lnRef>
-          <a:fillRef idx="1">
-            <a:schemeClr val="lt1"/>
-          </a:fillRef>
-          <a:effectRef idx="0">
-            <a:schemeClr val="accent1"/>
-          </a:effectRef>
-          <a:fontRef idx="minor">
-            <a:schemeClr val="dk1"/>
-          </a:fontRef>
-        </p:style>
-        <p:txBody>
-          <a:bodyPr rtlCol="0" anchor="ctr"/>
-          <a:lstStyle/>
-          <a:p>
-            <a:pPr algn="ctr"/>
-            <a:r>
-              <a:rPr lang="en-US" dirty="0"/>
-              <a:t>AI label</a:t>
-            </a:r>
-          </a:p>
-        </p:txBody>
-      </p:sp>
-      <p:cxnSp>
-        <p:nvCxnSpPr>
-          <p:cNvPr id="7" name="Straight Arrow Connector 6">
-            <a:extLst>
-              <a:ext uri="{FF2B5EF4-FFF2-40B4-BE49-F238E27FC236}">
-                <a16:creationId xmlns:a16="http://schemas.microsoft.com/office/drawing/2014/main" id="{4BB26CBB-C2F9-6299-E7FD-CBDE498D645C}"/>
-              </a:ext>
-            </a:extLst>
-          </p:cNvPr>
-          <p:cNvCxnSpPr>
-            <a:cxnSpLocks/>
-            <a:stCxn id="8" idx="3"/>
-            <a:endCxn id="66" idx="1"/>
-          </p:cNvCxnSpPr>
-          <p:nvPr/>
-        </p:nvCxnSpPr>
-        <p:spPr>
-          <a:xfrm flipV="1">
-            <a:off x="3235885" y="3051284"/>
-            <a:ext cx="897012" cy="451716"/>
-          </a:xfrm>
-          <a:prstGeom prst="straightConnector1">
-            <a:avLst/>
-          </a:prstGeom>
-          <a:ln>
-            <a:tailEnd type="triangle"/>
-          </a:ln>
-        </p:spPr>
-        <p:style>
-          <a:lnRef idx="2">
-            <a:schemeClr val="accent1"/>
-          </a:lnRef>
-          <a:fillRef idx="0">
-            <a:schemeClr val="accent1"/>
-          </a:fillRef>
-          <a:effectRef idx="1">
-            <a:schemeClr val="accent1"/>
-          </a:effectRef>
-          <a:fontRef idx="minor">
-            <a:schemeClr val="tx1"/>
-          </a:fontRef>
-        </p:style>
-      </p:cxnSp>
-      <p:sp>
-        <p:nvSpPr>
-          <p:cNvPr id="8" name="Rectangle 7">
-            <a:extLst>
-              <a:ext uri="{FF2B5EF4-FFF2-40B4-BE49-F238E27FC236}">
-                <a16:creationId xmlns:a16="http://schemas.microsoft.com/office/drawing/2014/main" id="{B7319951-2C01-BE9C-7DCF-A8BA049DE7EB}"/>
-              </a:ext>
-            </a:extLst>
-          </p:cNvPr>
-          <p:cNvSpPr/>
-          <p:nvPr/>
-        </p:nvSpPr>
-        <p:spPr>
-          <a:xfrm>
-            <a:off x="1772845" y="3182960"/>
-            <a:ext cx="1463040" cy="640080"/>
-          </a:xfrm>
-          <a:prstGeom prst="rect">
-            <a:avLst/>
-          </a:prstGeom>
-        </p:spPr>
-        <p:style>
-          <a:lnRef idx="2">
-            <a:schemeClr val="accent1"/>
-          </a:lnRef>
-          <a:fillRef idx="1">
-            <a:schemeClr val="lt1"/>
-          </a:fillRef>
-          <a:effectRef idx="0">
-            <a:schemeClr val="accent1"/>
-          </a:effectRef>
-          <a:fontRef idx="minor">
-            <a:schemeClr val="dk1"/>
-          </a:fontRef>
-        </p:style>
-        <p:txBody>
-          <a:bodyPr rtlCol="0" anchor="ctr"/>
-          <a:lstStyle/>
-          <a:p>
-            <a:pPr algn="ctr"/>
-            <a:r>
-              <a:rPr lang="en-US" dirty="0"/>
-              <a:t>(AI) Content</a:t>
-            </a:r>
-          </a:p>
-        </p:txBody>
-      </p:sp>
-      <p:cxnSp>
-        <p:nvCxnSpPr>
-          <p:cNvPr id="22" name="Straight Arrow Connector 21">
-            <a:extLst>
-              <a:ext uri="{FF2B5EF4-FFF2-40B4-BE49-F238E27FC236}">
-                <a16:creationId xmlns:a16="http://schemas.microsoft.com/office/drawing/2014/main" id="{DB89A151-0238-DDCE-A2E9-DF8BD9E336EB}"/>
-              </a:ext>
-            </a:extLst>
-          </p:cNvPr>
-          <p:cNvCxnSpPr>
-            <a:cxnSpLocks/>
-            <a:stCxn id="5" idx="2"/>
-          </p:cNvCxnSpPr>
-          <p:nvPr/>
-        </p:nvCxnSpPr>
-        <p:spPr>
-          <a:xfrm>
-            <a:off x="6827520" y="2417207"/>
-            <a:ext cx="221091" cy="605661"/>
-          </a:xfrm>
-          <a:prstGeom prst="straightConnector1">
-            <a:avLst/>
-          </a:prstGeom>
-          <a:ln>
-            <a:tailEnd type="triangle"/>
-          </a:ln>
-        </p:spPr>
-        <p:style>
-          <a:lnRef idx="2">
-            <a:schemeClr val="accent1"/>
-          </a:lnRef>
-          <a:fillRef idx="0">
-            <a:schemeClr val="accent1"/>
-          </a:fillRef>
-          <a:effectRef idx="1">
-            <a:schemeClr val="accent1"/>
-          </a:effectRef>
-          <a:fontRef idx="minor">
-            <a:schemeClr val="tx1"/>
-          </a:fontRef>
-        </p:style>
-      </p:cxnSp>
-      <p:cxnSp>
-        <p:nvCxnSpPr>
-          <p:cNvPr id="38" name="Straight Arrow Connector 37">
-            <a:extLst>
-              <a:ext uri="{FF2B5EF4-FFF2-40B4-BE49-F238E27FC236}">
-                <a16:creationId xmlns:a16="http://schemas.microsoft.com/office/drawing/2014/main" id="{1BEB447F-5AF7-AE25-96DB-D8149D924F59}"/>
-              </a:ext>
-            </a:extLst>
-          </p:cNvPr>
-          <p:cNvCxnSpPr>
-            <a:cxnSpLocks/>
-            <a:stCxn id="8" idx="3"/>
-            <a:endCxn id="4" idx="1"/>
-          </p:cNvCxnSpPr>
-          <p:nvPr/>
-        </p:nvCxnSpPr>
-        <p:spPr>
-          <a:xfrm>
-            <a:off x="3235885" y="3503000"/>
-            <a:ext cx="897012" cy="522878"/>
-          </a:xfrm>
-          <a:prstGeom prst="straightConnector1">
-            <a:avLst/>
-          </a:prstGeom>
-          <a:ln>
-            <a:tailEnd type="triangle"/>
-          </a:ln>
-        </p:spPr>
-        <p:style>
-          <a:lnRef idx="2">
-            <a:schemeClr val="accent1"/>
-          </a:lnRef>
-          <a:fillRef idx="0">
-            <a:schemeClr val="accent1"/>
-          </a:fillRef>
-          <a:effectRef idx="1">
-            <a:schemeClr val="accent1"/>
-          </a:effectRef>
-          <a:fontRef idx="minor">
-            <a:schemeClr val="tx1"/>
-          </a:fontRef>
-        </p:style>
-      </p:cxnSp>
-      <p:sp>
-        <p:nvSpPr>
-          <p:cNvPr id="13" name="Rectangle 12">
-            <a:extLst>
-              <a:ext uri="{FF2B5EF4-FFF2-40B4-BE49-F238E27FC236}">
-                <a16:creationId xmlns:a16="http://schemas.microsoft.com/office/drawing/2014/main" id="{50FCAEF6-AFCE-EC54-4F41-5425ACB2692E}"/>
-              </a:ext>
-            </a:extLst>
-          </p:cNvPr>
-          <p:cNvSpPr/>
-          <p:nvPr/>
-        </p:nvSpPr>
-        <p:spPr>
-          <a:xfrm>
-            <a:off x="8099455" y="2731244"/>
-            <a:ext cx="1463040" cy="640080"/>
-          </a:xfrm>
-          <a:prstGeom prst="rect">
-            <a:avLst/>
-          </a:prstGeom>
-        </p:spPr>
-        <p:style>
-          <a:lnRef idx="2">
-            <a:schemeClr val="accent1"/>
-          </a:lnRef>
-          <a:fillRef idx="1">
-            <a:schemeClr val="lt1"/>
-          </a:fillRef>
-          <a:effectRef idx="0">
-            <a:schemeClr val="accent1"/>
-          </a:effectRef>
-          <a:fontRef idx="minor">
-            <a:schemeClr val="dk1"/>
-          </a:fontRef>
-        </p:style>
-        <p:txBody>
-          <a:bodyPr rtlCol="0" anchor="ctr"/>
-          <a:lstStyle/>
-          <a:p>
-            <a:pPr algn="ctr"/>
-            <a:r>
-              <a:rPr lang="en-US" dirty="0"/>
-              <a:t>Human Contribution</a:t>
-            </a:r>
-          </a:p>
-        </p:txBody>
-      </p:sp>
-      <p:sp>
-        <p:nvSpPr>
-          <p:cNvPr id="66" name="Rectangle 65">
-            <a:extLst>
-              <a:ext uri="{FF2B5EF4-FFF2-40B4-BE49-F238E27FC236}">
-                <a16:creationId xmlns:a16="http://schemas.microsoft.com/office/drawing/2014/main" id="{96E4DC5F-5706-4409-8AED-4125DB42B70A}"/>
-              </a:ext>
-            </a:extLst>
-          </p:cNvPr>
-          <p:cNvSpPr/>
-          <p:nvPr/>
-        </p:nvSpPr>
-        <p:spPr>
-          <a:xfrm>
-            <a:off x="4132897" y="2731244"/>
-            <a:ext cx="1828800" cy="640080"/>
-          </a:xfrm>
-          <a:prstGeom prst="rect">
-            <a:avLst/>
-          </a:prstGeom>
-          <a:ln>
-            <a:prstDash val="dash"/>
-          </a:ln>
-        </p:spPr>
-        <p:style>
-          <a:lnRef idx="2">
-            <a:schemeClr val="accent1"/>
-          </a:lnRef>
-          <a:fillRef idx="1">
-            <a:schemeClr val="lt1"/>
-          </a:fillRef>
-          <a:effectRef idx="0">
-            <a:schemeClr val="accent1"/>
-          </a:effectRef>
-          <a:fontRef idx="minor">
-            <a:schemeClr val="dk1"/>
-          </a:fontRef>
-        </p:style>
-        <p:txBody>
-          <a:bodyPr rtlCol="0" anchor="ctr"/>
-          <a:lstStyle/>
-          <a:p>
-            <a:pPr algn="ctr"/>
-            <a:r>
-              <a:rPr lang="en-US" dirty="0"/>
-              <a:t>Shallow Quality Signal</a:t>
-            </a:r>
-          </a:p>
-        </p:txBody>
-      </p:sp>
-      <p:cxnSp>
-        <p:nvCxnSpPr>
-          <p:cNvPr id="25" name="Straight Arrow Connector 24">
-            <a:extLst>
-              <a:ext uri="{FF2B5EF4-FFF2-40B4-BE49-F238E27FC236}">
-                <a16:creationId xmlns:a16="http://schemas.microsoft.com/office/drawing/2014/main" id="{FC0FBB81-F261-8A64-A8D1-F23157274401}"/>
-              </a:ext>
-            </a:extLst>
-          </p:cNvPr>
-          <p:cNvCxnSpPr>
-            <a:cxnSpLocks/>
-            <a:stCxn id="66" idx="3"/>
-            <a:endCxn id="13" idx="1"/>
-          </p:cNvCxnSpPr>
-          <p:nvPr/>
-        </p:nvCxnSpPr>
-        <p:spPr>
-          <a:xfrm>
-            <a:off x="5961697" y="3051284"/>
-            <a:ext cx="2137758" cy="0"/>
-          </a:xfrm>
-          <a:prstGeom prst="straightConnector1">
-            <a:avLst/>
-          </a:prstGeom>
-          <a:ln>
-            <a:tailEnd type="triangle"/>
-          </a:ln>
-        </p:spPr>
-        <p:style>
-          <a:lnRef idx="2">
-            <a:schemeClr val="accent1"/>
-          </a:lnRef>
-          <a:fillRef idx="0">
-            <a:schemeClr val="accent1"/>
-          </a:fillRef>
-          <a:effectRef idx="1">
-            <a:schemeClr val="accent1"/>
-          </a:effectRef>
-          <a:fontRef idx="minor">
-            <a:schemeClr val="tx1"/>
-          </a:fontRef>
-        </p:style>
-      </p:cxnSp>
-      <p:cxnSp>
-        <p:nvCxnSpPr>
-          <p:cNvPr id="30" name="Straight Arrow Connector 29">
-            <a:extLst>
-              <a:ext uri="{FF2B5EF4-FFF2-40B4-BE49-F238E27FC236}">
-                <a16:creationId xmlns:a16="http://schemas.microsoft.com/office/drawing/2014/main" id="{F78395F3-A01C-DB5F-1FC9-D0B3A0711291}"/>
-              </a:ext>
-            </a:extLst>
-          </p:cNvPr>
-          <p:cNvCxnSpPr>
-            <a:cxnSpLocks/>
-            <a:stCxn id="4" idx="3"/>
-            <a:endCxn id="2" idx="1"/>
-          </p:cNvCxnSpPr>
-          <p:nvPr/>
-        </p:nvCxnSpPr>
-        <p:spPr>
-          <a:xfrm>
-            <a:off x="5961697" y="4025878"/>
-            <a:ext cx="4190508" cy="0"/>
-          </a:xfrm>
-          <a:prstGeom prst="straightConnector1">
-            <a:avLst/>
-          </a:prstGeom>
-          <a:ln>
-            <a:tailEnd type="triangle"/>
-          </a:ln>
-        </p:spPr>
-        <p:style>
-          <a:lnRef idx="2">
-            <a:schemeClr val="accent1"/>
-          </a:lnRef>
-          <a:fillRef idx="0">
-            <a:schemeClr val="accent1"/>
-          </a:fillRef>
-          <a:effectRef idx="1">
-            <a:schemeClr val="accent1"/>
-          </a:effectRef>
-          <a:fontRef idx="minor">
-            <a:schemeClr val="tx1"/>
-          </a:fontRef>
-        </p:style>
-      </p:cxnSp>
-      <p:cxnSp>
-        <p:nvCxnSpPr>
-          <p:cNvPr id="34" name="Straight Arrow Connector 33">
-            <a:extLst>
-              <a:ext uri="{FF2B5EF4-FFF2-40B4-BE49-F238E27FC236}">
-                <a16:creationId xmlns:a16="http://schemas.microsoft.com/office/drawing/2014/main" id="{8CC37E2D-2599-3C52-4387-5757C48330D9}"/>
-              </a:ext>
-            </a:extLst>
-          </p:cNvPr>
-          <p:cNvCxnSpPr>
-            <a:cxnSpLocks/>
-          </p:cNvCxnSpPr>
-          <p:nvPr/>
-        </p:nvCxnSpPr>
-        <p:spPr>
-          <a:xfrm flipH="1">
-            <a:off x="6403315" y="2414205"/>
-            <a:ext cx="424205" cy="1610318"/>
-          </a:xfrm>
-          <a:prstGeom prst="straightConnector1">
-            <a:avLst/>
-          </a:prstGeom>
-          <a:ln>
-            <a:tailEnd type="triangle"/>
-          </a:ln>
-        </p:spPr>
-        <p:style>
-          <a:lnRef idx="2">
-            <a:schemeClr val="accent1"/>
-          </a:lnRef>
-          <a:fillRef idx="0">
-            <a:schemeClr val="accent1"/>
-          </a:fillRef>
-          <a:effectRef idx="1">
-            <a:schemeClr val="accent1"/>
-          </a:effectRef>
-          <a:fontRef idx="minor">
-            <a:schemeClr val="tx1"/>
-          </a:fontRef>
-        </p:style>
-      </p:cxnSp>
-      <p:sp>
-        <p:nvSpPr>
-          <p:cNvPr id="43" name="TextBox 42">
-            <a:extLst>
-              <a:ext uri="{FF2B5EF4-FFF2-40B4-BE49-F238E27FC236}">
-                <a16:creationId xmlns:a16="http://schemas.microsoft.com/office/drawing/2014/main" id="{2F5BC5DC-8D4C-9BD9-4AC6-BFF1778DBCB4}"/>
-              </a:ext>
-            </a:extLst>
-          </p:cNvPr>
-          <p:cNvSpPr txBox="1"/>
-          <p:nvPr/>
-        </p:nvSpPr>
-        <p:spPr>
-          <a:xfrm>
-            <a:off x="7333890" y="2750366"/>
-            <a:ext cx="263214" cy="369332"/>
-          </a:xfrm>
-          <a:prstGeom prst="rect">
-            <a:avLst/>
-          </a:prstGeom>
-          <a:noFill/>
-        </p:spPr>
-        <p:txBody>
-          <a:bodyPr wrap="none" rtlCol="0">
-            <a:spAutoFit/>
-          </a:bodyPr>
-          <a:lstStyle/>
-          <a:p>
-            <a:r>
-              <a:rPr lang="en-US" dirty="0"/>
-              <a:t>-</a:t>
-            </a:r>
-          </a:p>
-        </p:txBody>
-      </p:sp>
-      <p:sp>
-        <p:nvSpPr>
-          <p:cNvPr id="44" name="TextBox 43">
-            <a:extLst>
-              <a:ext uri="{FF2B5EF4-FFF2-40B4-BE49-F238E27FC236}">
-                <a16:creationId xmlns:a16="http://schemas.microsoft.com/office/drawing/2014/main" id="{7C6AD81A-5ADF-613A-61C5-1C9B94B60043}"/>
-              </a:ext>
-            </a:extLst>
-          </p:cNvPr>
-          <p:cNvSpPr txBox="1"/>
-          <p:nvPr/>
-        </p:nvSpPr>
-        <p:spPr>
-          <a:xfrm>
-            <a:off x="6788202" y="2417207"/>
-            <a:ext cx="308098" cy="369332"/>
-          </a:xfrm>
-          <a:prstGeom prst="rect">
-            <a:avLst/>
-          </a:prstGeom>
-          <a:noFill/>
-        </p:spPr>
-        <p:txBody>
-          <a:bodyPr wrap="none" rtlCol="0">
-            <a:spAutoFit/>
-          </a:bodyPr>
-          <a:lstStyle/>
-          <a:p>
-            <a:r>
-              <a:rPr lang="en-US" dirty="0"/>
-              <a:t>+</a:t>
-            </a:r>
-          </a:p>
-        </p:txBody>
-      </p:sp>
-      <p:sp>
-        <p:nvSpPr>
-          <p:cNvPr id="45" name="TextBox 44">
-            <a:extLst>
-              <a:ext uri="{FF2B5EF4-FFF2-40B4-BE49-F238E27FC236}">
-                <a16:creationId xmlns:a16="http://schemas.microsoft.com/office/drawing/2014/main" id="{D39691A6-0E75-B6B8-85B7-0DC05A3A4559}"/>
-              </a:ext>
-            </a:extLst>
-          </p:cNvPr>
-          <p:cNvSpPr txBox="1"/>
-          <p:nvPr/>
-        </p:nvSpPr>
-        <p:spPr>
-          <a:xfrm>
-            <a:off x="7350912" y="3705838"/>
-            <a:ext cx="308098" cy="369332"/>
-          </a:xfrm>
-          <a:prstGeom prst="rect">
-            <a:avLst/>
-          </a:prstGeom>
-          <a:noFill/>
-        </p:spPr>
-        <p:txBody>
-          <a:bodyPr wrap="none" rtlCol="0">
-            <a:spAutoFit/>
-          </a:bodyPr>
-          <a:lstStyle/>
-          <a:p>
-            <a:r>
-              <a:rPr lang="en-US" dirty="0"/>
-              <a:t>+</a:t>
-            </a:r>
-          </a:p>
-        </p:txBody>
-      </p:sp>
-      <p:cxnSp>
-        <p:nvCxnSpPr>
-          <p:cNvPr id="46" name="Straight Arrow Connector 45">
-            <a:extLst>
-              <a:ext uri="{FF2B5EF4-FFF2-40B4-BE49-F238E27FC236}">
-                <a16:creationId xmlns:a16="http://schemas.microsoft.com/office/drawing/2014/main" id="{9D4DFDD5-3D2B-7068-5BD0-E900ECAC71DE}"/>
-              </a:ext>
-            </a:extLst>
-          </p:cNvPr>
-          <p:cNvCxnSpPr>
-            <a:cxnSpLocks/>
-            <a:stCxn id="5" idx="3"/>
-            <a:endCxn id="13" idx="0"/>
-          </p:cNvCxnSpPr>
-          <p:nvPr/>
-        </p:nvCxnSpPr>
-        <p:spPr>
-          <a:xfrm>
-            <a:off x="7559040" y="2097167"/>
-            <a:ext cx="1271935" cy="634077"/>
-          </a:xfrm>
-          <a:prstGeom prst="straightConnector1">
-            <a:avLst/>
-          </a:prstGeom>
-          <a:ln>
-            <a:tailEnd type="triangle"/>
-          </a:ln>
-        </p:spPr>
-        <p:style>
-          <a:lnRef idx="2">
-            <a:schemeClr val="accent1"/>
-          </a:lnRef>
-          <a:fillRef idx="0">
-            <a:schemeClr val="accent1"/>
-          </a:fillRef>
-          <a:effectRef idx="1">
-            <a:schemeClr val="accent1"/>
-          </a:effectRef>
-          <a:fontRef idx="minor">
-            <a:schemeClr val="tx1"/>
-          </a:fontRef>
-        </p:style>
-      </p:cxnSp>
-      <p:sp>
-        <p:nvSpPr>
-          <p:cNvPr id="65" name="TextBox 64">
-            <a:extLst>
-              <a:ext uri="{FF2B5EF4-FFF2-40B4-BE49-F238E27FC236}">
-                <a16:creationId xmlns:a16="http://schemas.microsoft.com/office/drawing/2014/main" id="{7FC3BB4D-33AA-A0CB-67CB-83A12EB1B298}"/>
-              </a:ext>
-            </a:extLst>
-          </p:cNvPr>
-          <p:cNvSpPr txBox="1"/>
-          <p:nvPr/>
-        </p:nvSpPr>
-        <p:spPr>
-          <a:xfrm>
-            <a:off x="6575613" y="3033011"/>
-            <a:ext cx="1350563" cy="369332"/>
-          </a:xfrm>
-          <a:prstGeom prst="rect">
-            <a:avLst/>
-          </a:prstGeom>
-          <a:noFill/>
-        </p:spPr>
-        <p:txBody>
-          <a:bodyPr wrap="none" rtlCol="0">
-            <a:spAutoFit/>
-          </a:bodyPr>
-          <a:lstStyle/>
-          <a:p>
-            <a:r>
-              <a:rPr lang="en-US" dirty="0"/>
-              <a:t>Deterrence </a:t>
-            </a:r>
-          </a:p>
-        </p:txBody>
-      </p:sp>
-      <p:sp>
-        <p:nvSpPr>
-          <p:cNvPr id="67" name="TextBox 66">
-            <a:extLst>
-              <a:ext uri="{FF2B5EF4-FFF2-40B4-BE49-F238E27FC236}">
-                <a16:creationId xmlns:a16="http://schemas.microsoft.com/office/drawing/2014/main" id="{8CD1B5B1-B4D6-6156-57EB-2EF3F8AFCFCD}"/>
-              </a:ext>
-            </a:extLst>
-          </p:cNvPr>
-          <p:cNvSpPr txBox="1"/>
-          <p:nvPr/>
-        </p:nvSpPr>
-        <p:spPr>
-          <a:xfrm>
-            <a:off x="7926176" y="2097167"/>
-            <a:ext cx="1809598" cy="369332"/>
-          </a:xfrm>
-          <a:prstGeom prst="rect">
-            <a:avLst/>
-          </a:prstGeom>
-          <a:noFill/>
-        </p:spPr>
-        <p:txBody>
-          <a:bodyPr wrap="none" rtlCol="0">
-            <a:spAutoFit/>
-          </a:bodyPr>
-          <a:lstStyle/>
-          <a:p>
-            <a:r>
-              <a:rPr lang="en-US" dirty="0"/>
-              <a:t>Encouragement </a:t>
-            </a:r>
-          </a:p>
-        </p:txBody>
-      </p:sp>
-      <p:sp>
-        <p:nvSpPr>
-          <p:cNvPr id="73" name="TextBox 72">
-            <a:extLst>
-              <a:ext uri="{FF2B5EF4-FFF2-40B4-BE49-F238E27FC236}">
-                <a16:creationId xmlns:a16="http://schemas.microsoft.com/office/drawing/2014/main" id="{6E1D2E12-9CCA-3B53-9427-614183B0B65B}"/>
-              </a:ext>
-            </a:extLst>
-          </p:cNvPr>
-          <p:cNvSpPr txBox="1"/>
-          <p:nvPr/>
-        </p:nvSpPr>
-        <p:spPr>
-          <a:xfrm>
-            <a:off x="6430003" y="3429000"/>
-            <a:ext cx="263214" cy="369332"/>
-          </a:xfrm>
-          <a:prstGeom prst="rect">
-            <a:avLst/>
-          </a:prstGeom>
-          <a:noFill/>
-        </p:spPr>
-        <p:txBody>
-          <a:bodyPr wrap="none" rtlCol="0">
-            <a:spAutoFit/>
-          </a:bodyPr>
-          <a:lstStyle/>
-          <a:p>
-            <a:r>
-              <a:rPr lang="en-US" dirty="0"/>
-              <a:t>-</a:t>
-            </a:r>
-          </a:p>
-        </p:txBody>
-      </p:sp>
-      <p:sp>
-        <p:nvSpPr>
-          <p:cNvPr id="76" name="TextBox 75">
-            <a:extLst>
-              <a:ext uri="{FF2B5EF4-FFF2-40B4-BE49-F238E27FC236}">
-                <a16:creationId xmlns:a16="http://schemas.microsoft.com/office/drawing/2014/main" id="{943CBD7C-79F5-4DE3-6240-C3DC8F8A2105}"/>
-              </a:ext>
-            </a:extLst>
-          </p:cNvPr>
-          <p:cNvSpPr txBox="1"/>
-          <p:nvPr/>
-        </p:nvSpPr>
-        <p:spPr>
-          <a:xfrm>
-            <a:off x="7503081" y="4024523"/>
-            <a:ext cx="1646156" cy="369332"/>
-          </a:xfrm>
-          <a:prstGeom prst="rect">
-            <a:avLst/>
-          </a:prstGeom>
-          <a:noFill/>
-        </p:spPr>
-        <p:txBody>
-          <a:bodyPr wrap="none" rtlCol="0">
-            <a:spAutoFit/>
-          </a:bodyPr>
-          <a:lstStyle/>
-          <a:p>
-            <a:r>
-              <a:rPr lang="en-US" dirty="0"/>
-              <a:t>Discrimination</a:t>
-            </a:r>
-          </a:p>
-        </p:txBody>
-      </p:sp>
-      <p:sp>
-        <p:nvSpPr>
-          <p:cNvPr id="2" name="Rectangle 1">
-            <a:extLst>
-              <a:ext uri="{FF2B5EF4-FFF2-40B4-BE49-F238E27FC236}">
-                <a16:creationId xmlns:a16="http://schemas.microsoft.com/office/drawing/2014/main" id="{B123746B-1DED-FDC8-A0B5-A6E56B8B3E37}"/>
-              </a:ext>
-            </a:extLst>
-          </p:cNvPr>
-          <p:cNvSpPr/>
-          <p:nvPr/>
-        </p:nvSpPr>
-        <p:spPr>
-          <a:xfrm>
-            <a:off x="10152205" y="3705838"/>
-            <a:ext cx="1463040" cy="640080"/>
-          </a:xfrm>
-          <a:prstGeom prst="rect">
-            <a:avLst/>
-          </a:prstGeom>
-        </p:spPr>
-        <p:style>
-          <a:lnRef idx="2">
-            <a:schemeClr val="accent1"/>
-          </a:lnRef>
-          <a:fillRef idx="1">
-            <a:schemeClr val="lt1"/>
-          </a:fillRef>
-          <a:effectRef idx="0">
-            <a:schemeClr val="accent1"/>
-          </a:effectRef>
-          <a:fontRef idx="minor">
-            <a:schemeClr val="dk1"/>
-          </a:fontRef>
-        </p:style>
-        <p:txBody>
-          <a:bodyPr rtlCol="0" anchor="ctr"/>
-          <a:lstStyle/>
-          <a:p>
-            <a:pPr algn="ctr"/>
-            <a:r>
-              <a:rPr lang="en-US" dirty="0"/>
-              <a:t>Human Innovation</a:t>
-            </a:r>
-          </a:p>
-        </p:txBody>
-      </p:sp>
-      <p:cxnSp>
-        <p:nvCxnSpPr>
-          <p:cNvPr id="12" name="Straight Arrow Connector 11">
-            <a:extLst>
-              <a:ext uri="{FF2B5EF4-FFF2-40B4-BE49-F238E27FC236}">
-                <a16:creationId xmlns:a16="http://schemas.microsoft.com/office/drawing/2014/main" id="{7240CAA7-F4AD-F878-553E-46089312A22B}"/>
-              </a:ext>
-            </a:extLst>
-          </p:cNvPr>
-          <p:cNvCxnSpPr>
-            <a:cxnSpLocks/>
-            <a:stCxn id="13" idx="2"/>
-            <a:endCxn id="2" idx="1"/>
-          </p:cNvCxnSpPr>
-          <p:nvPr/>
-        </p:nvCxnSpPr>
-        <p:spPr>
-          <a:xfrm>
-            <a:off x="8830975" y="3371324"/>
-            <a:ext cx="1321230" cy="654554"/>
-          </a:xfrm>
-          <a:prstGeom prst="straightConnector1">
-            <a:avLst/>
-          </a:prstGeom>
-          <a:ln>
-            <a:prstDash val="solid"/>
-            <a:tailEnd type="triangle"/>
-          </a:ln>
-        </p:spPr>
-        <p:style>
-          <a:lnRef idx="2">
-            <a:schemeClr val="accent1"/>
-          </a:lnRef>
-          <a:fillRef idx="0">
-            <a:schemeClr val="accent1"/>
-          </a:fillRef>
-          <a:effectRef idx="1">
-            <a:schemeClr val="accent1"/>
-          </a:effectRef>
-          <a:fontRef idx="minor">
-            <a:schemeClr val="tx1"/>
-          </a:fontRef>
-        </p:style>
-      </p:cxnSp>
-    </p:spTree>
-    <p:extLst>
-      <p:ext uri="{BB962C8B-B14F-4D97-AF65-F5344CB8AC3E}">
-        <p14:creationId xmlns:p14="http://schemas.microsoft.com/office/powerpoint/2010/main" val="1825311658"/>
-      </p:ext>
-    </p:extLst>
-  </p:cSld>
-  <p:clrMapOvr>
-    <a:masterClrMapping/>
-  </p:clrMapOvr>
-</p:sld>
-</file>
-
-<file path=ppt/slides/slide9.xml><?xml version="1.0" encoding="utf-8"?>
-<p:sld xmlns:a="http://schemas.openxmlformats.org/drawingml/2006/main" xmlns:r="http://schemas.openxmlformats.org/officeDocument/2006/relationships" xmlns:p="http://schemas.openxmlformats.org/presentationml/2006/main">
-  <p:cSld>
-    <p:spTree>
-      <p:nvGrpSpPr>
-        <p:cNvPr id="1" name="">
-          <a:extLst>
-            <a:ext uri="{FF2B5EF4-FFF2-40B4-BE49-F238E27FC236}">
-              <a16:creationId xmlns:a16="http://schemas.microsoft.com/office/drawing/2014/main" id="{4FF4F5AB-FDD0-408B-D9B6-B4D6349F2BCC}"/>
-            </a:ext>
-          </a:extLst>
-        </p:cNvPr>
-        <p:cNvGrpSpPr/>
-        <p:nvPr/>
-      </p:nvGrpSpPr>
-      <p:grpSpPr>
-        <a:xfrm>
-          <a:off x="0" y="0"/>
-          <a:ext cx="0" cy="0"/>
-          <a:chOff x="0" y="0"/>
-          <a:chExt cx="0" cy="0"/>
-        </a:xfrm>
-      </p:grpSpPr>
-      <p:sp>
-        <p:nvSpPr>
-          <p:cNvPr id="4" name="Rectangle 3">
-            <a:extLst>
-              <a:ext uri="{FF2B5EF4-FFF2-40B4-BE49-F238E27FC236}">
-                <a16:creationId xmlns:a16="http://schemas.microsoft.com/office/drawing/2014/main" id="{98DA0CA1-1051-AD70-9C89-5601D24048AE}"/>
-              </a:ext>
-            </a:extLst>
-          </p:cNvPr>
-          <p:cNvSpPr/>
-          <p:nvPr/>
-        </p:nvSpPr>
-        <p:spPr>
-          <a:xfrm>
-            <a:off x="4132897" y="3705838"/>
-            <a:ext cx="1828800" cy="640080"/>
-          </a:xfrm>
-          <a:prstGeom prst="rect">
-            <a:avLst/>
-          </a:prstGeom>
-          <a:ln>
-            <a:prstDash val="dash"/>
-          </a:ln>
-        </p:spPr>
-        <p:style>
-          <a:lnRef idx="2">
-            <a:schemeClr val="accent1"/>
-          </a:lnRef>
-          <a:fillRef idx="1">
-            <a:schemeClr val="lt1"/>
-          </a:fillRef>
-          <a:effectRef idx="0">
-            <a:schemeClr val="accent1"/>
-          </a:effectRef>
-          <a:fontRef idx="minor">
-            <a:schemeClr val="dk1"/>
-          </a:fontRef>
-        </p:style>
-        <p:txBody>
-          <a:bodyPr rtlCol="0" anchor="ctr"/>
-          <a:lstStyle/>
-          <a:p>
-            <a:pPr algn="ctr"/>
-            <a:r>
-              <a:rPr lang="en-US" dirty="0"/>
-              <a:t>In-depth Quality Assessment</a:t>
-            </a:r>
-          </a:p>
-        </p:txBody>
-      </p:sp>
-      <p:sp>
-        <p:nvSpPr>
-          <p:cNvPr id="5" name="Rectangle 4">
-            <a:extLst>
-              <a:ext uri="{FF2B5EF4-FFF2-40B4-BE49-F238E27FC236}">
-                <a16:creationId xmlns:a16="http://schemas.microsoft.com/office/drawing/2014/main" id="{DBF55F91-DB01-C3DB-A757-49F09A897175}"/>
-              </a:ext>
-            </a:extLst>
-          </p:cNvPr>
-          <p:cNvSpPr/>
-          <p:nvPr/>
-        </p:nvSpPr>
-        <p:spPr>
-          <a:xfrm>
-            <a:off x="6096000" y="1777127"/>
-            <a:ext cx="1463040" cy="640080"/>
-          </a:xfrm>
-          <a:prstGeom prst="rect">
-            <a:avLst/>
-          </a:prstGeom>
-        </p:spPr>
-        <p:style>
-          <a:lnRef idx="2">
-            <a:schemeClr val="accent1"/>
-          </a:lnRef>
-          <a:fillRef idx="1">
-            <a:schemeClr val="lt1"/>
-          </a:fillRef>
-          <a:effectRef idx="0">
-            <a:schemeClr val="accent1"/>
-          </a:effectRef>
-          <a:fontRef idx="minor">
-            <a:schemeClr val="dk1"/>
-          </a:fontRef>
-        </p:style>
-        <p:txBody>
-          <a:bodyPr rtlCol="0" anchor="ctr"/>
-          <a:lstStyle/>
-          <a:p>
-            <a:pPr algn="ctr"/>
-            <a:r>
-              <a:rPr lang="en-US" dirty="0"/>
-              <a:t>AI label</a:t>
-            </a:r>
-          </a:p>
-        </p:txBody>
-      </p:sp>
-      <p:cxnSp>
-        <p:nvCxnSpPr>
-          <p:cNvPr id="7" name="Straight Arrow Connector 6">
-            <a:extLst>
-              <a:ext uri="{FF2B5EF4-FFF2-40B4-BE49-F238E27FC236}">
-                <a16:creationId xmlns:a16="http://schemas.microsoft.com/office/drawing/2014/main" id="{BD75151D-F743-021D-A02F-1E6283756315}"/>
-              </a:ext>
-            </a:extLst>
-          </p:cNvPr>
-          <p:cNvCxnSpPr>
-            <a:cxnSpLocks/>
-            <a:stCxn id="8" idx="3"/>
-            <a:endCxn id="66" idx="1"/>
-          </p:cNvCxnSpPr>
-          <p:nvPr/>
-        </p:nvCxnSpPr>
-        <p:spPr>
-          <a:xfrm flipV="1">
-            <a:off x="3235885" y="3051284"/>
-            <a:ext cx="897012" cy="451716"/>
-          </a:xfrm>
-          <a:prstGeom prst="straightConnector1">
-            <a:avLst/>
-          </a:prstGeom>
-          <a:ln>
-            <a:tailEnd type="triangle"/>
-          </a:ln>
-        </p:spPr>
-        <p:style>
-          <a:lnRef idx="2">
-            <a:schemeClr val="accent1"/>
-          </a:lnRef>
-          <a:fillRef idx="0">
-            <a:schemeClr val="accent1"/>
-          </a:fillRef>
-          <a:effectRef idx="1">
-            <a:schemeClr val="accent1"/>
-          </a:effectRef>
-          <a:fontRef idx="minor">
-            <a:schemeClr val="tx1"/>
-          </a:fontRef>
-        </p:style>
-      </p:cxnSp>
-      <p:sp>
-        <p:nvSpPr>
-          <p:cNvPr id="8" name="Rectangle 7">
-            <a:extLst>
-              <a:ext uri="{FF2B5EF4-FFF2-40B4-BE49-F238E27FC236}">
-                <a16:creationId xmlns:a16="http://schemas.microsoft.com/office/drawing/2014/main" id="{A0891F2D-227E-1A20-5820-30DE259B56B5}"/>
-              </a:ext>
-            </a:extLst>
-          </p:cNvPr>
-          <p:cNvSpPr/>
-          <p:nvPr/>
-        </p:nvSpPr>
-        <p:spPr>
-          <a:xfrm>
-            <a:off x="1772845" y="3182960"/>
-            <a:ext cx="1463040" cy="640080"/>
-          </a:xfrm>
-          <a:prstGeom prst="rect">
-            <a:avLst/>
-          </a:prstGeom>
-        </p:spPr>
-        <p:style>
-          <a:lnRef idx="2">
-            <a:schemeClr val="accent1"/>
-          </a:lnRef>
-          <a:fillRef idx="1">
-            <a:schemeClr val="lt1"/>
-          </a:fillRef>
-          <a:effectRef idx="0">
-            <a:schemeClr val="accent1"/>
-          </a:effectRef>
-          <a:fontRef idx="minor">
-            <a:schemeClr val="dk1"/>
-          </a:fontRef>
-        </p:style>
-        <p:txBody>
-          <a:bodyPr rtlCol="0" anchor="ctr"/>
-          <a:lstStyle/>
-          <a:p>
-            <a:pPr algn="ctr"/>
-            <a:r>
-              <a:rPr lang="en-US" dirty="0"/>
-              <a:t>(AI) Content</a:t>
-            </a:r>
-          </a:p>
-        </p:txBody>
-      </p:sp>
-      <p:cxnSp>
-        <p:nvCxnSpPr>
-          <p:cNvPr id="22" name="Straight Arrow Connector 21">
-            <a:extLst>
-              <a:ext uri="{FF2B5EF4-FFF2-40B4-BE49-F238E27FC236}">
-                <a16:creationId xmlns:a16="http://schemas.microsoft.com/office/drawing/2014/main" id="{20CF31CC-C31D-80A2-5087-59803CE4C7EF}"/>
-              </a:ext>
-            </a:extLst>
-          </p:cNvPr>
-          <p:cNvCxnSpPr>
-            <a:cxnSpLocks/>
-            <a:stCxn id="5" idx="2"/>
-          </p:cNvCxnSpPr>
-          <p:nvPr/>
-        </p:nvCxnSpPr>
-        <p:spPr>
-          <a:xfrm>
-            <a:off x="6827520" y="2417207"/>
-            <a:ext cx="221091" cy="605661"/>
-          </a:xfrm>
-          <a:prstGeom prst="straightConnector1">
-            <a:avLst/>
-          </a:prstGeom>
-          <a:ln>
-            <a:tailEnd type="triangle"/>
-          </a:ln>
-        </p:spPr>
-        <p:style>
-          <a:lnRef idx="2">
-            <a:schemeClr val="accent1"/>
-          </a:lnRef>
-          <a:fillRef idx="0">
-            <a:schemeClr val="accent1"/>
-          </a:fillRef>
-          <a:effectRef idx="1">
-            <a:schemeClr val="accent1"/>
-          </a:effectRef>
-          <a:fontRef idx="minor">
-            <a:schemeClr val="tx1"/>
-          </a:fontRef>
-        </p:style>
-      </p:cxnSp>
-      <p:cxnSp>
-        <p:nvCxnSpPr>
-          <p:cNvPr id="38" name="Straight Arrow Connector 37">
-            <a:extLst>
-              <a:ext uri="{FF2B5EF4-FFF2-40B4-BE49-F238E27FC236}">
-                <a16:creationId xmlns:a16="http://schemas.microsoft.com/office/drawing/2014/main" id="{163CA99B-FAD8-9D45-CAC8-88559E6411AF}"/>
-              </a:ext>
-            </a:extLst>
-          </p:cNvPr>
-          <p:cNvCxnSpPr>
-            <a:cxnSpLocks/>
-            <a:stCxn id="8" idx="3"/>
-            <a:endCxn id="4" idx="1"/>
-          </p:cNvCxnSpPr>
-          <p:nvPr/>
-        </p:nvCxnSpPr>
-        <p:spPr>
-          <a:xfrm>
-            <a:off x="3235885" y="3503000"/>
-            <a:ext cx="897012" cy="522878"/>
-          </a:xfrm>
-          <a:prstGeom prst="straightConnector1">
-            <a:avLst/>
-          </a:prstGeom>
-          <a:ln>
-            <a:tailEnd type="triangle"/>
-          </a:ln>
-        </p:spPr>
-        <p:style>
-          <a:lnRef idx="2">
-            <a:schemeClr val="accent1"/>
-          </a:lnRef>
-          <a:fillRef idx="0">
-            <a:schemeClr val="accent1"/>
-          </a:fillRef>
-          <a:effectRef idx="1">
-            <a:schemeClr val="accent1"/>
-          </a:effectRef>
-          <a:fontRef idx="minor">
-            <a:schemeClr val="tx1"/>
-          </a:fontRef>
-        </p:style>
-      </p:cxnSp>
-      <p:sp>
-        <p:nvSpPr>
-          <p:cNvPr id="13" name="Rectangle 12">
-            <a:extLst>
-              <a:ext uri="{FF2B5EF4-FFF2-40B4-BE49-F238E27FC236}">
-                <a16:creationId xmlns:a16="http://schemas.microsoft.com/office/drawing/2014/main" id="{B5A8E065-053A-E562-AF10-735D6856E9EE}"/>
-              </a:ext>
-            </a:extLst>
-          </p:cNvPr>
-          <p:cNvSpPr/>
-          <p:nvPr/>
-        </p:nvSpPr>
-        <p:spPr>
-          <a:xfrm>
-            <a:off x="8099455" y="2731244"/>
-            <a:ext cx="1463040" cy="640080"/>
-          </a:xfrm>
-          <a:prstGeom prst="rect">
-            <a:avLst/>
-          </a:prstGeom>
-        </p:spPr>
-        <p:style>
-          <a:lnRef idx="2">
-            <a:schemeClr val="accent1"/>
-          </a:lnRef>
-          <a:fillRef idx="1">
-            <a:schemeClr val="lt1"/>
-          </a:fillRef>
-          <a:effectRef idx="0">
-            <a:schemeClr val="accent1"/>
-          </a:effectRef>
-          <a:fontRef idx="minor">
-            <a:schemeClr val="dk1"/>
-          </a:fontRef>
-        </p:style>
-        <p:txBody>
-          <a:bodyPr rtlCol="0" anchor="ctr"/>
-          <a:lstStyle/>
-          <a:p>
-            <a:pPr algn="ctr"/>
-            <a:r>
-              <a:rPr lang="en-US" dirty="0"/>
-              <a:t>Human Contribution</a:t>
-            </a:r>
-          </a:p>
-        </p:txBody>
-      </p:sp>
-      <p:sp>
-        <p:nvSpPr>
-          <p:cNvPr id="66" name="Rectangle 65">
-            <a:extLst>
-              <a:ext uri="{FF2B5EF4-FFF2-40B4-BE49-F238E27FC236}">
-                <a16:creationId xmlns:a16="http://schemas.microsoft.com/office/drawing/2014/main" id="{D8B07517-CA8E-C5A2-6756-2FDA4F3639B6}"/>
-              </a:ext>
-            </a:extLst>
-          </p:cNvPr>
-          <p:cNvSpPr/>
-          <p:nvPr/>
-        </p:nvSpPr>
-        <p:spPr>
-          <a:xfrm>
-            <a:off x="4132897" y="2731244"/>
-            <a:ext cx="1828800" cy="640080"/>
-          </a:xfrm>
-          <a:prstGeom prst="rect">
-            <a:avLst/>
-          </a:prstGeom>
-          <a:ln>
-            <a:prstDash val="dash"/>
-          </a:ln>
-        </p:spPr>
-        <p:style>
-          <a:lnRef idx="2">
-            <a:schemeClr val="accent1"/>
-          </a:lnRef>
-          <a:fillRef idx="1">
-            <a:schemeClr val="lt1"/>
-          </a:fillRef>
-          <a:effectRef idx="0">
-            <a:schemeClr val="accent1"/>
-          </a:effectRef>
-          <a:fontRef idx="minor">
-            <a:schemeClr val="dk1"/>
-          </a:fontRef>
-        </p:style>
-        <p:txBody>
-          <a:bodyPr rtlCol="0" anchor="ctr"/>
-          <a:lstStyle/>
-          <a:p>
-            <a:pPr algn="ctr"/>
-            <a:r>
-              <a:rPr lang="en-US" dirty="0"/>
-              <a:t>Shallow Quality Signal</a:t>
-            </a:r>
-          </a:p>
-        </p:txBody>
-      </p:sp>
-      <p:cxnSp>
-        <p:nvCxnSpPr>
-          <p:cNvPr id="25" name="Straight Arrow Connector 24">
-            <a:extLst>
-              <a:ext uri="{FF2B5EF4-FFF2-40B4-BE49-F238E27FC236}">
-                <a16:creationId xmlns:a16="http://schemas.microsoft.com/office/drawing/2014/main" id="{79A5E02A-1FD7-52A3-F603-75E65E280E29}"/>
-              </a:ext>
-            </a:extLst>
-          </p:cNvPr>
-          <p:cNvCxnSpPr>
-            <a:cxnSpLocks/>
-            <a:stCxn id="66" idx="3"/>
-            <a:endCxn id="13" idx="1"/>
-          </p:cNvCxnSpPr>
-          <p:nvPr/>
-        </p:nvCxnSpPr>
-        <p:spPr>
-          <a:xfrm>
-            <a:off x="5961697" y="3051284"/>
-            <a:ext cx="2137758" cy="0"/>
-          </a:xfrm>
-          <a:prstGeom prst="straightConnector1">
-            <a:avLst/>
-          </a:prstGeom>
-          <a:ln>
-            <a:tailEnd type="triangle"/>
-          </a:ln>
-        </p:spPr>
-        <p:style>
-          <a:lnRef idx="2">
-            <a:schemeClr val="accent1"/>
-          </a:lnRef>
-          <a:fillRef idx="0">
-            <a:schemeClr val="accent1"/>
-          </a:fillRef>
-          <a:effectRef idx="1">
-            <a:schemeClr val="accent1"/>
-          </a:effectRef>
-          <a:fontRef idx="minor">
-            <a:schemeClr val="tx1"/>
-          </a:fontRef>
-        </p:style>
-      </p:cxnSp>
-      <p:cxnSp>
-        <p:nvCxnSpPr>
-          <p:cNvPr id="30" name="Straight Arrow Connector 29">
-            <a:extLst>
-              <a:ext uri="{FF2B5EF4-FFF2-40B4-BE49-F238E27FC236}">
-                <a16:creationId xmlns:a16="http://schemas.microsoft.com/office/drawing/2014/main" id="{FCC4912E-8DA0-AF65-BFDA-59060C79724D}"/>
-              </a:ext>
-            </a:extLst>
-          </p:cNvPr>
-          <p:cNvCxnSpPr>
-            <a:cxnSpLocks/>
-            <a:stCxn id="4" idx="3"/>
-            <a:endCxn id="2" idx="1"/>
-          </p:cNvCxnSpPr>
-          <p:nvPr/>
-        </p:nvCxnSpPr>
-        <p:spPr>
-          <a:xfrm>
-            <a:off x="5961697" y="4025878"/>
-            <a:ext cx="4190508" cy="0"/>
-          </a:xfrm>
-          <a:prstGeom prst="straightConnector1">
-            <a:avLst/>
-          </a:prstGeom>
-          <a:ln>
-            <a:tailEnd type="triangle"/>
-          </a:ln>
-        </p:spPr>
-        <p:style>
-          <a:lnRef idx="2">
-            <a:schemeClr val="accent1"/>
-          </a:lnRef>
-          <a:fillRef idx="0">
-            <a:schemeClr val="accent1"/>
-          </a:fillRef>
-          <a:effectRef idx="1">
-            <a:schemeClr val="accent1"/>
-          </a:effectRef>
-          <a:fontRef idx="minor">
-            <a:schemeClr val="tx1"/>
-          </a:fontRef>
-        </p:style>
-      </p:cxnSp>
-      <p:cxnSp>
-        <p:nvCxnSpPr>
-          <p:cNvPr id="34" name="Straight Arrow Connector 33">
-            <a:extLst>
-              <a:ext uri="{FF2B5EF4-FFF2-40B4-BE49-F238E27FC236}">
-                <a16:creationId xmlns:a16="http://schemas.microsoft.com/office/drawing/2014/main" id="{8B4896BE-7441-28EA-894F-9199D0F59ACA}"/>
-              </a:ext>
-            </a:extLst>
-          </p:cNvPr>
-          <p:cNvCxnSpPr>
-            <a:cxnSpLocks/>
-          </p:cNvCxnSpPr>
-          <p:nvPr/>
-        </p:nvCxnSpPr>
-        <p:spPr>
-          <a:xfrm flipH="1">
-            <a:off x="6403315" y="2414205"/>
-            <a:ext cx="424205" cy="1610318"/>
-          </a:xfrm>
-          <a:prstGeom prst="straightConnector1">
-            <a:avLst/>
-          </a:prstGeom>
-          <a:ln>
-            <a:tailEnd type="triangle"/>
-          </a:ln>
-        </p:spPr>
-        <p:style>
-          <a:lnRef idx="2">
-            <a:schemeClr val="accent1"/>
-          </a:lnRef>
-          <a:fillRef idx="0">
-            <a:schemeClr val="accent1"/>
-          </a:fillRef>
-          <a:effectRef idx="1">
-            <a:schemeClr val="accent1"/>
-          </a:effectRef>
-          <a:fontRef idx="minor">
-            <a:schemeClr val="tx1"/>
-          </a:fontRef>
-        </p:style>
-      </p:cxnSp>
-      <p:sp>
-        <p:nvSpPr>
-          <p:cNvPr id="43" name="TextBox 42">
-            <a:extLst>
-              <a:ext uri="{FF2B5EF4-FFF2-40B4-BE49-F238E27FC236}">
-                <a16:creationId xmlns:a16="http://schemas.microsoft.com/office/drawing/2014/main" id="{D04E429B-D04E-D830-0F42-7823E311F068}"/>
-              </a:ext>
-            </a:extLst>
-          </p:cNvPr>
-          <p:cNvSpPr txBox="1"/>
-          <p:nvPr/>
-        </p:nvSpPr>
-        <p:spPr>
-          <a:xfrm>
-            <a:off x="7333890" y="2750366"/>
-            <a:ext cx="263214" cy="369332"/>
-          </a:xfrm>
-          <a:prstGeom prst="rect">
-            <a:avLst/>
-          </a:prstGeom>
-          <a:noFill/>
-        </p:spPr>
-        <p:txBody>
-          <a:bodyPr wrap="none" rtlCol="0">
-            <a:spAutoFit/>
-          </a:bodyPr>
-          <a:lstStyle/>
-          <a:p>
-            <a:r>
-              <a:rPr lang="en-US" dirty="0"/>
-              <a:t>-</a:t>
-            </a:r>
-          </a:p>
-        </p:txBody>
-      </p:sp>
-      <p:sp>
-        <p:nvSpPr>
-          <p:cNvPr id="44" name="TextBox 43">
-            <a:extLst>
-              <a:ext uri="{FF2B5EF4-FFF2-40B4-BE49-F238E27FC236}">
-                <a16:creationId xmlns:a16="http://schemas.microsoft.com/office/drawing/2014/main" id="{9035903C-BD90-3184-A0A4-C5CB5714B974}"/>
-              </a:ext>
-            </a:extLst>
-          </p:cNvPr>
-          <p:cNvSpPr txBox="1"/>
-          <p:nvPr/>
-        </p:nvSpPr>
-        <p:spPr>
-          <a:xfrm>
-            <a:off x="6788202" y="2417207"/>
-            <a:ext cx="308098" cy="369332"/>
-          </a:xfrm>
-          <a:prstGeom prst="rect">
-            <a:avLst/>
-          </a:prstGeom>
-          <a:noFill/>
-        </p:spPr>
-        <p:txBody>
-          <a:bodyPr wrap="none" rtlCol="0">
-            <a:spAutoFit/>
-          </a:bodyPr>
-          <a:lstStyle/>
-          <a:p>
-            <a:r>
-              <a:rPr lang="en-US" dirty="0"/>
-              <a:t>+</a:t>
-            </a:r>
-          </a:p>
-        </p:txBody>
-      </p:sp>
-      <p:sp>
-        <p:nvSpPr>
-          <p:cNvPr id="45" name="TextBox 44">
-            <a:extLst>
-              <a:ext uri="{FF2B5EF4-FFF2-40B4-BE49-F238E27FC236}">
-                <a16:creationId xmlns:a16="http://schemas.microsoft.com/office/drawing/2014/main" id="{9B7C9B9A-C7B7-A8FB-95EC-6893734ED202}"/>
-              </a:ext>
-            </a:extLst>
-          </p:cNvPr>
-          <p:cNvSpPr txBox="1"/>
-          <p:nvPr/>
-        </p:nvSpPr>
-        <p:spPr>
-          <a:xfrm>
-            <a:off x="7350912" y="3705838"/>
-            <a:ext cx="308098" cy="369332"/>
-          </a:xfrm>
-          <a:prstGeom prst="rect">
-            <a:avLst/>
-          </a:prstGeom>
-          <a:noFill/>
-        </p:spPr>
-        <p:txBody>
-          <a:bodyPr wrap="none" rtlCol="0">
-            <a:spAutoFit/>
-          </a:bodyPr>
-          <a:lstStyle/>
-          <a:p>
-            <a:r>
-              <a:rPr lang="en-US" dirty="0"/>
-              <a:t>+</a:t>
-            </a:r>
-          </a:p>
-        </p:txBody>
-      </p:sp>
-      <p:cxnSp>
-        <p:nvCxnSpPr>
-          <p:cNvPr id="46" name="Straight Arrow Connector 45">
-            <a:extLst>
-              <a:ext uri="{FF2B5EF4-FFF2-40B4-BE49-F238E27FC236}">
-                <a16:creationId xmlns:a16="http://schemas.microsoft.com/office/drawing/2014/main" id="{E22EFE17-B011-E863-12B5-2ADEF177FBCF}"/>
-              </a:ext>
-            </a:extLst>
-          </p:cNvPr>
-          <p:cNvCxnSpPr>
-            <a:cxnSpLocks/>
-            <a:stCxn id="5" idx="3"/>
-            <a:endCxn id="13" idx="0"/>
-          </p:cNvCxnSpPr>
-          <p:nvPr/>
-        </p:nvCxnSpPr>
-        <p:spPr>
-          <a:xfrm>
-            <a:off x="7559040" y="2097167"/>
-            <a:ext cx="1271935" cy="634077"/>
-          </a:xfrm>
-          <a:prstGeom prst="straightConnector1">
-            <a:avLst/>
-          </a:prstGeom>
-          <a:ln>
-            <a:tailEnd type="triangle"/>
-          </a:ln>
-        </p:spPr>
-        <p:style>
-          <a:lnRef idx="2">
-            <a:schemeClr val="accent1"/>
-          </a:lnRef>
-          <a:fillRef idx="0">
-            <a:schemeClr val="accent1"/>
-          </a:fillRef>
-          <a:effectRef idx="1">
-            <a:schemeClr val="accent1"/>
-          </a:effectRef>
-          <a:fontRef idx="minor">
-            <a:schemeClr val="tx1"/>
-          </a:fontRef>
-        </p:style>
-      </p:cxnSp>
-      <p:sp>
-        <p:nvSpPr>
-          <p:cNvPr id="65" name="TextBox 64">
-            <a:extLst>
-              <a:ext uri="{FF2B5EF4-FFF2-40B4-BE49-F238E27FC236}">
-                <a16:creationId xmlns:a16="http://schemas.microsoft.com/office/drawing/2014/main" id="{F3C3D307-BC62-3C96-9817-329AE1B566C4}"/>
-              </a:ext>
-            </a:extLst>
-          </p:cNvPr>
-          <p:cNvSpPr txBox="1"/>
-          <p:nvPr/>
-        </p:nvSpPr>
-        <p:spPr>
-          <a:xfrm>
-            <a:off x="6575613" y="3033011"/>
-            <a:ext cx="1350563" cy="369332"/>
-          </a:xfrm>
-          <a:prstGeom prst="rect">
-            <a:avLst/>
-          </a:prstGeom>
-          <a:noFill/>
-        </p:spPr>
-        <p:txBody>
-          <a:bodyPr wrap="none" rtlCol="0">
-            <a:spAutoFit/>
-          </a:bodyPr>
-          <a:lstStyle/>
-          <a:p>
-            <a:r>
-              <a:rPr lang="en-US" dirty="0"/>
-              <a:t>Deterrence </a:t>
-            </a:r>
-          </a:p>
-        </p:txBody>
-      </p:sp>
-      <p:sp>
-        <p:nvSpPr>
-          <p:cNvPr id="67" name="TextBox 66">
-            <a:extLst>
-              <a:ext uri="{FF2B5EF4-FFF2-40B4-BE49-F238E27FC236}">
-                <a16:creationId xmlns:a16="http://schemas.microsoft.com/office/drawing/2014/main" id="{933147AA-E4AE-9455-868A-78C7CEA81904}"/>
-              </a:ext>
-            </a:extLst>
-          </p:cNvPr>
-          <p:cNvSpPr txBox="1"/>
-          <p:nvPr/>
-        </p:nvSpPr>
-        <p:spPr>
-          <a:xfrm>
-            <a:off x="7926176" y="2097167"/>
-            <a:ext cx="1809598" cy="369332"/>
-          </a:xfrm>
-          <a:prstGeom prst="rect">
-            <a:avLst/>
-          </a:prstGeom>
-          <a:noFill/>
-        </p:spPr>
-        <p:txBody>
-          <a:bodyPr wrap="none" rtlCol="0">
-            <a:spAutoFit/>
-          </a:bodyPr>
-          <a:lstStyle/>
-          <a:p>
-            <a:r>
-              <a:rPr lang="en-US" dirty="0"/>
-              <a:t>Encouragement </a:t>
-            </a:r>
-          </a:p>
-        </p:txBody>
-      </p:sp>
-      <p:sp>
-        <p:nvSpPr>
-          <p:cNvPr id="73" name="TextBox 72">
-            <a:extLst>
-              <a:ext uri="{FF2B5EF4-FFF2-40B4-BE49-F238E27FC236}">
-                <a16:creationId xmlns:a16="http://schemas.microsoft.com/office/drawing/2014/main" id="{855839AB-1DCE-7244-4937-E1405EDED4AA}"/>
-              </a:ext>
-            </a:extLst>
-          </p:cNvPr>
-          <p:cNvSpPr txBox="1"/>
-          <p:nvPr/>
-        </p:nvSpPr>
-        <p:spPr>
-          <a:xfrm>
-            <a:off x="6430003" y="3429000"/>
-            <a:ext cx="263214" cy="369332"/>
-          </a:xfrm>
-          <a:prstGeom prst="rect">
-            <a:avLst/>
-          </a:prstGeom>
-          <a:noFill/>
-        </p:spPr>
-        <p:txBody>
-          <a:bodyPr wrap="none" rtlCol="0">
-            <a:spAutoFit/>
-          </a:bodyPr>
-          <a:lstStyle/>
-          <a:p>
-            <a:r>
-              <a:rPr lang="en-US" dirty="0"/>
-              <a:t>-</a:t>
-            </a:r>
-          </a:p>
-        </p:txBody>
-      </p:sp>
-      <p:sp>
-        <p:nvSpPr>
-          <p:cNvPr id="76" name="TextBox 75">
-            <a:extLst>
-              <a:ext uri="{FF2B5EF4-FFF2-40B4-BE49-F238E27FC236}">
-                <a16:creationId xmlns:a16="http://schemas.microsoft.com/office/drawing/2014/main" id="{9FC6D2C8-4666-5C91-EF60-6EC7E1E242D0}"/>
-              </a:ext>
-            </a:extLst>
-          </p:cNvPr>
-          <p:cNvSpPr txBox="1"/>
-          <p:nvPr/>
-        </p:nvSpPr>
-        <p:spPr>
-          <a:xfrm>
-            <a:off x="7503081" y="4024523"/>
-            <a:ext cx="1646156" cy="369332"/>
-          </a:xfrm>
-          <a:prstGeom prst="rect">
-            <a:avLst/>
-          </a:prstGeom>
-          <a:noFill/>
-        </p:spPr>
-        <p:txBody>
-          <a:bodyPr wrap="none" rtlCol="0">
-            <a:spAutoFit/>
-          </a:bodyPr>
-          <a:lstStyle/>
-          <a:p>
-            <a:r>
-              <a:rPr lang="en-US" dirty="0"/>
-              <a:t>Discrimination</a:t>
-            </a:r>
-          </a:p>
-        </p:txBody>
-      </p:sp>
-      <p:sp>
-        <p:nvSpPr>
-          <p:cNvPr id="2" name="Rectangle 1">
-            <a:extLst>
-              <a:ext uri="{FF2B5EF4-FFF2-40B4-BE49-F238E27FC236}">
-                <a16:creationId xmlns:a16="http://schemas.microsoft.com/office/drawing/2014/main" id="{76138B85-5EFD-F807-F510-2A190A2009EC}"/>
-              </a:ext>
-            </a:extLst>
-          </p:cNvPr>
-          <p:cNvSpPr/>
-          <p:nvPr/>
-        </p:nvSpPr>
-        <p:spPr>
-          <a:xfrm>
-            <a:off x="10152205" y="3705838"/>
-            <a:ext cx="1463040" cy="640080"/>
-          </a:xfrm>
-          <a:prstGeom prst="rect">
-            <a:avLst/>
-          </a:prstGeom>
-        </p:spPr>
-        <p:style>
-          <a:lnRef idx="2">
-            <a:schemeClr val="accent1"/>
-          </a:lnRef>
-          <a:fillRef idx="1">
-            <a:schemeClr val="lt1"/>
-          </a:fillRef>
-          <a:effectRef idx="0">
-            <a:schemeClr val="accent1"/>
-          </a:effectRef>
-          <a:fontRef idx="minor">
-            <a:schemeClr val="dk1"/>
-          </a:fontRef>
-        </p:style>
-        <p:txBody>
-          <a:bodyPr rtlCol="0" anchor="ctr"/>
-          <a:lstStyle/>
-          <a:p>
-            <a:pPr algn="ctr"/>
-            <a:r>
-              <a:rPr lang="en-US" dirty="0"/>
-              <a:t>Human Innovation</a:t>
-            </a:r>
-          </a:p>
-        </p:txBody>
-      </p:sp>
-      <p:cxnSp>
-        <p:nvCxnSpPr>
-          <p:cNvPr id="3" name="Straight Arrow Connector 2">
-            <a:extLst>
-              <a:ext uri="{FF2B5EF4-FFF2-40B4-BE49-F238E27FC236}">
-                <a16:creationId xmlns:a16="http://schemas.microsoft.com/office/drawing/2014/main" id="{9FE21239-43EF-243C-CAA7-EB648A16EB07}"/>
-              </a:ext>
-            </a:extLst>
-          </p:cNvPr>
-          <p:cNvCxnSpPr>
-            <a:cxnSpLocks/>
-            <a:stCxn id="4" idx="3"/>
-            <a:endCxn id="6" idx="0"/>
-          </p:cNvCxnSpPr>
-          <p:nvPr/>
-        </p:nvCxnSpPr>
-        <p:spPr>
-          <a:xfrm>
-            <a:off x="5961697" y="4025878"/>
-            <a:ext cx="3566930" cy="520598"/>
-          </a:xfrm>
-          <a:prstGeom prst="bentConnector2">
-            <a:avLst/>
-          </a:prstGeom>
-          <a:ln>
-            <a:prstDash val="dash"/>
-            <a:tailEnd type="triangle"/>
-          </a:ln>
-        </p:spPr>
-        <p:style>
-          <a:lnRef idx="2">
-            <a:schemeClr val="accent1"/>
-          </a:lnRef>
-          <a:fillRef idx="0">
-            <a:schemeClr val="accent1"/>
-          </a:fillRef>
-          <a:effectRef idx="1">
-            <a:schemeClr val="accent1"/>
-          </a:effectRef>
-          <a:fontRef idx="minor">
-            <a:schemeClr val="tx1"/>
-          </a:fontRef>
-        </p:style>
-      </p:cxnSp>
-      <p:cxnSp>
-        <p:nvCxnSpPr>
-          <p:cNvPr id="12" name="Straight Arrow Connector 11">
-            <a:extLst>
-              <a:ext uri="{FF2B5EF4-FFF2-40B4-BE49-F238E27FC236}">
-                <a16:creationId xmlns:a16="http://schemas.microsoft.com/office/drawing/2014/main" id="{5F12A5A5-D88A-0694-FF0E-0B0452F2F007}"/>
-              </a:ext>
-            </a:extLst>
-          </p:cNvPr>
-          <p:cNvCxnSpPr>
-            <a:cxnSpLocks/>
-            <a:stCxn id="13" idx="2"/>
-            <a:endCxn id="2" idx="1"/>
-          </p:cNvCxnSpPr>
-          <p:nvPr/>
-        </p:nvCxnSpPr>
-        <p:spPr>
-          <a:xfrm>
-            <a:off x="8830975" y="3371324"/>
-            <a:ext cx="1321230" cy="654554"/>
-          </a:xfrm>
-          <a:prstGeom prst="straightConnector1">
-            <a:avLst/>
-          </a:prstGeom>
-          <a:ln>
-            <a:prstDash val="solid"/>
-            <a:tailEnd type="triangle"/>
-          </a:ln>
-        </p:spPr>
-        <p:style>
-          <a:lnRef idx="2">
-            <a:schemeClr val="accent1"/>
-          </a:lnRef>
-          <a:fillRef idx="0">
-            <a:schemeClr val="accent1"/>
-          </a:fillRef>
-          <a:effectRef idx="1">
-            <a:schemeClr val="accent1"/>
-          </a:effectRef>
-          <a:fontRef idx="minor">
-            <a:schemeClr val="tx1"/>
-          </a:fontRef>
-        </p:style>
-      </p:cxnSp>
-      <p:sp>
-        <p:nvSpPr>
-          <p:cNvPr id="6" name="Rectangle 5">
-            <a:extLst>
-              <a:ext uri="{FF2B5EF4-FFF2-40B4-BE49-F238E27FC236}">
-                <a16:creationId xmlns:a16="http://schemas.microsoft.com/office/drawing/2014/main" id="{291D9B04-49CD-90BA-5C8B-FD2532A19B66}"/>
-              </a:ext>
-            </a:extLst>
-          </p:cNvPr>
-          <p:cNvSpPr/>
-          <p:nvPr/>
-        </p:nvSpPr>
-        <p:spPr>
-          <a:xfrm>
-            <a:off x="8797107" y="4546476"/>
-            <a:ext cx="1463040" cy="640080"/>
-          </a:xfrm>
-          <a:prstGeom prst="rect">
-            <a:avLst/>
-          </a:prstGeom>
-          <a:ln>
-            <a:prstDash val="dash"/>
-          </a:ln>
-        </p:spPr>
-        <p:style>
-          <a:lnRef idx="2">
-            <a:schemeClr val="accent1"/>
-          </a:lnRef>
-          <a:fillRef idx="1">
-            <a:schemeClr val="lt1"/>
-          </a:fillRef>
-          <a:effectRef idx="0">
-            <a:schemeClr val="accent1"/>
-          </a:effectRef>
-          <a:fontRef idx="minor">
-            <a:schemeClr val="dk1"/>
-          </a:fontRef>
-        </p:style>
-        <p:txBody>
-          <a:bodyPr rtlCol="0" anchor="ctr"/>
-          <a:lstStyle/>
-          <a:p>
-            <a:pPr algn="ctr"/>
-            <a:r>
-              <a:rPr lang="en-US" dirty="0"/>
-              <a:t>Human Recognition</a:t>
-            </a:r>
-          </a:p>
-        </p:txBody>
-      </p:sp>
-    </p:spTree>
-    <p:extLst>
-      <p:ext uri="{BB962C8B-B14F-4D97-AF65-F5344CB8AC3E}">
-        <p14:creationId xmlns:p14="http://schemas.microsoft.com/office/powerpoint/2010/main" val="2482353929"/>
       </p:ext>
     </p:extLst>
   </p:cSld>
